--- a/lecture_pptx/session17_assets/ワーク01_設計.pptx
+++ b/lecture_pptx/session17_assets/ワーク01_設計.pptx
@@ -13,9 +13,11 @@
     <p:sldId id="261" r:id="rId7"/>
     <p:sldId id="262" r:id="rId8"/>
     <p:sldId id="263" r:id="rId9"/>
+    <p:sldId id="264" r:id="rId10"/>
+    <p:sldId id="265" r:id="rId11"/>
   </p:sldIdLst>
   <p:notesMasterIdLst>
-    <p:notesMasterId r:id="rId10"/>
+    <p:notesMasterId r:id="rId12"/>
   </p:notesMasterIdLst>
   <p:sldSz cx="9144000" cy="5143500"/>
   <p:notesSz cx="5143500" cy="9144000"/>
@@ -551,6 +553,94 @@
 </p:notes>
 </file>
 
+<file path=ppt/notesSlides/notesSlide10.xml><?xml version="1.0" encoding="utf-8"?>
+<p:notes xmlns:a="http://schemas.openxmlformats.org/drawingml/2006/main" xmlns:r="http://schemas.openxmlformats.org/officeDocument/2006/relationships" xmlns:p="http://schemas.openxmlformats.org/presentationml/2006/main">
+  <p:cSld>
+    <p:spTree>
+      <p:nvGrpSpPr>
+        <p:cNvPr id="1" name=""/>
+        <p:cNvGrpSpPr/>
+        <p:nvPr/>
+      </p:nvGrpSpPr>
+      <p:grpSpPr>
+        <a:xfrm>
+          <a:off x="0" y="0"/>
+          <a:ext cx="0" cy="0"/>
+          <a:chOff x="0" y="0"/>
+          <a:chExt cx="0" cy="0"/>
+        </a:xfrm>
+      </p:grpSpPr>
+      <p:sp>
+        <p:nvSpPr>
+          <p:cNvPr id="2" name="Slide Image Placeholder 1"/>
+          <p:cNvSpPr>
+            <a:spLocks noGrp="1" noRot="1" noChangeAspect="1"/>
+          </p:cNvSpPr>
+          <p:nvPr>
+            <p:ph type="sldImg"/>
+          </p:nvPr>
+        </p:nvSpPr>
+        <p:spPr/>
+      </p:sp>
+      <p:sp>
+        <p:nvSpPr>
+          <p:cNvPr id="3" name="Notes Placeholder 2"/>
+          <p:cNvSpPr>
+            <a:spLocks noGrp="1"/>
+          </p:cNvSpPr>
+          <p:nvPr>
+            <p:ph type="body" idx="1"/>
+          </p:nvPr>
+        </p:nvSpPr>
+        <p:spPr/>
+        <p:txBody>
+          <a:bodyPr/>
+          <a:lstStyle/>
+          <a:p>
+            <a:r>
+              <a:rPr lang="en-US" dirty="0"/>
+              <a:t/>
+            </a:r>
+            <a:endParaRPr lang="en-US" dirty="0"/>
+          </a:p>
+        </p:txBody>
+      </p:sp>
+      <p:sp>
+        <p:nvSpPr>
+          <p:cNvPr id="4" name="Slide Number Placeholder 3"/>
+          <p:cNvSpPr>
+            <a:spLocks noGrp="1"/>
+          </p:cNvSpPr>
+          <p:nvPr>
+            <p:ph type="sldNum" sz="quarter" idx="10"/>
+          </p:nvPr>
+        </p:nvSpPr>
+        <p:spPr/>
+        <p:txBody>
+          <a:bodyPr/>
+          <a:lstStyle/>
+          <a:p>
+            <a:fld id="{F7021451-1387-4CA6-816F-3879F97B5CBC}" type="slidenum">
+              <a:rPr lang="en-US"/>
+              <a:t>10</a:t>
+            </a:fld>
+            <a:endParaRPr lang="en-US"/>
+          </a:p>
+        </p:txBody>
+      </p:sp>
+    </p:spTree>
+    <p:extLst>
+      <p:ext uri="{BB962C8B-B14F-4D97-AF65-F5344CB8AC3E}">
+        <p14:creationId xmlns:p14="http://schemas.microsoft.com/office/powerpoint/2010/main" val="1024086991"/>
+      </p:ext>
+    </p:extLst>
+  </p:cSld>
+  <p:clrMapOvr>
+    <a:masterClrMapping/>
+  </p:clrMapOvr>
+</p:notes>
+</file>
+
 <file path=ppt/notesSlides/notesSlide2.xml><?xml version="1.0" encoding="utf-8"?>
 <p:notes xmlns:a="http://schemas.openxmlformats.org/drawingml/2006/main" xmlns:r="http://schemas.openxmlformats.org/officeDocument/2006/relationships" xmlns:p="http://schemas.openxmlformats.org/presentationml/2006/main">
   <p:cSld>
@@ -1149,6 +1239,94 @@
             <a:fld id="{F7021451-1387-4CA6-816F-3879F97B5CBC}" type="slidenum">
               <a:rPr lang="en-US"/>
               <a:t>8</a:t>
+            </a:fld>
+            <a:endParaRPr lang="en-US"/>
+          </a:p>
+        </p:txBody>
+      </p:sp>
+    </p:spTree>
+    <p:extLst>
+      <p:ext uri="{BB962C8B-B14F-4D97-AF65-F5344CB8AC3E}">
+        <p14:creationId xmlns:p14="http://schemas.microsoft.com/office/powerpoint/2010/main" val="1024086991"/>
+      </p:ext>
+    </p:extLst>
+  </p:cSld>
+  <p:clrMapOvr>
+    <a:masterClrMapping/>
+  </p:clrMapOvr>
+</p:notes>
+</file>
+
+<file path=ppt/notesSlides/notesSlide9.xml><?xml version="1.0" encoding="utf-8"?>
+<p:notes xmlns:a="http://schemas.openxmlformats.org/drawingml/2006/main" xmlns:r="http://schemas.openxmlformats.org/officeDocument/2006/relationships" xmlns:p="http://schemas.openxmlformats.org/presentationml/2006/main">
+  <p:cSld>
+    <p:spTree>
+      <p:nvGrpSpPr>
+        <p:cNvPr id="1" name=""/>
+        <p:cNvGrpSpPr/>
+        <p:nvPr/>
+      </p:nvGrpSpPr>
+      <p:grpSpPr>
+        <a:xfrm>
+          <a:off x="0" y="0"/>
+          <a:ext cx="0" cy="0"/>
+          <a:chOff x="0" y="0"/>
+          <a:chExt cx="0" cy="0"/>
+        </a:xfrm>
+      </p:grpSpPr>
+      <p:sp>
+        <p:nvSpPr>
+          <p:cNvPr id="2" name="Slide Image Placeholder 1"/>
+          <p:cNvSpPr>
+            <a:spLocks noGrp="1" noRot="1" noChangeAspect="1"/>
+          </p:cNvSpPr>
+          <p:nvPr>
+            <p:ph type="sldImg"/>
+          </p:nvPr>
+        </p:nvSpPr>
+        <p:spPr/>
+      </p:sp>
+      <p:sp>
+        <p:nvSpPr>
+          <p:cNvPr id="3" name="Notes Placeholder 2"/>
+          <p:cNvSpPr>
+            <a:spLocks noGrp="1"/>
+          </p:cNvSpPr>
+          <p:nvPr>
+            <p:ph type="body" idx="1"/>
+          </p:nvPr>
+        </p:nvSpPr>
+        <p:spPr/>
+        <p:txBody>
+          <a:bodyPr/>
+          <a:lstStyle/>
+          <a:p>
+            <a:r>
+              <a:rPr lang="en-US" dirty="0"/>
+              <a:t/>
+            </a:r>
+            <a:endParaRPr lang="en-US" dirty="0"/>
+          </a:p>
+        </p:txBody>
+      </p:sp>
+      <p:sp>
+        <p:nvSpPr>
+          <p:cNvPr id="4" name="Slide Number Placeholder 3"/>
+          <p:cNvSpPr>
+            <a:spLocks noGrp="1"/>
+          </p:cNvSpPr>
+          <p:nvPr>
+            <p:ph type="sldNum" sz="quarter" idx="10"/>
+          </p:nvPr>
+        </p:nvSpPr>
+        <p:spPr/>
+        <p:txBody>
+          <a:bodyPr/>
+          <a:lstStyle/>
+          <a:p>
+            <a:fld id="{F7021451-1387-4CA6-816F-3879F97B5CBC}" type="slidenum">
+              <a:rPr lang="en-US"/>
+              <a:t>9</a:t>
             </a:fld>
             <a:endParaRPr lang="en-US"/>
           </a:p>
@@ -1520,14 +1698,36 @@
       </p:sp>
       <p:sp>
         <p:nvSpPr>
-          <p:cNvPr id="3" name="Text 1"/>
-          <p:cNvSpPr/>
-          <p:nvPr/>
-        </p:nvSpPr>
-        <p:spPr>
-          <a:xfrm>
-            <a:off x="548640" y="1188720"/>
-            <a:ext cx="8046720" cy="960120"/>
+          <p:cNvPr id="3" name="Shape 1"/>
+          <p:cNvSpPr/>
+          <p:nvPr/>
+        </p:nvSpPr>
+        <p:spPr>
+          <a:xfrm>
+            <a:off x="548640" y="640080"/>
+            <a:ext cx="1463040" cy="457200"/>
+          </a:xfrm>
+          <a:prstGeom prst="roundRect">
+            <a:avLst>
+              <a:gd name="adj" fmla="val 12000"/>
+            </a:avLst>
+          </a:prstGeom>
+          <a:solidFill>
+            <a:srgbClr val="E8A33D"/>
+          </a:solidFill>
+          <a:ln/>
+        </p:spPr>
+      </p:sp>
+      <p:sp>
+        <p:nvSpPr>
+          <p:cNvPr id="4" name="Text 2"/>
+          <p:cNvSpPr/>
+          <p:nvPr/>
+        </p:nvSpPr>
+        <p:spPr>
+          <a:xfrm>
+            <a:off x="548640" y="640080"/>
+            <a:ext cx="1463040" cy="457200"/>
           </a:xfrm>
           <a:prstGeom prst="rect">
             <a:avLst/>
@@ -1539,33 +1739,72 @@
           <a:bodyPr wrap="square" rtlCol="0" anchor="ctr"/>
           <a:lstStyle/>
           <a:p>
-            <a:pPr algn="l" indent="0" marL="0">
-              <a:buNone/>
-            </a:pPr>
-            <a:r>
-              <a:rPr lang="en-US" sz="3800" b="1" dirty="0">
-                <a:solidFill>
-                  <a:srgbClr val="FFFFFF"/>
+            <a:pPr algn="ctr" indent="0" marL="0">
+              <a:buNone/>
+            </a:pPr>
+            <a:r>
+              <a:rPr lang="en-US" sz="1500" b="1" dirty="0">
+                <a:solidFill>
+                  <a:srgbClr val="1F3A5F"/>
                 </a:solidFill>
                 <a:latin typeface="Yu Gothic UI Semibold" pitchFamily="34" charset="0"/>
                 <a:ea typeface="Yu Gothic UI Semibold" pitchFamily="34" charset="-122"/>
                 <a:cs typeface="Yu Gothic UI Semibold" pitchFamily="34" charset="-120"/>
               </a:rPr>
-              <a:t>ワーク① 設計書を作る (DB / 判断基準 / UI / 独自)</a:t>
-            </a:r>
-            <a:endParaRPr lang="en-US" sz="3800" dirty="0"/>
-          </a:p>
-        </p:txBody>
-      </p:sp>
-      <p:sp>
-        <p:nvSpPr>
-          <p:cNvPr id="4" name="Text 2"/>
-          <p:cNvSpPr/>
-          <p:nvPr/>
-        </p:nvSpPr>
-        <p:spPr>
-          <a:xfrm>
-            <a:off x="548640" y="2331720"/>
+              <a:t>ステップ ①</a:t>
+            </a:r>
+            <a:endParaRPr lang="en-US" sz="1500" dirty="0"/>
+          </a:p>
+        </p:txBody>
+      </p:sp>
+      <p:sp>
+        <p:nvSpPr>
+          <p:cNvPr id="5" name="Text 3"/>
+          <p:cNvSpPr/>
+          <p:nvPr/>
+        </p:nvSpPr>
+        <p:spPr>
+          <a:xfrm>
+            <a:off x="548640" y="1280160"/>
+            <a:ext cx="8046720" cy="914400"/>
+          </a:xfrm>
+          <a:prstGeom prst="rect">
+            <a:avLst/>
+          </a:prstGeom>
+          <a:noFill/>
+          <a:ln/>
+        </p:spPr>
+        <p:txBody>
+          <a:bodyPr wrap="square" rtlCol="0" anchor="ctr"/>
+          <a:lstStyle/>
+          <a:p>
+            <a:pPr algn="l" indent="0" marL="0">
+              <a:buNone/>
+            </a:pPr>
+            <a:r>
+              <a:rPr lang="en-US" sz="3400" b="1" dirty="0">
+                <a:solidFill>
+                  <a:srgbClr val="FFFFFF"/>
+                </a:solidFill>
+                <a:latin typeface="Yu Gothic UI Semibold" pitchFamily="34" charset="0"/>
+                <a:ea typeface="Yu Gothic UI Semibold" pitchFamily="34" charset="-122"/>
+                <a:cs typeface="Yu Gothic UI Semibold" pitchFamily="34" charset="-120"/>
+              </a:rPr>
+              <a:t>設計書を作る</a:t>
+            </a:r>
+            <a:endParaRPr lang="en-US" sz="3400" dirty="0"/>
+          </a:p>
+        </p:txBody>
+      </p:sp>
+      <p:sp>
+        <p:nvSpPr>
+          <p:cNvPr id="6" name="Text 4"/>
+          <p:cNvSpPr/>
+          <p:nvPr/>
+        </p:nvSpPr>
+        <p:spPr>
+          <a:xfrm>
+            <a:off x="548640" y="2423160"/>
             <a:ext cx="8046720" cy="640080"/>
           </a:xfrm>
           <a:prstGeom prst="rect">
@@ -1582,7 +1821,7 @@
               <a:buNone/>
             </a:pPr>
             <a:r>
-              <a:rPr lang="en-US" sz="1900" dirty="0">
+              <a:rPr lang="en-US" sz="1700" dirty="0">
                 <a:solidFill>
                   <a:srgbClr val="E8A33D"/>
                 </a:solidFill>
@@ -1590,9 +1829,514 @@
                 <a:ea typeface="Yu Gothic UI" pitchFamily="34" charset="-122"/>
                 <a:cs typeface="Yu Gothic UI" pitchFamily="34" charset="-120"/>
               </a:rPr>
-              <a:t>コーディング前に、データの持ち方・判断根拠・画面・強みを 全て言語化する</a:t>
-            </a:r>
-            <a:endParaRPr lang="en-US" sz="1900" dirty="0"/>
+              <a:t>まず "何を作るか" をハッキリさせてから、コードは書き始めよう</a:t>
+            </a:r>
+            <a:endParaRPr lang="en-US" sz="1700" dirty="0"/>
+          </a:p>
+        </p:txBody>
+      </p:sp>
+    </p:spTree>
+  </p:cSld>
+  <p:clrMapOvr>
+    <a:masterClrMapping/>
+  </p:clrMapOvr>
+</p:sld>
+</file>
+
+<file path=ppt/slides/slide10.xml><?xml version="1.0" encoding="utf-8"?>
+<p:sld xmlns:a="http://schemas.openxmlformats.org/drawingml/2006/main" xmlns:r="http://schemas.openxmlformats.org/officeDocument/2006/relationships" xmlns:p="http://schemas.openxmlformats.org/presentationml/2006/main">
+  <p:cSld name="Slide 10">
+    <p:bg>
+      <p:bgPr>
+        <a:solidFill>
+          <a:srgbClr val="FFFFFF"/>
+        </a:solidFill>
+      </p:bgPr>
+    </p:bg>
+    <p:spTree>
+      <p:nvGrpSpPr>
+        <p:cNvPr id="1" name=""/>
+        <p:cNvGrpSpPr/>
+        <p:nvPr/>
+      </p:nvGrpSpPr>
+      <p:grpSpPr>
+        <a:xfrm>
+          <a:off x="0" y="0"/>
+          <a:ext cx="0" cy="0"/>
+          <a:chOff x="0" y="0"/>
+          <a:chExt cx="0" cy="0"/>
+        </a:xfrm>
+      </p:grpSpPr>
+      <p:sp>
+        <p:nvSpPr>
+          <p:cNvPr id="2" name="Shape 0"/>
+          <p:cNvSpPr/>
+          <p:nvPr/>
+        </p:nvSpPr>
+        <p:spPr>
+          <a:xfrm>
+            <a:off x="0" y="0"/>
+            <a:ext cx="164592" cy="5143500"/>
+          </a:xfrm>
+          <a:prstGeom prst="rect">
+            <a:avLst/>
+          </a:prstGeom>
+          <a:solidFill>
+            <a:srgbClr val="0E7C86"/>
+          </a:solidFill>
+          <a:ln/>
+        </p:spPr>
+      </p:sp>
+      <p:sp>
+        <p:nvSpPr>
+          <p:cNvPr id="3" name="Text 1"/>
+          <p:cNvSpPr/>
+          <p:nvPr/>
+        </p:nvSpPr>
+        <p:spPr>
+          <a:xfrm>
+            <a:off x="411480" y="182880"/>
+            <a:ext cx="8412480" cy="548640"/>
+          </a:xfrm>
+          <a:prstGeom prst="rect">
+            <a:avLst/>
+          </a:prstGeom>
+          <a:noFill/>
+          <a:ln/>
+        </p:spPr>
+        <p:txBody>
+          <a:bodyPr wrap="square" rtlCol="0" anchor="ctr"/>
+          <a:lstStyle/>
+          <a:p>
+            <a:pPr indent="0" marL="0">
+              <a:buNone/>
+            </a:pPr>
+            <a:r>
+              <a:rPr lang="en-US" sz="2400" b="1" dirty="0">
+                <a:solidFill>
+                  <a:srgbClr val="1F3A5F"/>
+                </a:solidFill>
+                <a:latin typeface="Yu Gothic UI Semibold" pitchFamily="34" charset="0"/>
+                <a:ea typeface="Yu Gothic UI Semibold" pitchFamily="34" charset="-122"/>
+                <a:cs typeface="Yu Gothic UI Semibold" pitchFamily="34" charset="-120"/>
+              </a:rPr>
+              <a:t>今日の持ち帰り</a:t>
+            </a:r>
+            <a:endParaRPr lang="en-US" sz="2400" dirty="0"/>
+          </a:p>
+        </p:txBody>
+      </p:sp>
+      <p:sp>
+        <p:nvSpPr>
+          <p:cNvPr id="4" name="Text 2"/>
+          <p:cNvSpPr/>
+          <p:nvPr/>
+        </p:nvSpPr>
+        <p:spPr>
+          <a:xfrm>
+            <a:off x="411480" y="749808"/>
+            <a:ext cx="8412480" cy="365760"/>
+          </a:xfrm>
+          <a:prstGeom prst="rect">
+            <a:avLst/>
+          </a:prstGeom>
+          <a:noFill/>
+          <a:ln/>
+        </p:spPr>
+        <p:txBody>
+          <a:bodyPr wrap="square" rtlCol="0" anchor="ctr"/>
+          <a:lstStyle/>
+          <a:p>
+            <a:pPr indent="0" marL="0">
+              <a:buNone/>
+            </a:pPr>
+            <a:r>
+              <a:rPr lang="en-US" sz="1300" i="1" dirty="0">
+                <a:solidFill>
+                  <a:srgbClr val="555555"/>
+                </a:solidFill>
+                <a:latin typeface="Yu Gothic UI" pitchFamily="34" charset="0"/>
+                <a:ea typeface="Yu Gothic UI" pitchFamily="34" charset="-122"/>
+                <a:cs typeface="Yu Gothic UI" pitchFamily="34" charset="-120"/>
+              </a:rPr>
+              <a:t>ステップ① 完了 = 設計書 = AI と自分たちへの "指示書" が完成</a:t>
+            </a:r>
+            <a:endParaRPr lang="en-US" sz="1300" dirty="0"/>
+          </a:p>
+        </p:txBody>
+      </p:sp>
+      <p:sp>
+        <p:nvSpPr>
+          <p:cNvPr id="5" name="Shape 3"/>
+          <p:cNvSpPr/>
+          <p:nvPr/>
+        </p:nvSpPr>
+        <p:spPr>
+          <a:xfrm>
+            <a:off x="411480" y="1234440"/>
+            <a:ext cx="8321040" cy="1097280"/>
+          </a:xfrm>
+          <a:prstGeom prst="roundRect">
+            <a:avLst>
+              <a:gd name="adj" fmla="val 6667"/>
+            </a:avLst>
+          </a:prstGeom>
+          <a:solidFill>
+            <a:srgbClr val="F4F6F9"/>
+          </a:solidFill>
+          <a:ln w="19050">
+            <a:solidFill>
+              <a:srgbClr val="0E7C86"/>
+            </a:solidFill>
+            <a:prstDash val="solid"/>
+          </a:ln>
+        </p:spPr>
+      </p:sp>
+      <p:sp>
+        <p:nvSpPr>
+          <p:cNvPr id="6" name="Shape 4"/>
+          <p:cNvSpPr/>
+          <p:nvPr/>
+        </p:nvSpPr>
+        <p:spPr>
+          <a:xfrm>
+            <a:off x="411480" y="1234440"/>
+            <a:ext cx="109728" cy="1097280"/>
+          </a:xfrm>
+          <a:prstGeom prst="rect">
+            <a:avLst/>
+          </a:prstGeom>
+          <a:solidFill>
+            <a:srgbClr val="0E7C86"/>
+          </a:solidFill>
+          <a:ln/>
+        </p:spPr>
+      </p:sp>
+      <p:sp>
+        <p:nvSpPr>
+          <p:cNvPr id="7" name="Text 5"/>
+          <p:cNvSpPr/>
+          <p:nvPr/>
+        </p:nvSpPr>
+        <p:spPr>
+          <a:xfrm>
+            <a:off x="685800" y="1344168"/>
+            <a:ext cx="8001000" cy="365760"/>
+          </a:xfrm>
+          <a:prstGeom prst="rect">
+            <a:avLst/>
+          </a:prstGeom>
+          <a:noFill/>
+          <a:ln/>
+        </p:spPr>
+        <p:txBody>
+          <a:bodyPr wrap="square" rtlCol="0" anchor="ctr"/>
+          <a:lstStyle/>
+          <a:p>
+            <a:pPr indent="0" marL="0">
+              <a:buNone/>
+            </a:pPr>
+            <a:r>
+              <a:rPr lang="en-US" sz="1600" b="1" dirty="0">
+                <a:solidFill>
+                  <a:srgbClr val="1F3A5F"/>
+                </a:solidFill>
+                <a:latin typeface="Yu Gothic UI Semibold" pitchFamily="34" charset="0"/>
+                <a:ea typeface="Yu Gothic UI Semibold" pitchFamily="34" charset="-122"/>
+                <a:cs typeface="Yu Gothic UI Semibold" pitchFamily="34" charset="-120"/>
+              </a:rPr>
+              <a:t>設計書 が「AI への指示書」になる</a:t>
+            </a:r>
+            <a:endParaRPr lang="en-US" sz="1600" dirty="0"/>
+          </a:p>
+        </p:txBody>
+      </p:sp>
+      <p:sp>
+        <p:nvSpPr>
+          <p:cNvPr id="8" name="Text 6"/>
+          <p:cNvSpPr/>
+          <p:nvPr/>
+        </p:nvSpPr>
+        <p:spPr>
+          <a:xfrm>
+            <a:off x="685800" y="1737360"/>
+            <a:ext cx="8001000" cy="502920"/>
+          </a:xfrm>
+          <a:prstGeom prst="rect">
+            <a:avLst/>
+          </a:prstGeom>
+          <a:noFill/>
+          <a:ln/>
+        </p:spPr>
+        <p:txBody>
+          <a:bodyPr wrap="square" rtlCol="0" anchor="t"/>
+          <a:lstStyle/>
+          <a:p>
+            <a:pPr indent="0" marL="0">
+              <a:buNone/>
+            </a:pPr>
+            <a:r>
+              <a:rPr lang="en-US" sz="1200" dirty="0">
+                <a:solidFill>
+                  <a:srgbClr val="1A1A1A"/>
+                </a:solidFill>
+                <a:latin typeface="Yu Gothic UI" pitchFamily="34" charset="0"/>
+                <a:ea typeface="Yu Gothic UI" pitchFamily="34" charset="-122"/>
+                <a:cs typeface="Yu Gothic UI" pitchFamily="34" charset="-120"/>
+              </a:rPr>
+              <a:t>この設計書を Gemini に見せれば「この通りに作って」と依頼できる状態になりました。</a:t>
+            </a:r>
+            <a:endParaRPr lang="en-US" sz="1200" dirty="0"/>
+          </a:p>
+        </p:txBody>
+      </p:sp>
+      <p:sp>
+        <p:nvSpPr>
+          <p:cNvPr id="9" name="Shape 7"/>
+          <p:cNvSpPr/>
+          <p:nvPr/>
+        </p:nvSpPr>
+        <p:spPr>
+          <a:xfrm>
+            <a:off x="411480" y="2468880"/>
+            <a:ext cx="8321040" cy="1097280"/>
+          </a:xfrm>
+          <a:prstGeom prst="roundRect">
+            <a:avLst>
+              <a:gd name="adj" fmla="val 6667"/>
+            </a:avLst>
+          </a:prstGeom>
+          <a:solidFill>
+            <a:srgbClr val="F4F6F9"/>
+          </a:solidFill>
+          <a:ln w="19050">
+            <a:solidFill>
+              <a:srgbClr val="E8A33D"/>
+            </a:solidFill>
+            <a:prstDash val="solid"/>
+          </a:ln>
+        </p:spPr>
+      </p:sp>
+      <p:sp>
+        <p:nvSpPr>
+          <p:cNvPr id="10" name="Shape 8"/>
+          <p:cNvSpPr/>
+          <p:nvPr/>
+        </p:nvSpPr>
+        <p:spPr>
+          <a:xfrm>
+            <a:off x="411480" y="2468880"/>
+            <a:ext cx="109728" cy="1097280"/>
+          </a:xfrm>
+          <a:prstGeom prst="rect">
+            <a:avLst/>
+          </a:prstGeom>
+          <a:solidFill>
+            <a:srgbClr val="E8A33D"/>
+          </a:solidFill>
+          <a:ln/>
+        </p:spPr>
+      </p:sp>
+      <p:sp>
+        <p:nvSpPr>
+          <p:cNvPr id="11" name="Text 9"/>
+          <p:cNvSpPr/>
+          <p:nvPr/>
+        </p:nvSpPr>
+        <p:spPr>
+          <a:xfrm>
+            <a:off x="685800" y="2578608"/>
+            <a:ext cx="8001000" cy="365760"/>
+          </a:xfrm>
+          <a:prstGeom prst="rect">
+            <a:avLst/>
+          </a:prstGeom>
+          <a:noFill/>
+          <a:ln/>
+        </p:spPr>
+        <p:txBody>
+          <a:bodyPr wrap="square" rtlCol="0" anchor="ctr"/>
+          <a:lstStyle/>
+          <a:p>
+            <a:pPr indent="0" marL="0">
+              <a:buNone/>
+            </a:pPr>
+            <a:r>
+              <a:rPr lang="en-US" sz="1600" b="1" dirty="0">
+                <a:solidFill>
+                  <a:srgbClr val="1F3A5F"/>
+                </a:solidFill>
+                <a:latin typeface="Yu Gothic UI Semibold" pitchFamily="34" charset="0"/>
+                <a:ea typeface="Yu Gothic UI Semibold" pitchFamily="34" charset="-122"/>
+                <a:cs typeface="Yu Gothic UI Semibold" pitchFamily="34" charset="-120"/>
+              </a:rPr>
+              <a:t>代理店の "らしさ" が反映される土台</a:t>
+            </a:r>
+            <a:endParaRPr lang="en-US" sz="1600" dirty="0"/>
+          </a:p>
+        </p:txBody>
+      </p:sp>
+      <p:sp>
+        <p:nvSpPr>
+          <p:cNvPr id="12" name="Text 10"/>
+          <p:cNvSpPr/>
+          <p:nvPr/>
+        </p:nvSpPr>
+        <p:spPr>
+          <a:xfrm>
+            <a:off x="685800" y="2971800"/>
+            <a:ext cx="8001000" cy="502920"/>
+          </a:xfrm>
+          <a:prstGeom prst="rect">
+            <a:avLst/>
+          </a:prstGeom>
+          <a:noFill/>
+          <a:ln/>
+        </p:spPr>
+        <p:txBody>
+          <a:bodyPr wrap="square" rtlCol="0" anchor="t"/>
+          <a:lstStyle/>
+          <a:p>
+            <a:pPr indent="0" marL="0">
+              <a:buNone/>
+            </a:pPr>
+            <a:r>
+              <a:rPr lang="en-US" sz="1200" dirty="0">
+                <a:solidFill>
+                  <a:srgbClr val="1A1A1A"/>
+                </a:solidFill>
+                <a:latin typeface="Yu Gothic UI" pitchFamily="34" charset="0"/>
+                <a:ea typeface="Yu Gothic UI" pitchFamily="34" charset="-122"/>
+                <a:cs typeface="Yu Gothic UI" pitchFamily="34" charset="-120"/>
+              </a:rPr>
+              <a:t>独自の数値+独自のアドバイスパターンで、市販ツールにはない強みが出せます。</a:t>
+            </a:r>
+            <a:endParaRPr lang="en-US" sz="1200" dirty="0"/>
+          </a:p>
+        </p:txBody>
+      </p:sp>
+      <p:sp>
+        <p:nvSpPr>
+          <p:cNvPr id="13" name="Shape 11"/>
+          <p:cNvSpPr/>
+          <p:nvPr/>
+        </p:nvSpPr>
+        <p:spPr>
+          <a:xfrm>
+            <a:off x="411480" y="3703320"/>
+            <a:ext cx="8321040" cy="1097280"/>
+          </a:xfrm>
+          <a:prstGeom prst="roundRect">
+            <a:avLst>
+              <a:gd name="adj" fmla="val 6667"/>
+            </a:avLst>
+          </a:prstGeom>
+          <a:solidFill>
+            <a:srgbClr val="F4F6F9"/>
+          </a:solidFill>
+          <a:ln w="19050">
+            <a:solidFill>
+              <a:srgbClr val="7C5F8A"/>
+            </a:solidFill>
+            <a:prstDash val="solid"/>
+          </a:ln>
+        </p:spPr>
+      </p:sp>
+      <p:sp>
+        <p:nvSpPr>
+          <p:cNvPr id="14" name="Shape 12"/>
+          <p:cNvSpPr/>
+          <p:nvPr/>
+        </p:nvSpPr>
+        <p:spPr>
+          <a:xfrm>
+            <a:off x="411480" y="3703320"/>
+            <a:ext cx="109728" cy="1097280"/>
+          </a:xfrm>
+          <a:prstGeom prst="rect">
+            <a:avLst/>
+          </a:prstGeom>
+          <a:solidFill>
+            <a:srgbClr val="7C5F8A"/>
+          </a:solidFill>
+          <a:ln/>
+        </p:spPr>
+      </p:sp>
+      <p:sp>
+        <p:nvSpPr>
+          <p:cNvPr id="15" name="Text 13"/>
+          <p:cNvSpPr/>
+          <p:nvPr/>
+        </p:nvSpPr>
+        <p:spPr>
+          <a:xfrm>
+            <a:off x="685800" y="3813048"/>
+            <a:ext cx="8001000" cy="365760"/>
+          </a:xfrm>
+          <a:prstGeom prst="rect">
+            <a:avLst/>
+          </a:prstGeom>
+          <a:noFill/>
+          <a:ln/>
+        </p:spPr>
+        <p:txBody>
+          <a:bodyPr wrap="square" rtlCol="0" anchor="ctr"/>
+          <a:lstStyle/>
+          <a:p>
+            <a:pPr indent="0" marL="0">
+              <a:buNone/>
+            </a:pPr>
+            <a:r>
+              <a:rPr lang="en-US" sz="1600" b="1" dirty="0">
+                <a:solidFill>
+                  <a:srgbClr val="1F3A5F"/>
+                </a:solidFill>
+                <a:latin typeface="Yu Gothic UI Semibold" pitchFamily="34" charset="0"/>
+                <a:ea typeface="Yu Gothic UI Semibold" pitchFamily="34" charset="-122"/>
+                <a:cs typeface="Yu Gothic UI Semibold" pitchFamily="34" charset="-120"/>
+              </a:rPr>
+              <a:t>次は「ステップ② バイブコーディング」</a:t>
+            </a:r>
+            <a:endParaRPr lang="en-US" sz="1600" dirty="0"/>
+          </a:p>
+        </p:txBody>
+      </p:sp>
+      <p:sp>
+        <p:nvSpPr>
+          <p:cNvPr id="16" name="Text 14"/>
+          <p:cNvSpPr/>
+          <p:nvPr/>
+        </p:nvSpPr>
+        <p:spPr>
+          <a:xfrm>
+            <a:off x="685800" y="4206240"/>
+            <a:ext cx="8001000" cy="502920"/>
+          </a:xfrm>
+          <a:prstGeom prst="rect">
+            <a:avLst/>
+          </a:prstGeom>
+          <a:noFill/>
+          <a:ln/>
+        </p:spPr>
+        <p:txBody>
+          <a:bodyPr wrap="square" rtlCol="0" anchor="t"/>
+          <a:lstStyle/>
+          <a:p>
+            <a:pPr indent="0" marL="0">
+              <a:buNone/>
+            </a:pPr>
+            <a:r>
+              <a:rPr lang="en-US" sz="1200" dirty="0">
+                <a:solidFill>
+                  <a:srgbClr val="1A1A1A"/>
+                </a:solidFill>
+                <a:latin typeface="Yu Gothic UI" pitchFamily="34" charset="0"/>
+                <a:ea typeface="Yu Gothic UI" pitchFamily="34" charset="-122"/>
+                <a:cs typeface="Yu Gothic UI" pitchFamily="34" charset="-120"/>
+              </a:rPr>
+              <a:t>設計書を持って、AI に GAS を書いてもらい、実際に動くアプリを作ります。</a:t>
+            </a:r>
+            <a:endParaRPr lang="en-US" sz="1200" dirty="0"/>
           </a:p>
         </p:txBody>
       </p:sp>
@@ -1656,8 +2400,8 @@
         </p:nvSpPr>
         <p:spPr>
           <a:xfrm>
-            <a:off x="411480" y="201168"/>
-            <a:ext cx="8412480" cy="594360"/>
+            <a:off x="411480" y="182880"/>
+            <a:ext cx="8412480" cy="548640"/>
           </a:xfrm>
           <a:prstGeom prst="rect">
             <a:avLst/>
@@ -1673,7 +2417,7 @@
               <a:buNone/>
             </a:pPr>
             <a:r>
-              <a:rPr lang="en-US" sz="2600" b="1" dirty="0">
+              <a:rPr lang="en-US" sz="2400" b="1" dirty="0">
                 <a:solidFill>
                   <a:srgbClr val="1F3A5F"/>
                 </a:solidFill>
@@ -1681,26 +2425,65 @@
                 <a:ea typeface="Yu Gothic UI Semibold" pitchFamily="34" charset="-122"/>
                 <a:cs typeface="Yu Gothic UI Semibold" pitchFamily="34" charset="-120"/>
               </a:rPr>
-              <a:t>学習目標</a:t>
-            </a:r>
-            <a:endParaRPr lang="en-US" sz="2600" dirty="0"/>
-          </a:p>
-        </p:txBody>
-      </p:sp>
-      <p:sp>
-        <p:nvSpPr>
-          <p:cNvPr id="4" name="Shape 2"/>
-          <p:cNvSpPr/>
-          <p:nvPr/>
-        </p:nvSpPr>
-        <p:spPr>
-          <a:xfrm>
-            <a:off x="411480" y="1417320"/>
-            <a:ext cx="2651760" cy="2926080"/>
+              <a:t>今日のゴール ─ 何を作るのか</a:t>
+            </a:r>
+            <a:endParaRPr lang="en-US" sz="2400" dirty="0"/>
+          </a:p>
+        </p:txBody>
+      </p:sp>
+      <p:sp>
+        <p:nvSpPr>
+          <p:cNvPr id="4" name="Text 2"/>
+          <p:cNvSpPr/>
+          <p:nvPr/>
+        </p:nvSpPr>
+        <p:spPr>
+          <a:xfrm>
+            <a:off x="411480" y="749808"/>
+            <a:ext cx="8412480" cy="365760"/>
+          </a:xfrm>
+          <a:prstGeom prst="rect">
+            <a:avLst/>
+          </a:prstGeom>
+          <a:noFill/>
+          <a:ln/>
+        </p:spPr>
+        <p:txBody>
+          <a:bodyPr wrap="square" rtlCol="0" anchor="ctr"/>
+          <a:lstStyle/>
+          <a:p>
+            <a:pPr indent="0" marL="0">
+              <a:buNone/>
+            </a:pPr>
+            <a:r>
+              <a:rPr lang="en-US" sz="1300" i="1" dirty="0">
+                <a:solidFill>
+                  <a:srgbClr val="555555"/>
+                </a:solidFill>
+                <a:latin typeface="Yu Gothic UI" pitchFamily="34" charset="0"/>
+                <a:ea typeface="Yu Gothic UI" pitchFamily="34" charset="-122"/>
+                <a:cs typeface="Yu Gothic UI" pitchFamily="34" charset="-120"/>
+              </a:rPr>
+              <a:t>3日間かけて、こんなアプリを作ります</a:t>
+            </a:r>
+            <a:endParaRPr lang="en-US" sz="1300" dirty="0"/>
+          </a:p>
+        </p:txBody>
+      </p:sp>
+      <p:sp>
+        <p:nvSpPr>
+          <p:cNvPr id="5" name="Shape 3"/>
+          <p:cNvSpPr/>
+          <p:nvPr/>
+        </p:nvSpPr>
+        <p:spPr>
+          <a:xfrm>
+            <a:off x="411480" y="1234440"/>
+            <a:ext cx="8321040" cy="1234440"/>
           </a:xfrm>
           <a:prstGeom prst="roundRect">
             <a:avLst>
-              <a:gd name="adj" fmla="val 3448"/>
+              <a:gd name="adj" fmla="val 5926"/>
             </a:avLst>
           </a:prstGeom>
           <a:solidFill>
@@ -1716,34 +2499,14 @@
       </p:sp>
       <p:sp>
         <p:nvSpPr>
-          <p:cNvPr id="5" name="Shape 3"/>
-          <p:cNvSpPr/>
-          <p:nvPr/>
-        </p:nvSpPr>
-        <p:spPr>
-          <a:xfrm>
-            <a:off x="502920" y="1417320"/>
-            <a:ext cx="2468880" cy="73152"/>
-          </a:xfrm>
-          <a:prstGeom prst="rect">
-            <a:avLst/>
-          </a:prstGeom>
-          <a:solidFill>
-            <a:srgbClr val="0E7C86"/>
-          </a:solidFill>
-          <a:ln/>
-        </p:spPr>
-      </p:sp>
-      <p:sp>
-        <p:nvSpPr>
           <p:cNvPr id="6" name="Text 4"/>
           <p:cNvSpPr/>
           <p:nvPr/>
         </p:nvSpPr>
         <p:spPr>
           <a:xfrm>
-            <a:off x="612648" y="1600200"/>
-            <a:ext cx="914400" cy="640080"/>
+            <a:off x="594360" y="1325880"/>
+            <a:ext cx="7955280" cy="320040"/>
           </a:xfrm>
           <a:prstGeom prst="rect">
             <a:avLst/>
@@ -1759,7 +2522,7 @@
               <a:buNone/>
             </a:pPr>
             <a:r>
-              <a:rPr lang="en-US" sz="3000" b="1" dirty="0">
+              <a:rPr lang="en-US" sz="1400" b="1" dirty="0">
                 <a:solidFill>
                   <a:srgbClr val="0E7C86"/>
                 </a:solidFill>
@@ -1767,9 +2530,9 @@
                 <a:ea typeface="Yu Gothic UI Semibold" pitchFamily="34" charset="-122"/>
                 <a:cs typeface="Yu Gothic UI Semibold" pitchFamily="34" charset="-120"/>
               </a:rPr>
-              <a:t>01</a:t>
-            </a:r>
-            <a:endParaRPr lang="en-US" sz="3000" dirty="0"/>
+              <a:t>■ 作るもの</a:t>
+            </a:r>
+            <a:endParaRPr lang="en-US" sz="1400" dirty="0"/>
           </a:p>
         </p:txBody>
       </p:sp>
@@ -1781,8 +2544,8 @@
         </p:nvSpPr>
         <p:spPr>
           <a:xfrm>
-            <a:off x="612648" y="2286000"/>
-            <a:ext cx="2249424" cy="640080"/>
+            <a:off x="594360" y="1673352"/>
+            <a:ext cx="7955280" cy="731520"/>
           </a:xfrm>
           <a:prstGeom prst="rect">
             <a:avLst/>
@@ -1798,7 +2561,7 @@
               <a:buNone/>
             </a:pPr>
             <a:r>
-              <a:rPr lang="en-US" sz="1700" b="1" dirty="0">
+              <a:rPr lang="en-US" sz="1600" b="1" dirty="0">
                 <a:solidFill>
                   <a:srgbClr val="1F3A5F"/>
                 </a:solidFill>
@@ -1806,22 +2569,108 @@
                 <a:ea typeface="Yu Gothic UI Semibold" pitchFamily="34" charset="-122"/>
                 <a:cs typeface="Yu Gothic UI Semibold" pitchFamily="34" charset="-120"/>
               </a:rPr>
-              <a:t>DB設計を固める</a:t>
-            </a:r>
-            <a:endParaRPr lang="en-US" sz="1700" dirty="0"/>
-          </a:p>
-        </p:txBody>
-      </p:sp>
-      <p:sp>
-        <p:nvSpPr>
-          <p:cNvPr id="8" name="Text 6"/>
-          <p:cNvSpPr/>
-          <p:nvPr/>
-        </p:nvSpPr>
-        <p:spPr>
-          <a:xfrm>
-            <a:off x="612648" y="3017520"/>
-            <a:ext cx="2249424" cy="1188720"/>
+              <a:t>保険代理店で使う「お客様のライフプランを見せてくれるAIアプリ」</a:t>
+            </a:r>
+            <a:endParaRPr lang="en-US" sz="1600" dirty="0"/>
+          </a:p>
+        </p:txBody>
+      </p:sp>
+      <p:sp>
+        <p:nvSpPr>
+          <p:cNvPr id="8" name="Shape 6"/>
+          <p:cNvSpPr/>
+          <p:nvPr/>
+        </p:nvSpPr>
+        <p:spPr>
+          <a:xfrm>
+            <a:off x="411480" y="2651760"/>
+            <a:ext cx="2651760" cy="2011680"/>
+          </a:xfrm>
+          <a:prstGeom prst="roundRect">
+            <a:avLst>
+              <a:gd name="adj" fmla="val 3636"/>
+            </a:avLst>
+          </a:prstGeom>
+          <a:solidFill>
+            <a:srgbClr val="FFFFFF"/>
+          </a:solidFill>
+          <a:ln w="12700">
+            <a:solidFill>
+              <a:srgbClr val="D7DCE3"/>
+            </a:solidFill>
+            <a:prstDash val="solid"/>
+          </a:ln>
+        </p:spPr>
+      </p:sp>
+      <p:sp>
+        <p:nvSpPr>
+          <p:cNvPr id="9" name="Shape 7"/>
+          <p:cNvSpPr/>
+          <p:nvPr/>
+        </p:nvSpPr>
+        <p:spPr>
+          <a:xfrm>
+            <a:off x="411480" y="2651760"/>
+            <a:ext cx="2651760" cy="384048"/>
+          </a:xfrm>
+          <a:prstGeom prst="rect">
+            <a:avLst/>
+          </a:prstGeom>
+          <a:solidFill>
+            <a:srgbClr val="0E7C86"/>
+          </a:solidFill>
+          <a:ln/>
+        </p:spPr>
+      </p:sp>
+      <p:sp>
+        <p:nvSpPr>
+          <p:cNvPr id="10" name="Text 8"/>
+          <p:cNvSpPr/>
+          <p:nvPr/>
+        </p:nvSpPr>
+        <p:spPr>
+          <a:xfrm>
+            <a:off x="521208" y="2670048"/>
+            <a:ext cx="2432304" cy="347472"/>
+          </a:xfrm>
+          <a:prstGeom prst="rect">
+            <a:avLst/>
+          </a:prstGeom>
+          <a:noFill/>
+          <a:ln/>
+        </p:spPr>
+        <p:txBody>
+          <a:bodyPr wrap="square" rtlCol="0" anchor="ctr"/>
+          <a:lstStyle/>
+          <a:p>
+            <a:pPr indent="0" marL="0">
+              <a:buNone/>
+            </a:pPr>
+            <a:r>
+              <a:rPr lang="en-US" sz="1300" b="1" dirty="0">
+                <a:solidFill>
+                  <a:srgbClr val="FFFFFF"/>
+                </a:solidFill>
+                <a:latin typeface="Yu Gothic UI Semibold" pitchFamily="34" charset="0"/>
+                <a:ea typeface="Yu Gothic UI Semibold" pitchFamily="34" charset="-122"/>
+                <a:cs typeface="Yu Gothic UI Semibold" pitchFamily="34" charset="-120"/>
+              </a:rPr>
+              <a:t>📊  40年先までの家計</a:t>
+            </a:r>
+            <a:endParaRPr lang="en-US" sz="1300" dirty="0"/>
+          </a:p>
+        </p:txBody>
+      </p:sp>
+      <p:sp>
+        <p:nvSpPr>
+          <p:cNvPr id="11" name="Text 9"/>
+          <p:cNvSpPr/>
+          <p:nvPr/>
+        </p:nvSpPr>
+        <p:spPr>
+          <a:xfrm>
+            <a:off x="557784" y="3154680"/>
+            <a:ext cx="2359152" cy="1417320"/>
           </a:xfrm>
           <a:prstGeom prst="rect">
             <a:avLst/>
@@ -1834,10 +2683,13 @@
           <a:lstStyle/>
           <a:p>
             <a:pPr indent="0" marL="0">
-              <a:buNone/>
-            </a:pPr>
-            <a:r>
-              <a:rPr lang="en-US" sz="1300" dirty="0">
+              <a:spcAft>
+                <a:spcPts val="300"/>
+              </a:spcAft>
+              <a:buNone/>
+            </a:pPr>
+            <a:r>
+              <a:rPr lang="en-US" sz="1200" dirty="0">
                 <a:solidFill>
                   <a:srgbClr val="1A1A1A"/>
                 </a:solidFill>
@@ -1845,34 +2697,34 @@
                 <a:ea typeface="Yu Gothic UI" pitchFamily="34" charset="-122"/>
                 <a:cs typeface="Yu Gothic UI" pitchFamily="34" charset="-120"/>
               </a:rPr>
-              <a:t>スプシに持たせる 3〜5シートと各列を決める(顧客カルテ/前提/独自アドバイス/履歴等)</a:t>
-            </a:r>
-            <a:endParaRPr lang="en-US" sz="1300" dirty="0"/>
-          </a:p>
-        </p:txBody>
-      </p:sp>
-      <p:sp>
-        <p:nvSpPr>
-          <p:cNvPr id="9" name="Shape 7"/>
-          <p:cNvSpPr/>
-          <p:nvPr/>
-        </p:nvSpPr>
-        <p:spPr>
-          <a:xfrm>
-            <a:off x="3246120" y="1417320"/>
-            <a:ext cx="2651760" cy="2926080"/>
+              <a:t>お客様情報を入れると、収入・支出・貯蓄残高が 40年先まで年ごとに見える</a:t>
+            </a:r>
+            <a:endParaRPr lang="en-US" sz="1200" dirty="0"/>
+          </a:p>
+        </p:txBody>
+      </p:sp>
+      <p:sp>
+        <p:nvSpPr>
+          <p:cNvPr id="12" name="Shape 10"/>
+          <p:cNvSpPr/>
+          <p:nvPr/>
+        </p:nvSpPr>
+        <p:spPr>
+          <a:xfrm>
+            <a:off x="3246120" y="2651760"/>
+            <a:ext cx="2651760" cy="2011680"/>
           </a:xfrm>
           <a:prstGeom prst="roundRect">
             <a:avLst>
-              <a:gd name="adj" fmla="val 3448"/>
+              <a:gd name="adj" fmla="val 3636"/>
             </a:avLst>
           </a:prstGeom>
           <a:solidFill>
-            <a:srgbClr val="F4F6F9"/>
-          </a:solidFill>
-          <a:ln w="19050">
+            <a:srgbClr val="FFFFFF"/>
+          </a:solidFill>
+          <a:ln w="12700">
             <a:solidFill>
-              <a:srgbClr val="E8A33D"/>
+              <a:srgbClr val="D7DCE3"/>
             </a:solidFill>
             <a:prstDash val="solid"/>
           </a:ln>
@@ -1880,14 +2732,14 @@
       </p:sp>
       <p:sp>
         <p:nvSpPr>
-          <p:cNvPr id="10" name="Shape 8"/>
-          <p:cNvSpPr/>
-          <p:nvPr/>
-        </p:nvSpPr>
-        <p:spPr>
-          <a:xfrm>
-            <a:off x="3337560" y="1417320"/>
-            <a:ext cx="2468880" cy="73152"/>
+          <p:cNvPr id="13" name="Shape 11"/>
+          <p:cNvSpPr/>
+          <p:nvPr/>
+        </p:nvSpPr>
+        <p:spPr>
+          <a:xfrm>
+            <a:off x="3246120" y="2651760"/>
+            <a:ext cx="2651760" cy="384048"/>
           </a:xfrm>
           <a:prstGeom prst="rect">
             <a:avLst/>
@@ -1900,14 +2752,14 @@
       </p:sp>
       <p:sp>
         <p:nvSpPr>
-          <p:cNvPr id="11" name="Text 9"/>
-          <p:cNvSpPr/>
-          <p:nvPr/>
-        </p:nvSpPr>
-        <p:spPr>
-          <a:xfrm>
-            <a:off x="3447288" y="1600200"/>
-            <a:ext cx="914400" cy="640080"/>
+          <p:cNvPr id="14" name="Text 12"/>
+          <p:cNvSpPr/>
+          <p:nvPr/>
+        </p:nvSpPr>
+        <p:spPr>
+          <a:xfrm>
+            <a:off x="3355848" y="2670048"/>
+            <a:ext cx="2432304" cy="347472"/>
           </a:xfrm>
           <a:prstGeom prst="rect">
             <a:avLst/>
@@ -1923,30 +2775,30 @@
               <a:buNone/>
             </a:pPr>
             <a:r>
-              <a:rPr lang="en-US" sz="3000" b="1" dirty="0">
-                <a:solidFill>
-                  <a:srgbClr val="E8A33D"/>
+              <a:rPr lang="en-US" sz="1300" b="1" dirty="0">
+                <a:solidFill>
+                  <a:srgbClr val="FFFFFF"/>
                 </a:solidFill>
                 <a:latin typeface="Yu Gothic UI Semibold" pitchFamily="34" charset="0"/>
                 <a:ea typeface="Yu Gothic UI Semibold" pitchFamily="34" charset="-122"/>
                 <a:cs typeface="Yu Gothic UI Semibold" pitchFamily="34" charset="-120"/>
               </a:rPr>
-              <a:t>02</a:t>
-            </a:r>
-            <a:endParaRPr lang="en-US" sz="3000" dirty="0"/>
-          </a:p>
-        </p:txBody>
-      </p:sp>
-      <p:sp>
-        <p:nvSpPr>
-          <p:cNvPr id="12" name="Text 10"/>
-          <p:cNvSpPr/>
-          <p:nvPr/>
-        </p:nvSpPr>
-        <p:spPr>
-          <a:xfrm>
-            <a:off x="3447288" y="2286000"/>
-            <a:ext cx="2249424" cy="640080"/>
+              <a:t>💡  保険提案のヒント</a:t>
+            </a:r>
+            <a:endParaRPr lang="en-US" sz="1300" dirty="0"/>
+          </a:p>
+        </p:txBody>
+      </p:sp>
+      <p:sp>
+        <p:nvSpPr>
+          <p:cNvPr id="15" name="Text 13"/>
+          <p:cNvSpPr/>
+          <p:nvPr/>
+        </p:nvSpPr>
+        <p:spPr>
+          <a:xfrm>
+            <a:off x="3392424" y="3154680"/>
+            <a:ext cx="2359152" cy="1417320"/>
           </a:xfrm>
           <a:prstGeom prst="rect">
             <a:avLst/>
@@ -1959,33 +2811,122 @@
           <a:lstStyle/>
           <a:p>
             <a:pPr indent="0" marL="0">
-              <a:buNone/>
-            </a:pPr>
-            <a:r>
-              <a:rPr lang="en-US" sz="1700" b="1" dirty="0">
-                <a:solidFill>
-                  <a:srgbClr val="1F3A5F"/>
+              <a:spcAft>
+                <a:spcPts val="300"/>
+              </a:spcAft>
+              <a:buNone/>
+            </a:pPr>
+            <a:r>
+              <a:rPr lang="en-US" sz="1200" dirty="0">
+                <a:solidFill>
+                  <a:srgbClr val="1A1A1A"/>
+                </a:solidFill>
+                <a:latin typeface="Yu Gothic UI" pitchFamily="34" charset="0"/>
+                <a:ea typeface="Yu Gothic UI" pitchFamily="34" charset="-122"/>
+                <a:cs typeface="Yu Gothic UI" pitchFamily="34" charset="-120"/>
+              </a:rPr>
+              <a:t>「いつどんな保険が必要か」の候補が 3〜5個 自動で出てくる</a:t>
+            </a:r>
+            <a:endParaRPr lang="en-US" sz="1200" dirty="0"/>
+          </a:p>
+        </p:txBody>
+      </p:sp>
+      <p:sp>
+        <p:nvSpPr>
+          <p:cNvPr id="16" name="Shape 14"/>
+          <p:cNvSpPr/>
+          <p:nvPr/>
+        </p:nvSpPr>
+        <p:spPr>
+          <a:xfrm>
+            <a:off x="6080760" y="2651760"/>
+            <a:ext cx="2651760" cy="2011680"/>
+          </a:xfrm>
+          <a:prstGeom prst="roundRect">
+            <a:avLst>
+              <a:gd name="adj" fmla="val 3636"/>
+            </a:avLst>
+          </a:prstGeom>
+          <a:solidFill>
+            <a:srgbClr val="FFFFFF"/>
+          </a:solidFill>
+          <a:ln w="12700">
+            <a:solidFill>
+              <a:srgbClr val="D7DCE3"/>
+            </a:solidFill>
+            <a:prstDash val="solid"/>
+          </a:ln>
+        </p:spPr>
+      </p:sp>
+      <p:sp>
+        <p:nvSpPr>
+          <p:cNvPr id="17" name="Shape 15"/>
+          <p:cNvSpPr/>
+          <p:nvPr/>
+        </p:nvSpPr>
+        <p:spPr>
+          <a:xfrm>
+            <a:off x="6080760" y="2651760"/>
+            <a:ext cx="2651760" cy="384048"/>
+          </a:xfrm>
+          <a:prstGeom prst="rect">
+            <a:avLst/>
+          </a:prstGeom>
+          <a:solidFill>
+            <a:srgbClr val="7C5F8A"/>
+          </a:solidFill>
+          <a:ln/>
+        </p:spPr>
+      </p:sp>
+      <p:sp>
+        <p:nvSpPr>
+          <p:cNvPr id="18" name="Text 16"/>
+          <p:cNvSpPr/>
+          <p:nvPr/>
+        </p:nvSpPr>
+        <p:spPr>
+          <a:xfrm>
+            <a:off x="6190488" y="2670048"/>
+            <a:ext cx="2432304" cy="347472"/>
+          </a:xfrm>
+          <a:prstGeom prst="rect">
+            <a:avLst/>
+          </a:prstGeom>
+          <a:noFill/>
+          <a:ln/>
+        </p:spPr>
+        <p:txBody>
+          <a:bodyPr wrap="square" rtlCol="0" anchor="ctr"/>
+          <a:lstStyle/>
+          <a:p>
+            <a:pPr indent="0" marL="0">
+              <a:buNone/>
+            </a:pPr>
+            <a:r>
+              <a:rPr lang="en-US" sz="1300" b="1" dirty="0">
+                <a:solidFill>
+                  <a:srgbClr val="FFFFFF"/>
                 </a:solidFill>
                 <a:latin typeface="Yu Gothic UI Semibold" pitchFamily="34" charset="0"/>
                 <a:ea typeface="Yu Gothic UI Semibold" pitchFamily="34" charset="-122"/>
                 <a:cs typeface="Yu Gothic UI Semibold" pitchFamily="34" charset="-120"/>
               </a:rPr>
-              <a:t>判断基準・数値の分類</a:t>
-            </a:r>
-            <a:endParaRPr lang="en-US" sz="1700" dirty="0"/>
-          </a:p>
-        </p:txBody>
-      </p:sp>
-      <p:sp>
-        <p:nvSpPr>
-          <p:cNvPr id="13" name="Text 11"/>
-          <p:cNvSpPr/>
-          <p:nvPr/>
-        </p:nvSpPr>
-        <p:spPr>
-          <a:xfrm>
-            <a:off x="3447288" y="3017520"/>
-            <a:ext cx="2249424" cy="1188720"/>
+              <a:t>📄  そのまま渡せるPDF</a:t>
+            </a:r>
+            <a:endParaRPr lang="en-US" sz="1300" dirty="0"/>
+          </a:p>
+        </p:txBody>
+      </p:sp>
+      <p:sp>
+        <p:nvSpPr>
+          <p:cNvPr id="19" name="Text 17"/>
+          <p:cNvSpPr/>
+          <p:nvPr/>
+        </p:nvSpPr>
+        <p:spPr>
+          <a:xfrm>
+            <a:off x="6227064" y="3154680"/>
+            <a:ext cx="2359152" cy="1417320"/>
           </a:xfrm>
           <a:prstGeom prst="rect">
             <a:avLst/>
@@ -1998,10 +2939,13 @@
           <a:lstStyle/>
           <a:p>
             <a:pPr indent="0" marL="0">
-              <a:buNone/>
-            </a:pPr>
-            <a:r>
-              <a:rPr lang="en-US" sz="1300" dirty="0">
+              <a:spcAft>
+                <a:spcPts val="300"/>
+              </a:spcAft>
+              <a:buNone/>
+            </a:pPr>
+            <a:r>
+              <a:rPr lang="en-US" sz="1200" dirty="0">
                 <a:solidFill>
                   <a:srgbClr val="1A1A1A"/>
                 </a:solidFill>
@@ -2009,173 +2953,9 @@
                 <a:ea typeface="Yu Gothic UI" pitchFamily="34" charset="-122"/>
                 <a:cs typeface="Yu Gothic UI" pitchFamily="34" charset="-120"/>
               </a:rPr>
-              <a:t>公的指標 / 独自数値 / 計算式 の3種に分けて、代理店の "らしさ" を出す設計に</a:t>
-            </a:r>
-            <a:endParaRPr lang="en-US" sz="1300" dirty="0"/>
-          </a:p>
-        </p:txBody>
-      </p:sp>
-      <p:sp>
-        <p:nvSpPr>
-          <p:cNvPr id="14" name="Shape 12"/>
-          <p:cNvSpPr/>
-          <p:nvPr/>
-        </p:nvSpPr>
-        <p:spPr>
-          <a:xfrm>
-            <a:off x="6080760" y="1417320"/>
-            <a:ext cx="2651760" cy="2926080"/>
-          </a:xfrm>
-          <a:prstGeom prst="roundRect">
-            <a:avLst>
-              <a:gd name="adj" fmla="val 3448"/>
-            </a:avLst>
-          </a:prstGeom>
-          <a:solidFill>
-            <a:srgbClr val="F4F6F9"/>
-          </a:solidFill>
-          <a:ln w="19050">
-            <a:solidFill>
-              <a:srgbClr val="1F3A5F"/>
-            </a:solidFill>
-            <a:prstDash val="solid"/>
-          </a:ln>
-        </p:spPr>
-      </p:sp>
-      <p:sp>
-        <p:nvSpPr>
-          <p:cNvPr id="15" name="Shape 13"/>
-          <p:cNvSpPr/>
-          <p:nvPr/>
-        </p:nvSpPr>
-        <p:spPr>
-          <a:xfrm>
-            <a:off x="6172200" y="1417320"/>
-            <a:ext cx="2468880" cy="73152"/>
-          </a:xfrm>
-          <a:prstGeom prst="rect">
-            <a:avLst/>
-          </a:prstGeom>
-          <a:solidFill>
-            <a:srgbClr val="1F3A5F"/>
-          </a:solidFill>
-          <a:ln/>
-        </p:spPr>
-      </p:sp>
-      <p:sp>
-        <p:nvSpPr>
-          <p:cNvPr id="16" name="Text 14"/>
-          <p:cNvSpPr/>
-          <p:nvPr/>
-        </p:nvSpPr>
-        <p:spPr>
-          <a:xfrm>
-            <a:off x="6281928" y="1600200"/>
-            <a:ext cx="914400" cy="640080"/>
-          </a:xfrm>
-          <a:prstGeom prst="rect">
-            <a:avLst/>
-          </a:prstGeom>
-          <a:noFill/>
-          <a:ln/>
-        </p:spPr>
-        <p:txBody>
-          <a:bodyPr wrap="square" rtlCol="0" anchor="ctr"/>
-          <a:lstStyle/>
-          <a:p>
-            <a:pPr indent="0" marL="0">
-              <a:buNone/>
-            </a:pPr>
-            <a:r>
-              <a:rPr lang="en-US" sz="3000" b="1" dirty="0">
-                <a:solidFill>
-                  <a:srgbClr val="1F3A5F"/>
-                </a:solidFill>
-                <a:latin typeface="Yu Gothic UI Semibold" pitchFamily="34" charset="0"/>
-                <a:ea typeface="Yu Gothic UI Semibold" pitchFamily="34" charset="-122"/>
-                <a:cs typeface="Yu Gothic UI Semibold" pitchFamily="34" charset="-120"/>
-              </a:rPr>
-              <a:t>03</a:t>
-            </a:r>
-            <a:endParaRPr lang="en-US" sz="3000" dirty="0"/>
-          </a:p>
-        </p:txBody>
-      </p:sp>
-      <p:sp>
-        <p:nvSpPr>
-          <p:cNvPr id="17" name="Text 15"/>
-          <p:cNvSpPr/>
-          <p:nvPr/>
-        </p:nvSpPr>
-        <p:spPr>
-          <a:xfrm>
-            <a:off x="6281928" y="2286000"/>
-            <a:ext cx="2249424" cy="640080"/>
-          </a:xfrm>
-          <a:prstGeom prst="rect">
-            <a:avLst/>
-          </a:prstGeom>
-          <a:noFill/>
-          <a:ln/>
-        </p:spPr>
-        <p:txBody>
-          <a:bodyPr wrap="square" rtlCol="0" anchor="t"/>
-          <a:lstStyle/>
-          <a:p>
-            <a:pPr indent="0" marL="0">
-              <a:buNone/>
-            </a:pPr>
-            <a:r>
-              <a:rPr lang="en-US" sz="1700" b="1" dirty="0">
-                <a:solidFill>
-                  <a:srgbClr val="1F3A5F"/>
-                </a:solidFill>
-                <a:latin typeface="Yu Gothic UI Semibold" pitchFamily="34" charset="0"/>
-                <a:ea typeface="Yu Gothic UI Semibold" pitchFamily="34" charset="-122"/>
-                <a:cs typeface="Yu Gothic UI Semibold" pitchFamily="34" charset="-120"/>
-              </a:rPr>
-              <a:t>UI と独自アドバイスの言語化</a:t>
-            </a:r>
-            <a:endParaRPr lang="en-US" sz="1700" dirty="0"/>
-          </a:p>
-        </p:txBody>
-      </p:sp>
-      <p:sp>
-        <p:nvSpPr>
-          <p:cNvPr id="18" name="Text 16"/>
-          <p:cNvSpPr/>
-          <p:nvPr/>
-        </p:nvSpPr>
-        <p:spPr>
-          <a:xfrm>
-            <a:off x="6281928" y="3017520"/>
-            <a:ext cx="2249424" cy="1188720"/>
-          </a:xfrm>
-          <a:prstGeom prst="rect">
-            <a:avLst/>
-          </a:prstGeom>
-          <a:noFill/>
-          <a:ln/>
-        </p:spPr>
-        <p:txBody>
-          <a:bodyPr wrap="square" rtlCol="0" anchor="t"/>
-          <a:lstStyle/>
-          <a:p>
-            <a:pPr indent="0" marL="0">
-              <a:buNone/>
-            </a:pPr>
-            <a:r>
-              <a:rPr lang="en-US" sz="1300" dirty="0">
-                <a:solidFill>
-                  <a:srgbClr val="1A1A1A"/>
-                </a:solidFill>
-                <a:latin typeface="Yu Gothic UI" pitchFamily="34" charset="0"/>
-                <a:ea typeface="Yu Gothic UI" pitchFamily="34" charset="-122"/>
-                <a:cs typeface="Yu Gothic UI" pitchFamily="34" charset="-120"/>
-              </a:rPr>
-              <a:t>サイドバー/WebApp/フォーム から選ぶ + 独自アドバイス3〜5パターンを明文化</a:t>
-            </a:r>
-            <a:endParaRPr lang="en-US" sz="1300" dirty="0"/>
+              <a:t>お客様に手渡せる 7ページのPDFレポートが 30秒で完成する</a:t>
+            </a:r>
+            <a:endParaRPr lang="en-US" sz="1200" dirty="0"/>
           </a:p>
         </p:txBody>
       </p:sp>
@@ -2239,8 +3019,8 @@
         </p:nvSpPr>
         <p:spPr>
           <a:xfrm>
-            <a:off x="411480" y="201168"/>
-            <a:ext cx="8412480" cy="594360"/>
+            <a:off x="411480" y="182880"/>
+            <a:ext cx="8412480" cy="548640"/>
           </a:xfrm>
           <a:prstGeom prst="rect">
             <a:avLst/>
@@ -2256,7 +3036,7 @@
               <a:buNone/>
             </a:pPr>
             <a:r>
-              <a:rPr lang="en-US" sz="2600" b="1" dirty="0">
+              <a:rPr lang="en-US" sz="2400" b="1" dirty="0">
                 <a:solidFill>
                   <a:srgbClr val="1F3A5F"/>
                 </a:solidFill>
@@ -2264,91 +3044,22 @@
                 <a:ea typeface="Yu Gothic UI Semibold" pitchFamily="34" charset="-122"/>
                 <a:cs typeface="Yu Gothic UI Semibold" pitchFamily="34" charset="-120"/>
               </a:rPr>
-              <a:t>STEP1: 用語と前提</a:t>
-            </a:r>
-            <a:endParaRPr lang="en-US" sz="2600" dirty="0"/>
-          </a:p>
-        </p:txBody>
-      </p:sp>
-      <p:sp>
-        <p:nvSpPr>
-          <p:cNvPr id="4" name="Shape 2"/>
-          <p:cNvSpPr/>
-          <p:nvPr/>
-        </p:nvSpPr>
-        <p:spPr>
-          <a:xfrm>
-            <a:off x="365760" y="1188720"/>
-            <a:ext cx="1979676" cy="3017520"/>
-          </a:xfrm>
-          <a:prstGeom prst="roundRect">
-            <a:avLst>
-              <a:gd name="adj" fmla="val 4619"/>
-            </a:avLst>
-          </a:prstGeom>
-          <a:solidFill>
-            <a:srgbClr val="FFFFFF"/>
-          </a:solidFill>
-          <a:ln w="19050">
-            <a:solidFill>
-              <a:srgbClr val="0E7C86"/>
-            </a:solidFill>
-            <a:prstDash val="solid"/>
-          </a:ln>
-        </p:spPr>
-      </p:sp>
-      <p:sp>
-        <p:nvSpPr>
-          <p:cNvPr id="5" name="Shape 3"/>
-          <p:cNvSpPr/>
-          <p:nvPr/>
-        </p:nvSpPr>
-        <p:spPr>
-          <a:xfrm>
-            <a:off x="365760" y="1188720"/>
-            <a:ext cx="1979676" cy="566928"/>
-          </a:xfrm>
-          <a:prstGeom prst="roundRect">
-            <a:avLst>
-              <a:gd name="adj" fmla="val 16129"/>
-            </a:avLst>
-          </a:prstGeom>
-          <a:solidFill>
-            <a:srgbClr val="0E7C86"/>
-          </a:solidFill>
-          <a:ln/>
-        </p:spPr>
-      </p:sp>
-      <p:sp>
-        <p:nvSpPr>
-          <p:cNvPr id="6" name="Shape 4"/>
-          <p:cNvSpPr/>
-          <p:nvPr/>
-        </p:nvSpPr>
-        <p:spPr>
-          <a:xfrm>
-            <a:off x="365760" y="1417320"/>
-            <a:ext cx="1979676" cy="338328"/>
-          </a:xfrm>
-          <a:prstGeom prst="rect">
-            <a:avLst/>
-          </a:prstGeom>
-          <a:solidFill>
-            <a:srgbClr val="0E7C86"/>
-          </a:solidFill>
-          <a:ln/>
-        </p:spPr>
-      </p:sp>
-      <p:sp>
-        <p:nvSpPr>
-          <p:cNvPr id="7" name="Text 5"/>
-          <p:cNvSpPr/>
-          <p:nvPr/>
-        </p:nvSpPr>
-        <p:spPr>
-          <a:xfrm>
-            <a:off x="493776" y="1280160"/>
-            <a:ext cx="1723644" cy="457200"/>
+              <a:t>全体の道のり</a:t>
+            </a:r>
+            <a:endParaRPr lang="en-US" sz="2400" dirty="0"/>
+          </a:p>
+        </p:txBody>
+      </p:sp>
+      <p:sp>
+        <p:nvSpPr>
+          <p:cNvPr id="4" name="Text 2"/>
+          <p:cNvSpPr/>
+          <p:nvPr/>
+        </p:nvSpPr>
+        <p:spPr>
+          <a:xfrm>
+            <a:off x="411480" y="749808"/>
+            <a:ext cx="8412480" cy="365760"/>
           </a:xfrm>
           <a:prstGeom prst="rect">
             <a:avLst/>
@@ -2364,99 +3075,40 @@
               <a:buNone/>
             </a:pPr>
             <a:r>
-              <a:rPr lang="en-US" sz="1600" b="1" dirty="0">
-                <a:solidFill>
-                  <a:srgbClr val="FFFFFF"/>
-                </a:solidFill>
-                <a:latin typeface="Yu Gothic UI Semibold" pitchFamily="34" charset="0"/>
-                <a:ea typeface="Yu Gothic UI Semibold" pitchFamily="34" charset="-122"/>
-                <a:cs typeface="Yu Gothic UI Semibold" pitchFamily="34" charset="-120"/>
-              </a:rPr>
-              <a:t>スプシ = データベース</a:t>
-            </a:r>
-            <a:endParaRPr lang="en-US" sz="1600" dirty="0"/>
-          </a:p>
-        </p:txBody>
-      </p:sp>
-      <p:sp>
-        <p:nvSpPr>
-          <p:cNvPr id="8" name="Text 6"/>
-          <p:cNvSpPr/>
-          <p:nvPr/>
-        </p:nvSpPr>
-        <p:spPr>
-          <a:xfrm>
-            <a:off x="530352" y="1938528"/>
-            <a:ext cx="1650492" cy="2148840"/>
-          </a:xfrm>
-          <a:prstGeom prst="rect">
-            <a:avLst/>
-          </a:prstGeom>
-          <a:noFill/>
-          <a:ln/>
-        </p:spPr>
-        <p:txBody>
-          <a:bodyPr wrap="square" rtlCol="0" anchor="t"/>
-          <a:lstStyle/>
-          <a:p>
-            <a:pPr indent="0" marL="0">
-              <a:spcAft>
-                <a:spcPts val="600"/>
-              </a:spcAft>
-              <a:buNone/>
-            </a:pPr>
-            <a:r>
-              <a:rPr lang="en-US" sz="1600" dirty="0">
-                <a:solidFill>
-                  <a:srgbClr val="1A1A1A"/>
+              <a:rPr lang="en-US" sz="1300" i="1" dirty="0">
+                <a:solidFill>
+                  <a:srgbClr val="555555"/>
                 </a:solidFill>
                 <a:latin typeface="Yu Gothic UI" pitchFamily="34" charset="0"/>
                 <a:ea typeface="Yu Gothic UI" pitchFamily="34" charset="-122"/>
                 <a:cs typeface="Yu Gothic UI" pitchFamily="34" charset="-120"/>
               </a:rPr>
-              <a:t>Google スプシをアプリのデータ保存先(DB)として使うこと。</a:t>
-            </a:r>
-            <a:pPr indent="0" marL="0">
-              <a:spcAft>
-                <a:spcPts val="600"/>
-              </a:spcAft>
-              <a:buNone/>
-            </a:pPr>
-            <a:r>
-              <a:rPr lang="en-US" sz="1600" dirty="0">
-                <a:solidFill>
-                  <a:srgbClr val="1A1A1A"/>
-                </a:solidFill>
-                <a:latin typeface="Yu Gothic UI" pitchFamily="34" charset="0"/>
-                <a:ea typeface="Yu Gothic UI" pitchFamily="34" charset="-122"/>
-                <a:cs typeface="Yu Gothic UI" pitchFamily="34" charset="-120"/>
-              </a:rPr>
-              <a:t>GAS からシート/列で読み書き可能。</a:t>
-            </a:r>
-            <a:endParaRPr lang="en-US" sz="1600" dirty="0"/>
-          </a:p>
-        </p:txBody>
-      </p:sp>
-      <p:sp>
-        <p:nvSpPr>
-          <p:cNvPr id="9" name="Shape 7"/>
-          <p:cNvSpPr/>
-          <p:nvPr/>
-        </p:nvSpPr>
-        <p:spPr>
-          <a:xfrm>
-            <a:off x="2510028" y="1188720"/>
-            <a:ext cx="1979676" cy="3017520"/>
+              <a:t>3つのステップで、ライフプランAI を完成させます</a:t>
+            </a:r>
+            <a:endParaRPr lang="en-US" sz="1300" dirty="0"/>
+          </a:p>
+        </p:txBody>
+      </p:sp>
+      <p:sp>
+        <p:nvSpPr>
+          <p:cNvPr id="5" name="Shape 3"/>
+          <p:cNvSpPr/>
+          <p:nvPr/>
+        </p:nvSpPr>
+        <p:spPr>
+          <a:xfrm>
+            <a:off x="411480" y="1417320"/>
+            <a:ext cx="2590800" cy="2194560"/>
           </a:xfrm>
           <a:prstGeom prst="roundRect">
             <a:avLst>
-              <a:gd name="adj" fmla="val 4619"/>
+              <a:gd name="adj" fmla="val 5000"/>
             </a:avLst>
           </a:prstGeom>
           <a:solidFill>
-            <a:srgbClr val="FFFFFF"/>
-          </a:solidFill>
-          <a:ln w="19050">
+            <a:srgbClr val="0E7C86"/>
+          </a:solidFill>
+          <a:ln w="38100">
             <a:solidFill>
               <a:srgbClr val="E8A33D"/>
             </a:solidFill>
@@ -2466,18 +3118,18 @@
       </p:sp>
       <p:sp>
         <p:nvSpPr>
-          <p:cNvPr id="10" name="Shape 8"/>
-          <p:cNvSpPr/>
-          <p:nvPr/>
-        </p:nvSpPr>
-        <p:spPr>
-          <a:xfrm>
-            <a:off x="2510028" y="1188720"/>
-            <a:ext cx="1979676" cy="566928"/>
+          <p:cNvPr id="6" name="Shape 4"/>
+          <p:cNvSpPr/>
+          <p:nvPr/>
+        </p:nvSpPr>
+        <p:spPr>
+          <a:xfrm>
+            <a:off x="731520" y="1737360"/>
+            <a:ext cx="1950720" cy="457200"/>
           </a:xfrm>
           <a:prstGeom prst="roundRect">
             <a:avLst>
-              <a:gd name="adj" fmla="val 16129"/>
+              <a:gd name="adj" fmla="val 12000"/>
             </a:avLst>
           </a:prstGeom>
           <a:solidFill>
@@ -2488,34 +3140,14 @@
       </p:sp>
       <p:sp>
         <p:nvSpPr>
-          <p:cNvPr id="11" name="Shape 9"/>
-          <p:cNvSpPr/>
-          <p:nvPr/>
-        </p:nvSpPr>
-        <p:spPr>
-          <a:xfrm>
-            <a:off x="2510028" y="1417320"/>
-            <a:ext cx="1979676" cy="338328"/>
-          </a:xfrm>
-          <a:prstGeom prst="rect">
-            <a:avLst/>
-          </a:prstGeom>
-          <a:solidFill>
-            <a:srgbClr val="E8A33D"/>
-          </a:solidFill>
-          <a:ln/>
-        </p:spPr>
-      </p:sp>
-      <p:sp>
-        <p:nvSpPr>
-          <p:cNvPr id="12" name="Text 10"/>
-          <p:cNvSpPr/>
-          <p:nvPr/>
-        </p:nvSpPr>
-        <p:spPr>
-          <a:xfrm>
-            <a:off x="2638044" y="1280160"/>
-            <a:ext cx="1723644" cy="457200"/>
+          <p:cNvPr id="7" name="Text 5"/>
+          <p:cNvSpPr/>
+          <p:nvPr/>
+        </p:nvSpPr>
+        <p:spPr>
+          <a:xfrm>
+            <a:off x="731520" y="1737360"/>
+            <a:ext cx="1950720" cy="457200"/>
           </a:xfrm>
           <a:prstGeom prst="rect">
             <a:avLst/>
@@ -2527,34 +3159,73 @@
           <a:bodyPr wrap="square" rtlCol="0" anchor="ctr"/>
           <a:lstStyle/>
           <a:p>
-            <a:pPr indent="0" marL="0">
-              <a:buNone/>
-            </a:pPr>
-            <a:r>
-              <a:rPr lang="en-US" sz="1600" b="1" dirty="0">
-                <a:solidFill>
-                  <a:srgbClr val="FFFFFF"/>
+            <a:pPr algn="ctr" indent="0" marL="0">
+              <a:buNone/>
+            </a:pPr>
+            <a:r>
+              <a:rPr lang="en-US" sz="1400" b="1" dirty="0">
+                <a:solidFill>
+                  <a:srgbClr val="1F3A5F"/>
                 </a:solidFill>
                 <a:latin typeface="Yu Gothic UI Semibold" pitchFamily="34" charset="0"/>
                 <a:ea typeface="Yu Gothic UI Semibold" pitchFamily="34" charset="-122"/>
                 <a:cs typeface="Yu Gothic UI Semibold" pitchFamily="34" charset="-120"/>
               </a:rPr>
-              <a:t>公的指標 / 独自数値 / 計算式</a:t>
-            </a:r>
-            <a:endParaRPr lang="en-US" sz="1600" dirty="0"/>
-          </a:p>
-        </p:txBody>
-      </p:sp>
-      <p:sp>
-        <p:nvSpPr>
-          <p:cNvPr id="13" name="Text 11"/>
-          <p:cNvSpPr/>
-          <p:nvPr/>
-        </p:nvSpPr>
-        <p:spPr>
-          <a:xfrm>
-            <a:off x="2674620" y="1938528"/>
-            <a:ext cx="1650492" cy="2148840"/>
+              <a:t>ステップ①</a:t>
+            </a:r>
+            <a:endParaRPr lang="en-US" sz="1400" dirty="0"/>
+          </a:p>
+        </p:txBody>
+      </p:sp>
+      <p:sp>
+        <p:nvSpPr>
+          <p:cNvPr id="8" name="Text 6"/>
+          <p:cNvSpPr/>
+          <p:nvPr/>
+        </p:nvSpPr>
+        <p:spPr>
+          <a:xfrm>
+            <a:off x="576072" y="2331720"/>
+            <a:ext cx="2261616" cy="502920"/>
+          </a:xfrm>
+          <a:prstGeom prst="rect">
+            <a:avLst/>
+          </a:prstGeom>
+          <a:noFill/>
+          <a:ln/>
+        </p:spPr>
+        <p:txBody>
+          <a:bodyPr wrap="square" rtlCol="0" anchor="ctr"/>
+          <a:lstStyle/>
+          <a:p>
+            <a:pPr algn="ctr" indent="0" marL="0">
+              <a:buNone/>
+            </a:pPr>
+            <a:r>
+              <a:rPr lang="en-US" sz="1700" b="1" dirty="0">
+                <a:solidFill>
+                  <a:srgbClr val="FFFFFF"/>
+                </a:solidFill>
+                <a:latin typeface="Yu Gothic UI Semibold" pitchFamily="34" charset="0"/>
+                <a:ea typeface="Yu Gothic UI Semibold" pitchFamily="34" charset="-122"/>
+                <a:cs typeface="Yu Gothic UI Semibold" pitchFamily="34" charset="-120"/>
+              </a:rPr>
+              <a:t>設計書を作る</a:t>
+            </a:r>
+            <a:endParaRPr lang="en-US" sz="1700" dirty="0"/>
+          </a:p>
+        </p:txBody>
+      </p:sp>
+      <p:sp>
+        <p:nvSpPr>
+          <p:cNvPr id="9" name="Text 7"/>
+          <p:cNvSpPr/>
+          <p:nvPr/>
+        </p:nvSpPr>
+        <p:spPr>
+          <a:xfrm>
+            <a:off x="576072" y="2880360"/>
+            <a:ext cx="2261616" cy="640080"/>
           </a:xfrm>
           <a:prstGeom prst="rect">
             <a:avLst/>
@@ -2566,66 +3237,290 @@
           <a:bodyPr wrap="square" rtlCol="0" anchor="t"/>
           <a:lstStyle/>
           <a:p>
-            <a:pPr indent="0" marL="0">
-              <a:spcAft>
-                <a:spcPts val="600"/>
-              </a:spcAft>
-              <a:buNone/>
-            </a:pPr>
-            <a:r>
-              <a:rPr lang="en-US" sz="1600" dirty="0">
-                <a:solidFill>
-                  <a:srgbClr val="1A1A1A"/>
+            <a:pPr algn="ctr" indent="0" marL="0">
+              <a:buNone/>
+            </a:pPr>
+            <a:r>
+              <a:rPr lang="en-US" sz="1200" dirty="0">
+                <a:solidFill>
+                  <a:srgbClr val="FFFFFF"/>
                 </a:solidFill>
                 <a:latin typeface="Yu Gothic UI" pitchFamily="34" charset="0"/>
                 <a:ea typeface="Yu Gothic UI" pitchFamily="34" charset="-122"/>
                 <a:cs typeface="Yu Gothic UI" pitchFamily="34" charset="-120"/>
               </a:rPr>
-              <a:t>判断根拠の3分類。</a:t>
-            </a:r>
-            <a:pPr indent="0" marL="0">
-              <a:spcAft>
-                <a:spcPts val="600"/>
-              </a:spcAft>
-              <a:buNone/>
-            </a:pPr>
-            <a:r>
-              <a:rPr lang="en-US" sz="1600" dirty="0">
+              <a:t>何を作るか、どう作るかを 全部決める</a:t>
+            </a:r>
+            <a:endParaRPr lang="en-US" sz="1200" dirty="0"/>
+          </a:p>
+        </p:txBody>
+      </p:sp>
+      <p:sp>
+        <p:nvSpPr>
+          <p:cNvPr id="10" name="Text 8"/>
+          <p:cNvSpPr/>
+          <p:nvPr/>
+        </p:nvSpPr>
+        <p:spPr>
+          <a:xfrm>
+            <a:off x="3020568" y="2331720"/>
+            <a:ext cx="228600" cy="365760"/>
+          </a:xfrm>
+          <a:prstGeom prst="rect">
+            <a:avLst/>
+          </a:prstGeom>
+          <a:noFill/>
+          <a:ln/>
+        </p:spPr>
+        <p:txBody>
+          <a:bodyPr wrap="square" rtlCol="0" anchor="ctr"/>
+          <a:lstStyle/>
+          <a:p>
+            <a:pPr algn="ctr" indent="0" marL="0">
+              <a:buNone/>
+            </a:pPr>
+            <a:r>
+              <a:rPr lang="en-US" sz="2200" b="1" dirty="0">
+                <a:solidFill>
+                  <a:srgbClr val="E8A33D"/>
+                </a:solidFill>
+                <a:latin typeface="Yu Gothic UI Semibold" pitchFamily="34" charset="0"/>
+                <a:ea typeface="Yu Gothic UI Semibold" pitchFamily="34" charset="-122"/>
+                <a:cs typeface="Yu Gothic UI Semibold" pitchFamily="34" charset="-120"/>
+              </a:rPr>
+              <a:t>▶</a:t>
+            </a:r>
+            <a:endParaRPr lang="en-US" sz="2200" dirty="0"/>
+          </a:p>
+        </p:txBody>
+      </p:sp>
+      <p:sp>
+        <p:nvSpPr>
+          <p:cNvPr id="11" name="Shape 9"/>
+          <p:cNvSpPr/>
+          <p:nvPr/>
+        </p:nvSpPr>
+        <p:spPr>
+          <a:xfrm>
+            <a:off x="3276600" y="1417320"/>
+            <a:ext cx="2590800" cy="2194560"/>
+          </a:xfrm>
+          <a:prstGeom prst="roundRect">
+            <a:avLst>
+              <a:gd name="adj" fmla="val 5000"/>
+            </a:avLst>
+          </a:prstGeom>
+          <a:solidFill>
+            <a:srgbClr val="F4F6F9"/>
+          </a:solidFill>
+          <a:ln w="12700">
+            <a:solidFill>
+              <a:srgbClr val="D7DCE3"/>
+            </a:solidFill>
+            <a:prstDash val="solid"/>
+          </a:ln>
+        </p:spPr>
+      </p:sp>
+      <p:sp>
+        <p:nvSpPr>
+          <p:cNvPr id="12" name="Shape 10"/>
+          <p:cNvSpPr/>
+          <p:nvPr/>
+        </p:nvSpPr>
+        <p:spPr>
+          <a:xfrm>
+            <a:off x="3596640" y="1737360"/>
+            <a:ext cx="1950720" cy="457200"/>
+          </a:xfrm>
+          <a:prstGeom prst="roundRect">
+            <a:avLst>
+              <a:gd name="adj" fmla="val 12000"/>
+            </a:avLst>
+          </a:prstGeom>
+          <a:solidFill>
+            <a:srgbClr val="0E7C86"/>
+          </a:solidFill>
+          <a:ln/>
+        </p:spPr>
+      </p:sp>
+      <p:sp>
+        <p:nvSpPr>
+          <p:cNvPr id="13" name="Text 11"/>
+          <p:cNvSpPr/>
+          <p:nvPr/>
+        </p:nvSpPr>
+        <p:spPr>
+          <a:xfrm>
+            <a:off x="3596640" y="1737360"/>
+            <a:ext cx="1950720" cy="457200"/>
+          </a:xfrm>
+          <a:prstGeom prst="rect">
+            <a:avLst/>
+          </a:prstGeom>
+          <a:noFill/>
+          <a:ln/>
+        </p:spPr>
+        <p:txBody>
+          <a:bodyPr wrap="square" rtlCol="0" anchor="ctr"/>
+          <a:lstStyle/>
+          <a:p>
+            <a:pPr algn="ctr" indent="0" marL="0">
+              <a:buNone/>
+            </a:pPr>
+            <a:r>
+              <a:rPr lang="en-US" sz="1400" b="1" dirty="0">
+                <a:solidFill>
+                  <a:srgbClr val="FFFFFF"/>
+                </a:solidFill>
+                <a:latin typeface="Yu Gothic UI Semibold" pitchFamily="34" charset="0"/>
+                <a:ea typeface="Yu Gothic UI Semibold" pitchFamily="34" charset="-122"/>
+                <a:cs typeface="Yu Gothic UI Semibold" pitchFamily="34" charset="-120"/>
+              </a:rPr>
+              <a:t>ステップ②</a:t>
+            </a:r>
+            <a:endParaRPr lang="en-US" sz="1400" dirty="0"/>
+          </a:p>
+        </p:txBody>
+      </p:sp>
+      <p:sp>
+        <p:nvSpPr>
+          <p:cNvPr id="14" name="Text 12"/>
+          <p:cNvSpPr/>
+          <p:nvPr/>
+        </p:nvSpPr>
+        <p:spPr>
+          <a:xfrm>
+            <a:off x="3441192" y="2331720"/>
+            <a:ext cx="2261616" cy="502920"/>
+          </a:xfrm>
+          <a:prstGeom prst="rect">
+            <a:avLst/>
+          </a:prstGeom>
+          <a:noFill/>
+          <a:ln/>
+        </p:spPr>
+        <p:txBody>
+          <a:bodyPr wrap="square" rtlCol="0" anchor="ctr"/>
+          <a:lstStyle/>
+          <a:p>
+            <a:pPr algn="ctr" indent="0" marL="0">
+              <a:buNone/>
+            </a:pPr>
+            <a:r>
+              <a:rPr lang="en-US" sz="1700" b="1" dirty="0">
                 <a:solidFill>
                   <a:srgbClr val="1A1A1A"/>
+                </a:solidFill>
+                <a:latin typeface="Yu Gothic UI Semibold" pitchFamily="34" charset="0"/>
+                <a:ea typeface="Yu Gothic UI Semibold" pitchFamily="34" charset="-122"/>
+                <a:cs typeface="Yu Gothic UI Semibold" pitchFamily="34" charset="-120"/>
+              </a:rPr>
+              <a:t>バイブコーディング</a:t>
+            </a:r>
+            <a:endParaRPr lang="en-US" sz="1700" dirty="0"/>
+          </a:p>
+        </p:txBody>
+      </p:sp>
+      <p:sp>
+        <p:nvSpPr>
+          <p:cNvPr id="15" name="Text 13"/>
+          <p:cNvSpPr/>
+          <p:nvPr/>
+        </p:nvSpPr>
+        <p:spPr>
+          <a:xfrm>
+            <a:off x="3441192" y="2880360"/>
+            <a:ext cx="2261616" cy="640080"/>
+          </a:xfrm>
+          <a:prstGeom prst="rect">
+            <a:avLst/>
+          </a:prstGeom>
+          <a:noFill/>
+          <a:ln/>
+        </p:spPr>
+        <p:txBody>
+          <a:bodyPr wrap="square" rtlCol="0" anchor="t"/>
+          <a:lstStyle/>
+          <a:p>
+            <a:pPr algn="ctr" indent="0" marL="0">
+              <a:buNone/>
+            </a:pPr>
+            <a:r>
+              <a:rPr lang="en-US" sz="1200" dirty="0">
+                <a:solidFill>
+                  <a:srgbClr val="555555"/>
                 </a:solidFill>
                 <a:latin typeface="Yu Gothic UI" pitchFamily="34" charset="0"/>
                 <a:ea typeface="Yu Gothic UI" pitchFamily="34" charset="-122"/>
                 <a:cs typeface="Yu Gothic UI" pitchFamily="34" charset="-120"/>
               </a:rPr>
-              <a:t>公的指標=国発表の値、独自数値=代理店の実測 or 判断、計算式=データから導出。</a:t>
-            </a:r>
-            <a:endParaRPr lang="en-US" sz="1600" dirty="0"/>
-          </a:p>
-        </p:txBody>
-      </p:sp>
-      <p:sp>
-        <p:nvSpPr>
-          <p:cNvPr id="14" name="Shape 12"/>
-          <p:cNvSpPr/>
-          <p:nvPr/>
-        </p:nvSpPr>
-        <p:spPr>
-          <a:xfrm>
-            <a:off x="4654296" y="1188720"/>
-            <a:ext cx="1979676" cy="3017520"/>
+              <a:t>AI に頼んで 動くアプリを作る</a:t>
+            </a:r>
+            <a:endParaRPr lang="en-US" sz="1200" dirty="0"/>
+          </a:p>
+        </p:txBody>
+      </p:sp>
+      <p:sp>
+        <p:nvSpPr>
+          <p:cNvPr id="16" name="Text 14"/>
+          <p:cNvSpPr/>
+          <p:nvPr/>
+        </p:nvSpPr>
+        <p:spPr>
+          <a:xfrm>
+            <a:off x="5885688" y="2331720"/>
+            <a:ext cx="228600" cy="365760"/>
+          </a:xfrm>
+          <a:prstGeom prst="rect">
+            <a:avLst/>
+          </a:prstGeom>
+          <a:noFill/>
+          <a:ln/>
+        </p:spPr>
+        <p:txBody>
+          <a:bodyPr wrap="square" rtlCol="0" anchor="ctr"/>
+          <a:lstStyle/>
+          <a:p>
+            <a:pPr algn="ctr" indent="0" marL="0">
+              <a:buNone/>
+            </a:pPr>
+            <a:r>
+              <a:rPr lang="en-US" sz="2200" b="1" dirty="0">
+                <a:solidFill>
+                  <a:srgbClr val="E8A33D"/>
+                </a:solidFill>
+                <a:latin typeface="Yu Gothic UI Semibold" pitchFamily="34" charset="0"/>
+                <a:ea typeface="Yu Gothic UI Semibold" pitchFamily="34" charset="-122"/>
+                <a:cs typeface="Yu Gothic UI Semibold" pitchFamily="34" charset="-120"/>
+              </a:rPr>
+              <a:t>▶</a:t>
+            </a:r>
+            <a:endParaRPr lang="en-US" sz="2200" dirty="0"/>
+          </a:p>
+        </p:txBody>
+      </p:sp>
+      <p:sp>
+        <p:nvSpPr>
+          <p:cNvPr id="17" name="Shape 15"/>
+          <p:cNvSpPr/>
+          <p:nvPr/>
+        </p:nvSpPr>
+        <p:spPr>
+          <a:xfrm>
+            <a:off x="6141720" y="1417320"/>
+            <a:ext cx="2590800" cy="2194560"/>
           </a:xfrm>
           <a:prstGeom prst="roundRect">
             <a:avLst>
-              <a:gd name="adj" fmla="val 4619"/>
+              <a:gd name="adj" fmla="val 5000"/>
             </a:avLst>
           </a:prstGeom>
           <a:solidFill>
-            <a:srgbClr val="FFFFFF"/>
-          </a:solidFill>
-          <a:ln w="19050">
+            <a:srgbClr val="F4F6F9"/>
+          </a:solidFill>
+          <a:ln w="12700">
             <a:solidFill>
-              <a:srgbClr val="1F3A5F"/>
+              <a:srgbClr val="D7DCE3"/>
             </a:solidFill>
             <a:prstDash val="solid"/>
           </a:ln>
@@ -2633,56 +3528,36 @@
       </p:sp>
       <p:sp>
         <p:nvSpPr>
-          <p:cNvPr id="15" name="Shape 13"/>
-          <p:cNvSpPr/>
-          <p:nvPr/>
-        </p:nvSpPr>
-        <p:spPr>
-          <a:xfrm>
-            <a:off x="4654296" y="1188720"/>
-            <a:ext cx="1979676" cy="566928"/>
+          <p:cNvPr id="18" name="Shape 16"/>
+          <p:cNvSpPr/>
+          <p:nvPr/>
+        </p:nvSpPr>
+        <p:spPr>
+          <a:xfrm>
+            <a:off x="6461760" y="1737360"/>
+            <a:ext cx="1950720" cy="457200"/>
           </a:xfrm>
           <a:prstGeom prst="roundRect">
             <a:avLst>
-              <a:gd name="adj" fmla="val 16129"/>
+              <a:gd name="adj" fmla="val 12000"/>
             </a:avLst>
           </a:prstGeom>
           <a:solidFill>
-            <a:srgbClr val="1F3A5F"/>
-          </a:solidFill>
-          <a:ln/>
-        </p:spPr>
-      </p:sp>
-      <p:sp>
-        <p:nvSpPr>
-          <p:cNvPr id="16" name="Shape 14"/>
-          <p:cNvSpPr/>
-          <p:nvPr/>
-        </p:nvSpPr>
-        <p:spPr>
-          <a:xfrm>
-            <a:off x="4654296" y="1417320"/>
-            <a:ext cx="1979676" cy="338328"/>
-          </a:xfrm>
-          <a:prstGeom prst="rect">
-            <a:avLst/>
-          </a:prstGeom>
-          <a:solidFill>
-            <a:srgbClr val="1F3A5F"/>
-          </a:solidFill>
-          <a:ln/>
-        </p:spPr>
-      </p:sp>
-      <p:sp>
-        <p:nvSpPr>
-          <p:cNvPr id="17" name="Text 15"/>
-          <p:cNvSpPr/>
-          <p:nvPr/>
-        </p:nvSpPr>
-        <p:spPr>
-          <a:xfrm>
-            <a:off x="4782312" y="1280160"/>
-            <a:ext cx="1723644" cy="457200"/>
+            <a:srgbClr val="0E7C86"/>
+          </a:solidFill>
+          <a:ln/>
+        </p:spPr>
+      </p:sp>
+      <p:sp>
+        <p:nvSpPr>
+          <p:cNvPr id="19" name="Text 17"/>
+          <p:cNvSpPr/>
+          <p:nvPr/>
+        </p:nvSpPr>
+        <p:spPr>
+          <a:xfrm>
+            <a:off x="6461760" y="1737360"/>
+            <a:ext cx="1950720" cy="457200"/>
           </a:xfrm>
           <a:prstGeom prst="rect">
             <a:avLst/>
@@ -2694,11 +3569,11 @@
           <a:bodyPr wrap="square" rtlCol="0" anchor="ctr"/>
           <a:lstStyle/>
           <a:p>
-            <a:pPr indent="0" marL="0">
-              <a:buNone/>
-            </a:pPr>
-            <a:r>
-              <a:rPr lang="en-US" sz="1600" b="1" dirty="0">
+            <a:pPr algn="ctr" indent="0" marL="0">
+              <a:buNone/>
+            </a:pPr>
+            <a:r>
+              <a:rPr lang="en-US" sz="1400" b="1" dirty="0">
                 <a:solidFill>
                   <a:srgbClr val="FFFFFF"/>
                 </a:solidFill>
@@ -2706,22 +3581,61 @@
                 <a:ea typeface="Yu Gothic UI Semibold" pitchFamily="34" charset="-122"/>
                 <a:cs typeface="Yu Gothic UI Semibold" pitchFamily="34" charset="-120"/>
               </a:rPr>
-              <a:t>UI(ユーザーインターフェース)</a:t>
-            </a:r>
-            <a:endParaRPr lang="en-US" sz="1600" dirty="0"/>
-          </a:p>
-        </p:txBody>
-      </p:sp>
-      <p:sp>
-        <p:nvSpPr>
-          <p:cNvPr id="18" name="Text 16"/>
-          <p:cNvSpPr/>
-          <p:nvPr/>
-        </p:nvSpPr>
-        <p:spPr>
-          <a:xfrm>
-            <a:off x="4818888" y="1938528"/>
-            <a:ext cx="1650492" cy="2148840"/>
+              <a:t>ステップ③</a:t>
+            </a:r>
+            <a:endParaRPr lang="en-US" sz="1400" dirty="0"/>
+          </a:p>
+        </p:txBody>
+      </p:sp>
+      <p:sp>
+        <p:nvSpPr>
+          <p:cNvPr id="20" name="Text 18"/>
+          <p:cNvSpPr/>
+          <p:nvPr/>
+        </p:nvSpPr>
+        <p:spPr>
+          <a:xfrm>
+            <a:off x="6306312" y="2331720"/>
+            <a:ext cx="2261616" cy="502920"/>
+          </a:xfrm>
+          <a:prstGeom prst="rect">
+            <a:avLst/>
+          </a:prstGeom>
+          <a:noFill/>
+          <a:ln/>
+        </p:spPr>
+        <p:txBody>
+          <a:bodyPr wrap="square" rtlCol="0" anchor="ctr"/>
+          <a:lstStyle/>
+          <a:p>
+            <a:pPr algn="ctr" indent="0" marL="0">
+              <a:buNone/>
+            </a:pPr>
+            <a:r>
+              <a:rPr lang="en-US" sz="1700" b="1" dirty="0">
+                <a:solidFill>
+                  <a:srgbClr val="1A1A1A"/>
+                </a:solidFill>
+                <a:latin typeface="Yu Gothic UI Semibold" pitchFamily="34" charset="0"/>
+                <a:ea typeface="Yu Gothic UI Semibold" pitchFamily="34" charset="-122"/>
+                <a:cs typeface="Yu Gothic UI Semibold" pitchFamily="34" charset="-120"/>
+              </a:rPr>
+              <a:t>デプロイとテスト</a:t>
+            </a:r>
+            <a:endParaRPr lang="en-US" sz="1700" dirty="0"/>
+          </a:p>
+        </p:txBody>
+      </p:sp>
+      <p:sp>
+        <p:nvSpPr>
+          <p:cNvPr id="21" name="Text 19"/>
+          <p:cNvSpPr/>
+          <p:nvPr/>
+        </p:nvSpPr>
+        <p:spPr>
+          <a:xfrm>
+            <a:off x="6306312" y="2880360"/>
+            <a:ext cx="2261616" cy="640080"/>
           </a:xfrm>
           <a:prstGeom prst="rect">
             <a:avLst/>
@@ -2733,123 +3647,56 @@
           <a:bodyPr wrap="square" rtlCol="0" anchor="t"/>
           <a:lstStyle/>
           <a:p>
-            <a:pPr indent="0" marL="0">
-              <a:spcAft>
-                <a:spcPts val="600"/>
-              </a:spcAft>
-              <a:buNone/>
-            </a:pPr>
-            <a:r>
-              <a:rPr lang="en-US" sz="1600" dirty="0">
-                <a:solidFill>
-                  <a:srgbClr val="1A1A1A"/>
+            <a:pPr algn="ctr" indent="0" marL="0">
+              <a:buNone/>
+            </a:pPr>
+            <a:r>
+              <a:rPr lang="en-US" sz="1200" dirty="0">
+                <a:solidFill>
+                  <a:srgbClr val="555555"/>
                 </a:solidFill>
                 <a:latin typeface="Yu Gothic UI" pitchFamily="34" charset="0"/>
                 <a:ea typeface="Yu Gothic UI" pitchFamily="34" charset="-122"/>
                 <a:cs typeface="Yu Gothic UI" pitchFamily="34" charset="-120"/>
               </a:rPr>
-              <a:t>ユーザーが操作する画面。</a:t>
-            </a:r>
-            <a:pPr indent="0" marL="0">
-              <a:spcAft>
-                <a:spcPts val="600"/>
-              </a:spcAft>
-              <a:buNone/>
-            </a:pPr>
-            <a:r>
-              <a:rPr lang="en-US" sz="1600" dirty="0">
-                <a:solidFill>
-                  <a:srgbClr val="1A1A1A"/>
-                </a:solidFill>
-                <a:latin typeface="Yu Gothic UI" pitchFamily="34" charset="0"/>
-                <a:ea typeface="Yu Gothic UI" pitchFamily="34" charset="-122"/>
-                <a:cs typeface="Yu Gothic UI" pitchFamily="34" charset="-120"/>
-              </a:rPr>
-              <a:t>サイドバー(スプシ内)/ WebApp(独立URL)/ フォーム の3種類が選択肢。</a:t>
-            </a:r>
-            <a:endParaRPr lang="en-US" sz="1600" dirty="0"/>
-          </a:p>
-        </p:txBody>
-      </p:sp>
-      <p:sp>
-        <p:nvSpPr>
-          <p:cNvPr id="19" name="Shape 17"/>
-          <p:cNvSpPr/>
-          <p:nvPr/>
-        </p:nvSpPr>
-        <p:spPr>
-          <a:xfrm>
-            <a:off x="6798564" y="1188720"/>
-            <a:ext cx="1979676" cy="3017520"/>
+              <a:t>みんなが使える形にして 動作確認</a:t>
+            </a:r>
+            <a:endParaRPr lang="en-US" sz="1200" dirty="0"/>
+          </a:p>
+        </p:txBody>
+      </p:sp>
+      <p:sp>
+        <p:nvSpPr>
+          <p:cNvPr id="22" name="Shape 20"/>
+          <p:cNvSpPr/>
+          <p:nvPr/>
+        </p:nvSpPr>
+        <p:spPr>
+          <a:xfrm>
+            <a:off x="411480" y="3886200"/>
+            <a:ext cx="8321040" cy="502920"/>
           </a:xfrm>
           <a:prstGeom prst="roundRect">
             <a:avLst>
-              <a:gd name="adj" fmla="val 4619"/>
+              <a:gd name="adj" fmla="val 14545"/>
             </a:avLst>
           </a:prstGeom>
           <a:solidFill>
-            <a:srgbClr val="FFFFFF"/>
-          </a:solidFill>
-          <a:ln w="19050">
-            <a:solidFill>
-              <a:srgbClr val="7C5F8A"/>
-            </a:solidFill>
-            <a:prstDash val="solid"/>
-          </a:ln>
-        </p:spPr>
-      </p:sp>
-      <p:sp>
-        <p:nvSpPr>
-          <p:cNvPr id="20" name="Shape 18"/>
-          <p:cNvSpPr/>
-          <p:nvPr/>
-        </p:nvSpPr>
-        <p:spPr>
-          <a:xfrm>
-            <a:off x="6798564" y="1188720"/>
-            <a:ext cx="1979676" cy="566928"/>
-          </a:xfrm>
-          <a:prstGeom prst="roundRect">
-            <a:avLst>
-              <a:gd name="adj" fmla="val 16129"/>
-            </a:avLst>
-          </a:prstGeom>
-          <a:solidFill>
-            <a:srgbClr val="7C5F8A"/>
-          </a:solidFill>
-          <a:ln/>
-        </p:spPr>
-      </p:sp>
-      <p:sp>
-        <p:nvSpPr>
-          <p:cNvPr id="21" name="Shape 19"/>
-          <p:cNvSpPr/>
-          <p:nvPr/>
-        </p:nvSpPr>
-        <p:spPr>
-          <a:xfrm>
-            <a:off x="6798564" y="1417320"/>
-            <a:ext cx="1979676" cy="338328"/>
-          </a:xfrm>
-          <a:prstGeom prst="rect">
-            <a:avLst/>
-          </a:prstGeom>
-          <a:solidFill>
-            <a:srgbClr val="7C5F8A"/>
-          </a:solidFill>
-          <a:ln/>
-        </p:spPr>
-      </p:sp>
-      <p:sp>
-        <p:nvSpPr>
-          <p:cNvPr id="22" name="Text 20"/>
-          <p:cNvSpPr/>
-          <p:nvPr/>
-        </p:nvSpPr>
-        <p:spPr>
-          <a:xfrm>
-            <a:off x="6926580" y="1280160"/>
-            <a:ext cx="1723644" cy="457200"/>
+            <a:srgbClr val="E8A33D"/>
+          </a:solidFill>
+          <a:ln/>
+        </p:spPr>
+      </p:sp>
+      <p:sp>
+        <p:nvSpPr>
+          <p:cNvPr id="23" name="Text 21"/>
+          <p:cNvSpPr/>
+          <p:nvPr/>
+        </p:nvSpPr>
+        <p:spPr>
+          <a:xfrm>
+            <a:off x="411480" y="3886200"/>
+            <a:ext cx="8321040" cy="502920"/>
           </a:xfrm>
           <a:prstGeom prst="rect">
             <a:avLst/>
@@ -2861,256 +3708,21 @@
           <a:bodyPr wrap="square" rtlCol="0" anchor="ctr"/>
           <a:lstStyle/>
           <a:p>
-            <a:pPr indent="0" marL="0">
-              <a:buNone/>
-            </a:pPr>
-            <a:r>
-              <a:rPr lang="en-US" sz="1600" b="1" dirty="0">
-                <a:solidFill>
-                  <a:srgbClr val="FFFFFF"/>
+            <a:pPr algn="ctr" indent="0" marL="0">
+              <a:buNone/>
+            </a:pPr>
+            <a:r>
+              <a:rPr lang="en-US" sz="1400" b="1" dirty="0">
+                <a:solidFill>
+                  <a:srgbClr val="1F3A5F"/>
                 </a:solidFill>
                 <a:latin typeface="Yu Gothic UI Semibold" pitchFamily="34" charset="0"/>
                 <a:ea typeface="Yu Gothic UI Semibold" pitchFamily="34" charset="-122"/>
                 <a:cs typeface="Yu Gothic UI Semibold" pitchFamily="34" charset="-120"/>
               </a:rPr>
-              <a:t>独自アドバイスマスタ</a:t>
-            </a:r>
-            <a:endParaRPr lang="en-US" sz="1600" dirty="0"/>
-          </a:p>
-        </p:txBody>
-      </p:sp>
-      <p:sp>
-        <p:nvSpPr>
-          <p:cNvPr id="23" name="Text 21"/>
-          <p:cNvSpPr/>
-          <p:nvPr/>
-        </p:nvSpPr>
-        <p:spPr>
-          <a:xfrm>
-            <a:off x="6963156" y="1938528"/>
-            <a:ext cx="1650492" cy="2148840"/>
-          </a:xfrm>
-          <a:prstGeom prst="rect">
-            <a:avLst/>
-          </a:prstGeom>
-          <a:noFill/>
-          <a:ln/>
-        </p:spPr>
-        <p:txBody>
-          <a:bodyPr wrap="square" rtlCol="0" anchor="t"/>
-          <a:lstStyle/>
-          <a:p>
-            <a:pPr indent="0" marL="0">
-              <a:spcAft>
-                <a:spcPts val="600"/>
-              </a:spcAft>
-              <a:buNone/>
-            </a:pPr>
-            <a:r>
-              <a:rPr lang="en-US" sz="1600" dirty="0">
-                <a:solidFill>
-                  <a:srgbClr val="1A1A1A"/>
-                </a:solidFill>
-                <a:latin typeface="Yu Gothic UI" pitchFamily="34" charset="0"/>
-                <a:ea typeface="Yu Gothic UI" pitchFamily="34" charset="-122"/>
-                <a:cs typeface="Yu Gothic UI" pitchFamily="34" charset="-120"/>
-              </a:rPr>
-              <a:t>"こういう顧客状況なら こういう提案" を代理店ならではの視点で書き出したパターン集。</a:t>
-            </a:r>
-            <a:endParaRPr lang="en-US" sz="1600" dirty="0"/>
-          </a:p>
-        </p:txBody>
-      </p:sp>
-      <p:sp>
-        <p:nvSpPr>
-          <p:cNvPr id="24" name="Text 22"/>
-          <p:cNvSpPr/>
-          <p:nvPr/>
-        </p:nvSpPr>
-        <p:spPr>
-          <a:xfrm>
-            <a:off x="365760" y="4389120"/>
-            <a:ext cx="8412480" cy="914400"/>
-          </a:xfrm>
-          <a:prstGeom prst="rect">
-            <a:avLst/>
-          </a:prstGeom>
-          <a:noFill/>
-          <a:ln/>
-        </p:spPr>
-        <p:txBody>
-          <a:bodyPr wrap="square" rtlCol="0" anchor="t"/>
-          <a:lstStyle/>
-          <a:p>
-            <a:pPr indent="0" marL="0">
-              <a:buNone/>
-            </a:pPr>
-            <a:r>
-              <a:rPr lang="en-US" sz="1100" b="1" dirty="0">
-                <a:solidFill>
-                  <a:srgbClr val="E8A33D"/>
-                </a:solidFill>
-                <a:latin typeface="Yu Gothic UI" pitchFamily="34" charset="0"/>
-                <a:ea typeface="Yu Gothic UI" pitchFamily="34" charset="-122"/>
-                <a:cs typeface="Yu Gothic UI" pitchFamily="34" charset="-120"/>
-              </a:rPr>
-              <a:t>※ </a:t>
-            </a:r>
-            <a:pPr indent="0" marL="0">
-              <a:buNone/>
-            </a:pPr>
-            <a:r>
-              <a:rPr lang="en-US" sz="1100" b="1" dirty="0">
-                <a:solidFill>
-                  <a:srgbClr val="1F3A5F"/>
-                </a:solidFill>
-                <a:latin typeface="Yu Gothic UI" pitchFamily="34" charset="0"/>
-                <a:ea typeface="Yu Gothic UI" pitchFamily="34" charset="-122"/>
-                <a:cs typeface="Yu Gothic UI" pitchFamily="34" charset="-120"/>
-              </a:rPr>
-              <a:t>スプシ = データベース: </a:t>
-            </a:r>
-            <a:pPr indent="0" marL="0">
-              <a:buNone/>
-            </a:pPr>
-            <a:r>
-              <a:rPr lang="en-US" sz="1100" dirty="0">
-                <a:solidFill>
-                  <a:srgbClr val="555555"/>
-                </a:solidFill>
-                <a:latin typeface="Yu Gothic UI" pitchFamily="34" charset="0"/>
-                <a:ea typeface="Yu Gothic UI" pitchFamily="34" charset="-122"/>
-                <a:cs typeface="Yu Gothic UI" pitchFamily="34" charset="-120"/>
-              </a:rPr>
-              <a:t>テーブル = シート、列 = カラム   </a:t>
-            </a:r>
-            <a:pPr indent="0" marL="0">
-              <a:buNone/>
-            </a:pPr>
-            <a:r>
-              <a:rPr lang="en-US" sz="1100" b="1" dirty="0">
-                <a:solidFill>
-                  <a:srgbClr val="E8A33D"/>
-                </a:solidFill>
-                <a:latin typeface="Yu Gothic UI" pitchFamily="34" charset="0"/>
-                <a:ea typeface="Yu Gothic UI" pitchFamily="34" charset="-122"/>
-                <a:cs typeface="Yu Gothic UI" pitchFamily="34" charset="-120"/>
-              </a:rPr>
-              <a:t>※ </a:t>
-            </a:r>
-            <a:pPr indent="0" marL="0">
-              <a:buNone/>
-            </a:pPr>
-            <a:r>
-              <a:rPr lang="en-US" sz="1100" b="1" dirty="0">
-                <a:solidFill>
-                  <a:srgbClr val="1F3A5F"/>
-                </a:solidFill>
-                <a:latin typeface="Yu Gothic UI" pitchFamily="34" charset="0"/>
-                <a:ea typeface="Yu Gothic UI" pitchFamily="34" charset="-122"/>
-                <a:cs typeface="Yu Gothic UI" pitchFamily="34" charset="-120"/>
-              </a:rPr>
-              <a:t>公的指標 / 独自数値 / 計算式: </a:t>
-            </a:r>
-            <a:pPr indent="0" marL="0">
-              <a:buNone/>
-            </a:pPr>
-            <a:r>
-              <a:rPr lang="en-US" sz="1100" dirty="0">
-                <a:solidFill>
-                  <a:srgbClr val="555555"/>
-                </a:solidFill>
-                <a:latin typeface="Yu Gothic UI" pitchFamily="34" charset="0"/>
-                <a:ea typeface="Yu Gothic UI" pitchFamily="34" charset="-122"/>
-                <a:cs typeface="Yu Gothic UI" pitchFamily="34" charset="-120"/>
-              </a:rPr>
-              <a:t>出所を明確にすると更新運用が楽   </a:t>
-            </a:r>
-            <a:pPr indent="0" marL="0">
-              <a:buNone/>
-            </a:pPr>
-            <a:r>
-              <a:rPr lang="en-US" sz="1100" b="1" dirty="0">
-                <a:solidFill>
-                  <a:srgbClr val="E8A33D"/>
-                </a:solidFill>
-                <a:latin typeface="Yu Gothic UI" pitchFamily="34" charset="0"/>
-                <a:ea typeface="Yu Gothic UI" pitchFamily="34" charset="-122"/>
-                <a:cs typeface="Yu Gothic UI" pitchFamily="34" charset="-120"/>
-              </a:rPr>
-              <a:t>※ </a:t>
-            </a:r>
-            <a:pPr indent="0" marL="0">
-              <a:buNone/>
-            </a:pPr>
-            <a:r>
-              <a:rPr lang="en-US" sz="1100" b="1" dirty="0">
-                <a:solidFill>
-                  <a:srgbClr val="1F3A5F"/>
-                </a:solidFill>
-                <a:latin typeface="Yu Gothic UI" pitchFamily="34" charset="0"/>
-                <a:ea typeface="Yu Gothic UI" pitchFamily="34" charset="-122"/>
-                <a:cs typeface="Yu Gothic UI" pitchFamily="34" charset="-120"/>
-              </a:rPr>
-              <a:t>UI(ユーザーインターフェース): </a:t>
-            </a:r>
-            <a:pPr indent="0" marL="0">
-              <a:buNone/>
-            </a:pPr>
-            <a:r>
-              <a:rPr lang="en-US" sz="1100" dirty="0">
-                <a:solidFill>
-                  <a:srgbClr val="555555"/>
-                </a:solidFill>
-                <a:latin typeface="Yu Gothic UI" pitchFamily="34" charset="0"/>
-                <a:ea typeface="Yu Gothic UI" pitchFamily="34" charset="-122"/>
-                <a:cs typeface="Yu Gothic UI" pitchFamily="34" charset="-120"/>
-              </a:rPr>
-              <a:t>使うシーンで選ぶ   </a:t>
-            </a:r>
-            <a:pPr indent="0" marL="0">
-              <a:buNone/>
-            </a:pPr>
-            <a:r>
-              <a:rPr lang="en-US" sz="1100" b="1" dirty="0">
-                <a:solidFill>
-                  <a:srgbClr val="E8A33D"/>
-                </a:solidFill>
-                <a:latin typeface="Yu Gothic UI" pitchFamily="34" charset="0"/>
-                <a:ea typeface="Yu Gothic UI" pitchFamily="34" charset="-122"/>
-                <a:cs typeface="Yu Gothic UI" pitchFamily="34" charset="-120"/>
-              </a:rPr>
-              <a:t>※ </a:t>
-            </a:r>
-            <a:pPr indent="0" marL="0">
-              <a:buNone/>
-            </a:pPr>
-            <a:r>
-              <a:rPr lang="en-US" sz="1100" b="1" dirty="0">
-                <a:solidFill>
-                  <a:srgbClr val="1F3A5F"/>
-                </a:solidFill>
-                <a:latin typeface="Yu Gothic UI" pitchFamily="34" charset="0"/>
-                <a:ea typeface="Yu Gothic UI" pitchFamily="34" charset="-122"/>
-                <a:cs typeface="Yu Gothic UI" pitchFamily="34" charset="-120"/>
-              </a:rPr>
-              <a:t>独自アドバイスマスタ: </a:t>
-            </a:r>
-            <a:pPr indent="0" marL="0">
-              <a:buNone/>
-            </a:pPr>
-            <a:r>
-              <a:rPr lang="en-US" sz="1100" dirty="0">
-                <a:solidFill>
-                  <a:srgbClr val="555555"/>
-                </a:solidFill>
-                <a:latin typeface="Yu Gothic UI" pitchFamily="34" charset="0"/>
-                <a:ea typeface="Yu Gothic UI" pitchFamily="34" charset="-122"/>
-                <a:cs typeface="Yu Gothic UI" pitchFamily="34" charset="-120"/>
-              </a:rPr>
-              <a:t>AI プロンプトに埋め込んで強みを反映</a:t>
-            </a:r>
-            <a:endParaRPr lang="en-US" sz="1100" dirty="0"/>
+              <a:t>今日は「ステップ①」= 設計書を作る からスタートします</a:t>
+            </a:r>
+            <a:endParaRPr lang="en-US" sz="1400" dirty="0"/>
           </a:p>
         </p:txBody>
       </p:sp>
@@ -3174,8 +3786,8 @@
         </p:nvSpPr>
         <p:spPr>
           <a:xfrm>
-            <a:off x="411480" y="201168"/>
-            <a:ext cx="8412480" cy="594360"/>
+            <a:off x="411480" y="182880"/>
+            <a:ext cx="8412480" cy="548640"/>
           </a:xfrm>
           <a:prstGeom prst="rect">
             <a:avLst/>
@@ -3191,7 +3803,7 @@
               <a:buNone/>
             </a:pPr>
             <a:r>
-              <a:rPr lang="en-US" sz="2600" b="1" dirty="0">
+              <a:rPr lang="en-US" sz="2400" b="1" dirty="0">
                 <a:solidFill>
                   <a:srgbClr val="1F3A5F"/>
                 </a:solidFill>
@@ -3199,34 +3811,73 @@
                 <a:ea typeface="Yu Gothic UI Semibold" pitchFamily="34" charset="-122"/>
                 <a:cs typeface="Yu Gothic UI Semibold" pitchFamily="34" charset="-120"/>
               </a:rPr>
-              <a:t>演習1 DB設計と 判断基準・数値の設計</a:t>
-            </a:r>
-            <a:endParaRPr lang="en-US" sz="2600" dirty="0"/>
-          </a:p>
-        </p:txBody>
-      </p:sp>
-      <p:sp>
-        <p:nvSpPr>
-          <p:cNvPr id="4" name="Shape 2"/>
-          <p:cNvSpPr/>
-          <p:nvPr/>
-        </p:nvSpPr>
-        <p:spPr>
-          <a:xfrm>
-            <a:off x="411480" y="1005840"/>
-            <a:ext cx="4160520" cy="1783080"/>
+              <a:t>なぜ「設計書」から作るのか?</a:t>
+            </a:r>
+            <a:endParaRPr lang="en-US" sz="2400" dirty="0"/>
+          </a:p>
+        </p:txBody>
+      </p:sp>
+      <p:sp>
+        <p:nvSpPr>
+          <p:cNvPr id="4" name="Text 2"/>
+          <p:cNvSpPr/>
+          <p:nvPr/>
+        </p:nvSpPr>
+        <p:spPr>
+          <a:xfrm>
+            <a:off x="411480" y="749808"/>
+            <a:ext cx="8412480" cy="365760"/>
+          </a:xfrm>
+          <a:prstGeom prst="rect">
+            <a:avLst/>
+          </a:prstGeom>
+          <a:noFill/>
+          <a:ln/>
+        </p:spPr>
+        <p:txBody>
+          <a:bodyPr wrap="square" rtlCol="0" anchor="ctr"/>
+          <a:lstStyle/>
+          <a:p>
+            <a:pPr indent="0" marL="0">
+              <a:buNone/>
+            </a:pPr>
+            <a:r>
+              <a:rPr lang="en-US" sz="1300" i="1" dirty="0">
+                <a:solidFill>
+                  <a:srgbClr val="555555"/>
+                </a:solidFill>
+                <a:latin typeface="Yu Gothic UI" pitchFamily="34" charset="0"/>
+                <a:ea typeface="Yu Gothic UI" pitchFamily="34" charset="-122"/>
+                <a:cs typeface="Yu Gothic UI" pitchFamily="34" charset="-120"/>
+              </a:rPr>
+              <a:t>いきなりコードを書き始めると、後で困ります</a:t>
+            </a:r>
+            <a:endParaRPr lang="en-US" sz="1300" dirty="0"/>
+          </a:p>
+        </p:txBody>
+      </p:sp>
+      <p:sp>
+        <p:nvSpPr>
+          <p:cNvPr id="5" name="Shape 3"/>
+          <p:cNvSpPr/>
+          <p:nvPr/>
+        </p:nvSpPr>
+        <p:spPr>
+          <a:xfrm>
+            <a:off x="411480" y="1280160"/>
+            <a:ext cx="4023360" cy="3017520"/>
           </a:xfrm>
           <a:prstGeom prst="roundRect">
             <a:avLst>
-              <a:gd name="adj" fmla="val 4103"/>
+              <a:gd name="adj" fmla="val 3030"/>
             </a:avLst>
           </a:prstGeom>
           <a:solidFill>
-            <a:srgbClr val="F4F6F9"/>
-          </a:solidFill>
-          <a:ln w="6350">
+            <a:srgbClr val="FDECEA"/>
+          </a:solidFill>
+          <a:ln w="25400">
             <a:solidFill>
-              <a:srgbClr val="D7DCE3"/>
+              <a:srgbClr val="C76B7A"/>
             </a:solidFill>
             <a:prstDash val="solid"/>
           </a:ln>
@@ -3234,34 +3885,34 @@
       </p:sp>
       <p:sp>
         <p:nvSpPr>
-          <p:cNvPr id="5" name="Shape 3"/>
-          <p:cNvSpPr/>
-          <p:nvPr/>
-        </p:nvSpPr>
-        <p:spPr>
-          <a:xfrm>
-            <a:off x="411480" y="1005840"/>
-            <a:ext cx="91440" cy="1783080"/>
-          </a:xfrm>
-          <a:prstGeom prst="rect">
-            <a:avLst/>
-          </a:prstGeom>
-          <a:solidFill>
-            <a:srgbClr val="1F3A5F"/>
-          </a:solidFill>
-          <a:ln/>
-        </p:spPr>
-      </p:sp>
-      <p:sp>
-        <p:nvSpPr>
-          <p:cNvPr id="6" name="Text 4"/>
-          <p:cNvSpPr/>
-          <p:nvPr/>
-        </p:nvSpPr>
-        <p:spPr>
-          <a:xfrm>
-            <a:off x="612648" y="1097280"/>
-            <a:ext cx="3849624" cy="384048"/>
+          <p:cNvPr id="6" name="Shape 4"/>
+          <p:cNvSpPr/>
+          <p:nvPr/>
+        </p:nvSpPr>
+        <p:spPr>
+          <a:xfrm>
+            <a:off x="411480" y="1280160"/>
+            <a:ext cx="4023360" cy="502920"/>
+          </a:xfrm>
+          <a:prstGeom prst="rect">
+            <a:avLst/>
+          </a:prstGeom>
+          <a:solidFill>
+            <a:srgbClr val="C76B7A"/>
+          </a:solidFill>
+          <a:ln/>
+        </p:spPr>
+      </p:sp>
+      <p:sp>
+        <p:nvSpPr>
+          <p:cNvPr id="7" name="Text 5"/>
+          <p:cNvSpPr/>
+          <p:nvPr/>
+        </p:nvSpPr>
+        <p:spPr>
+          <a:xfrm>
+            <a:off x="548640" y="1280160"/>
+            <a:ext cx="3749040" cy="502920"/>
           </a:xfrm>
           <a:prstGeom prst="rect">
             <a:avLst/>
@@ -3273,34 +3924,34 @@
           <a:bodyPr wrap="square" rtlCol="0" anchor="ctr"/>
           <a:lstStyle/>
           <a:p>
-            <a:pPr indent="0" marL="0">
-              <a:buNone/>
-            </a:pPr>
-            <a:r>
-              <a:rPr lang="en-US" sz="1600" b="1" dirty="0">
-                <a:solidFill>
-                  <a:srgbClr val="1F3A5F"/>
+            <a:pPr algn="ctr" indent="0" marL="0">
+              <a:buNone/>
+            </a:pPr>
+            <a:r>
+              <a:rPr lang="en-US" sz="1400" b="1" dirty="0">
+                <a:solidFill>
+                  <a:srgbClr val="FFFFFF"/>
                 </a:solidFill>
                 <a:latin typeface="Yu Gothic UI Semibold" pitchFamily="34" charset="0"/>
                 <a:ea typeface="Yu Gothic UI Semibold" pitchFamily="34" charset="-122"/>
                 <a:cs typeface="Yu Gothic UI Semibold" pitchFamily="34" charset="-120"/>
               </a:rPr>
-              <a:t>📍 シチュエーション</a:t>
-            </a:r>
-            <a:endParaRPr lang="en-US" sz="1600" dirty="0"/>
-          </a:p>
-        </p:txBody>
-      </p:sp>
-      <p:sp>
-        <p:nvSpPr>
-          <p:cNvPr id="7" name="Text 5"/>
-          <p:cNvSpPr/>
-          <p:nvPr/>
-        </p:nvSpPr>
-        <p:spPr>
-          <a:xfrm>
-            <a:off x="649224" y="1536192"/>
-            <a:ext cx="3703320" cy="1161288"/>
+              <a:t>いきなり作り始めると…</a:t>
+            </a:r>
+            <a:endParaRPr lang="en-US" sz="1400" dirty="0"/>
+          </a:p>
+        </p:txBody>
+      </p:sp>
+      <p:sp>
+        <p:nvSpPr>
+          <p:cNvPr id="8" name="Text 6"/>
+          <p:cNvSpPr/>
+          <p:nvPr/>
+        </p:nvSpPr>
+        <p:spPr>
+          <a:xfrm>
+            <a:off x="630936" y="1938528"/>
+            <a:ext cx="3584448" cy="2240280"/>
           </a:xfrm>
           <a:prstGeom prst="rect">
             <a:avLst/>
@@ -3312,14 +3963,15 @@
           <a:bodyPr wrap="square" rtlCol="0" anchor="t"/>
           <a:lstStyle/>
           <a:p>
-            <a:pPr indent="0" marL="0">
+            <a:pPr marL="342900" indent="-342900">
               <a:spcAft>
-                <a:spcPts val="400"/>
+                <a:spcPts val="600"/>
               </a:spcAft>
-              <a:buNone/>
-            </a:pPr>
-            <a:r>
-              <a:rPr lang="en-US" sz="1400" dirty="0">
+              <a:buSzPct val="100000"/>
+              <a:buChar char="•"/>
+            </a:pPr>
+            <a:r>
+              <a:rPr lang="en-US" sz="1300" dirty="0">
                 <a:solidFill>
                   <a:srgbClr val="1A1A1A"/>
                 </a:solidFill>
@@ -3327,19 +3979,20 @@
                 <a:ea typeface="Yu Gothic UI" pitchFamily="34" charset="-122"/>
                 <a:cs typeface="Yu Gothic UI" pitchFamily="34" charset="-120"/>
               </a:rPr>
-              <a:t>「顧客ごとに書き換える情報」と「全顧客共通の前提」と「代理店独自のアドバイス」を どのシートに どう分けて持つかを決める。</a:t>
-            </a:r>
-            <a:endParaRPr lang="en-US" sz="1400" dirty="0"/>
-          </a:p>
-          <a:p>
-            <a:pPr indent="0" marL="0">
+              <a:t>途中で「あ、この項目要らなかった」→ 作り直し</a:t>
+            </a:r>
+            <a:endParaRPr lang="en-US" sz="1300" dirty="0"/>
+          </a:p>
+          <a:p>
+            <a:pPr marL="342900" indent="-342900">
               <a:spcAft>
-                <a:spcPts val="400"/>
+                <a:spcPts val="600"/>
               </a:spcAft>
-              <a:buNone/>
-            </a:pPr>
-            <a:r>
-              <a:rPr lang="en-US" sz="1400" dirty="0">
+              <a:buSzPct val="100000"/>
+              <a:buChar char="•"/>
+            </a:pPr>
+            <a:r>
+              <a:rPr lang="en-US" sz="1300" dirty="0">
                 <a:solidFill>
                   <a:srgbClr val="1A1A1A"/>
                 </a:solidFill>
@@ -3347,19 +4000,20 @@
                 <a:ea typeface="Yu Gothic UI" pitchFamily="34" charset="-122"/>
                 <a:cs typeface="Yu Gothic UI" pitchFamily="34" charset="-120"/>
               </a:rPr>
-              <a:t>同梱「W1_設計書テンプレート.xlsx」の 1_DB設計 と 2_判断基準・数値 シートを埋める。</a:t>
-            </a:r>
-            <a:endParaRPr lang="en-US" sz="1400" dirty="0"/>
-          </a:p>
-          <a:p>
-            <a:pPr indent="0" marL="0">
+              <a:t>AIに何を頼めばいいか固まらず、返る結果が毎回バラバラ</a:t>
+            </a:r>
+            <a:endParaRPr lang="en-US" sz="1300" dirty="0"/>
+          </a:p>
+          <a:p>
+            <a:pPr marL="342900" indent="-342900">
               <a:spcAft>
-                <a:spcPts val="400"/>
+                <a:spcPts val="600"/>
               </a:spcAft>
-              <a:buNone/>
-            </a:pPr>
-            <a:r>
-              <a:rPr lang="en-US" sz="1400" dirty="0">
+              <a:buSzPct val="100000"/>
+              <a:buChar char="•"/>
+            </a:pPr>
+            <a:r>
+              <a:rPr lang="en-US" sz="1300" dirty="0">
                 <a:solidFill>
                   <a:srgbClr val="1A1A1A"/>
                 </a:solidFill>
@@ -3367,34 +4021,55 @@
                 <a:ea typeface="Yu Gothic UI" pitchFamily="34" charset="-122"/>
                 <a:cs typeface="Yu Gothic UI" pitchFamily="34" charset="-120"/>
               </a:rPr>
-              <a:t>完成イメージは「W1_設計書_完成見本.xlsx」に用意。</a:t>
-            </a:r>
-            <a:endParaRPr lang="en-US" sz="1400" dirty="0"/>
-          </a:p>
-        </p:txBody>
-      </p:sp>
-      <p:sp>
-        <p:nvSpPr>
-          <p:cNvPr id="8" name="Shape 6"/>
-          <p:cNvSpPr/>
-          <p:nvPr/>
-        </p:nvSpPr>
-        <p:spPr>
-          <a:xfrm>
-            <a:off x="411480" y="2880360"/>
-            <a:ext cx="4160520" cy="2011680"/>
+              <a:t>更新するとき「これ誰が決めた?」で止まる</a:t>
+            </a:r>
+            <a:endParaRPr lang="en-US" sz="1300" dirty="0"/>
+          </a:p>
+          <a:p>
+            <a:pPr marL="342900" indent="-342900">
+              <a:spcAft>
+                <a:spcPts val="600"/>
+              </a:spcAft>
+              <a:buSzPct val="100000"/>
+              <a:buChar char="•"/>
+            </a:pPr>
+            <a:r>
+              <a:rPr lang="en-US" sz="1300" dirty="0">
+                <a:solidFill>
+                  <a:srgbClr val="1A1A1A"/>
+                </a:solidFill>
+                <a:latin typeface="Yu Gothic UI" pitchFamily="34" charset="0"/>
+                <a:ea typeface="Yu Gothic UI" pitchFamily="34" charset="-122"/>
+                <a:cs typeface="Yu Gothic UI" pitchFamily="34" charset="-120"/>
+              </a:rPr>
+              <a:t>代理店の "強み" が反映されず、市販ツールと変わらない</a:t>
+            </a:r>
+            <a:endParaRPr lang="en-US" sz="1300" dirty="0"/>
+          </a:p>
+        </p:txBody>
+      </p:sp>
+      <p:sp>
+        <p:nvSpPr>
+          <p:cNvPr id="9" name="Shape 7"/>
+          <p:cNvSpPr/>
+          <p:nvPr/>
+        </p:nvSpPr>
+        <p:spPr>
+          <a:xfrm>
+            <a:off x="4709160" y="1280160"/>
+            <a:ext cx="4023360" cy="3017520"/>
           </a:xfrm>
           <a:prstGeom prst="roundRect">
             <a:avLst>
-              <a:gd name="adj" fmla="val 3636"/>
+              <a:gd name="adj" fmla="val 3030"/>
             </a:avLst>
           </a:prstGeom>
           <a:solidFill>
-            <a:srgbClr val="F4F6F9"/>
-          </a:solidFill>
-          <a:ln w="6350">
+            <a:srgbClr val="E6F4EA"/>
+          </a:solidFill>
+          <a:ln w="25400">
             <a:solidFill>
-              <a:srgbClr val="D7DCE3"/>
+              <a:srgbClr val="0E7C86"/>
             </a:solidFill>
             <a:prstDash val="solid"/>
           </a:ln>
@@ -3402,34 +4077,34 @@
       </p:sp>
       <p:sp>
         <p:nvSpPr>
-          <p:cNvPr id="9" name="Shape 7"/>
-          <p:cNvSpPr/>
-          <p:nvPr/>
-        </p:nvSpPr>
-        <p:spPr>
-          <a:xfrm>
-            <a:off x="411480" y="2880360"/>
-            <a:ext cx="91440" cy="2011680"/>
-          </a:xfrm>
-          <a:prstGeom prst="rect">
-            <a:avLst/>
-          </a:prstGeom>
-          <a:solidFill>
-            <a:srgbClr val="E8A33D"/>
-          </a:solidFill>
-          <a:ln/>
-        </p:spPr>
-      </p:sp>
-      <p:sp>
-        <p:nvSpPr>
-          <p:cNvPr id="10" name="Text 8"/>
-          <p:cNvSpPr/>
-          <p:nvPr/>
-        </p:nvSpPr>
-        <p:spPr>
-          <a:xfrm>
-            <a:off x="612648" y="2971800"/>
-            <a:ext cx="3849624" cy="384048"/>
+          <p:cNvPr id="10" name="Shape 8"/>
+          <p:cNvSpPr/>
+          <p:nvPr/>
+        </p:nvSpPr>
+        <p:spPr>
+          <a:xfrm>
+            <a:off x="4709160" y="1280160"/>
+            <a:ext cx="4023360" cy="502920"/>
+          </a:xfrm>
+          <a:prstGeom prst="rect">
+            <a:avLst/>
+          </a:prstGeom>
+          <a:solidFill>
+            <a:srgbClr val="0E7C86"/>
+          </a:solidFill>
+          <a:ln/>
+        </p:spPr>
+      </p:sp>
+      <p:sp>
+        <p:nvSpPr>
+          <p:cNvPr id="11" name="Text 9"/>
+          <p:cNvSpPr/>
+          <p:nvPr/>
+        </p:nvSpPr>
+        <p:spPr>
+          <a:xfrm>
+            <a:off x="4846320" y="1280160"/>
+            <a:ext cx="3749040" cy="502920"/>
           </a:xfrm>
           <a:prstGeom prst="rect">
             <a:avLst/>
@@ -3441,34 +4116,34 @@
           <a:bodyPr wrap="square" rtlCol="0" anchor="ctr"/>
           <a:lstStyle/>
           <a:p>
-            <a:pPr indent="0" marL="0">
-              <a:buNone/>
-            </a:pPr>
-            <a:r>
-              <a:rPr lang="en-US" sz="1600" b="1" dirty="0">
-                <a:solidFill>
-                  <a:srgbClr val="E8A33D"/>
+            <a:pPr algn="ctr" indent="0" marL="0">
+              <a:buNone/>
+            </a:pPr>
+            <a:r>
+              <a:rPr lang="en-US" sz="1400" b="1" dirty="0">
+                <a:solidFill>
+                  <a:srgbClr val="FFFFFF"/>
                 </a:solidFill>
                 <a:latin typeface="Yu Gothic UI Semibold" pitchFamily="34" charset="0"/>
                 <a:ea typeface="Yu Gothic UI Semibold" pitchFamily="34" charset="-122"/>
                 <a:cs typeface="Yu Gothic UI Semibold" pitchFamily="34" charset="-120"/>
               </a:rPr>
-              <a:t>💭 プロンプトのヒント</a:t>
-            </a:r>
-            <a:endParaRPr lang="en-US" sz="1600" dirty="0"/>
-          </a:p>
-        </p:txBody>
-      </p:sp>
-      <p:sp>
-        <p:nvSpPr>
-          <p:cNvPr id="11" name="Text 9"/>
-          <p:cNvSpPr/>
-          <p:nvPr/>
-        </p:nvSpPr>
-        <p:spPr>
-          <a:xfrm>
-            <a:off x="649224" y="3410712"/>
-            <a:ext cx="3703320" cy="1389888"/>
+              <a:t>先に設計書を作ると…</a:t>
+            </a:r>
+            <a:endParaRPr lang="en-US" sz="1400" dirty="0"/>
+          </a:p>
+        </p:txBody>
+      </p:sp>
+      <p:sp>
+        <p:nvSpPr>
+          <p:cNvPr id="12" name="Text 10"/>
+          <p:cNvSpPr/>
+          <p:nvPr/>
+        </p:nvSpPr>
+        <p:spPr>
+          <a:xfrm>
+            <a:off x="4928616" y="1938528"/>
+            <a:ext cx="3584448" cy="2240280"/>
           </a:xfrm>
           <a:prstGeom prst="rect">
             <a:avLst/>
@@ -3482,13 +4157,13 @@
           <a:p>
             <a:pPr marL="342900" indent="-342900">
               <a:spcAft>
-                <a:spcPts val="400"/>
+                <a:spcPts val="600"/>
               </a:spcAft>
               <a:buSzPct val="100000"/>
-              <a:buChar char="●"/>
-            </a:pPr>
-            <a:r>
-              <a:rPr lang="en-US" sz="1400" dirty="0">
+              <a:buChar char="•"/>
+            </a:pPr>
+            <a:r>
+              <a:rPr lang="en-US" sz="1300" dirty="0">
                 <a:solidFill>
                   <a:srgbClr val="1A1A1A"/>
                 </a:solidFill>
@@ -3496,20 +4171,20 @@
                 <a:ea typeface="Yu Gothic UI" pitchFamily="34" charset="-122"/>
                 <a:cs typeface="Yu Gothic UI" pitchFamily="34" charset="-120"/>
               </a:rPr>
-              <a:t>「投資リターン」を 公的通り2%にするか、代理店の "控えめ判断" で1.5%にするか — ここに個性が出る</a:t>
-            </a:r>
-            <a:endParaRPr lang="en-US" sz="1400" dirty="0"/>
+              <a:t>チーム全員が「何を作るか」を同じ理解でスタート</a:t>
+            </a:r>
+            <a:endParaRPr lang="en-US" sz="1300" dirty="0"/>
           </a:p>
           <a:p>
             <a:pPr marL="342900" indent="-342900">
               <a:spcAft>
-                <a:spcPts val="400"/>
+                <a:spcPts val="600"/>
               </a:spcAft>
               <a:buSzPct val="100000"/>
-              <a:buChar char="●"/>
-            </a:pPr>
-            <a:r>
-              <a:rPr lang="en-US" sz="1400" dirty="0">
+              <a:buChar char="•"/>
+            </a:pPr>
+            <a:r>
+              <a:rPr lang="en-US" sz="1300" dirty="0">
                 <a:solidFill>
                   <a:srgbClr val="1A1A1A"/>
                 </a:solidFill>
@@ -3517,20 +4192,20 @@
                 <a:ea typeface="Yu Gothic UI" pitchFamily="34" charset="-122"/>
                 <a:cs typeface="Yu Gothic UI" pitchFamily="34" charset="-120"/>
               </a:rPr>
-              <a:t>教育費相場は 公的(文科省)が定番、地域補正(都市部は+15%等)は独自数値で追加</a:t>
-            </a:r>
-            <a:endParaRPr lang="en-US" sz="1400" dirty="0"/>
+              <a:t>AIに「この設計通りに作って」と依頼できる</a:t>
+            </a:r>
+            <a:endParaRPr lang="en-US" sz="1300" dirty="0"/>
           </a:p>
           <a:p>
             <a:pPr marL="342900" indent="-342900">
               <a:spcAft>
-                <a:spcPts val="400"/>
+                <a:spcPts val="600"/>
               </a:spcAft>
               <a:buSzPct val="100000"/>
-              <a:buChar char="●"/>
-            </a:pPr>
-            <a:r>
-              <a:rPr lang="en-US" sz="1400" dirty="0">
+              <a:buChar char="•"/>
+            </a:pPr>
+            <a:r>
+              <a:rPr lang="en-US" sz="1300" dirty="0">
                 <a:solidFill>
                   <a:srgbClr val="1A1A1A"/>
                 </a:solidFill>
@@ -3538,20 +4213,20 @@
                 <a:ea typeface="Yu Gothic UI" pitchFamily="34" charset="-122"/>
                 <a:cs typeface="Yu Gothic UI" pitchFamily="34" charset="-120"/>
               </a:rPr>
-              <a:t>独自数値には必ず "なぜ" を書く。後で誰かが更新するとき困らない</a:t>
-            </a:r>
-            <a:endParaRPr lang="en-US" sz="1400" dirty="0"/>
+              <a:t>後で誰でも直せる、更新しやすい</a:t>
+            </a:r>
+            <a:endParaRPr lang="en-US" sz="1300" dirty="0"/>
           </a:p>
           <a:p>
             <a:pPr marL="342900" indent="-342900">
               <a:spcAft>
-                <a:spcPts val="400"/>
+                <a:spcPts val="600"/>
               </a:spcAft>
               <a:buSzPct val="100000"/>
-              <a:buChar char="●"/>
-            </a:pPr>
-            <a:r>
-              <a:rPr lang="en-US" sz="1400" dirty="0">
+              <a:buChar char="•"/>
+            </a:pPr>
+            <a:r>
+              <a:rPr lang="en-US" sz="1300" dirty="0">
                 <a:solidFill>
                   <a:srgbClr val="1A1A1A"/>
                 </a:solidFill>
@@ -3559,222 +4234,9 @@
                 <a:ea typeface="Yu Gothic UI" pitchFamily="34" charset="-122"/>
                 <a:cs typeface="Yu Gothic UI" pitchFamily="34" charset="-120"/>
               </a:rPr>
-              <a:t>完成見本の "★" マーク行が 代理店らしさの入れどころ</a:t>
-            </a:r>
-            <a:endParaRPr lang="en-US" sz="1400" dirty="0"/>
-          </a:p>
-        </p:txBody>
-      </p:sp>
-      <p:sp>
-        <p:nvSpPr>
-          <p:cNvPr id="12" name="Shape 10"/>
-          <p:cNvSpPr/>
-          <p:nvPr/>
-        </p:nvSpPr>
-        <p:spPr>
-          <a:xfrm>
-            <a:off x="4663440" y="1005840"/>
-            <a:ext cx="4160520" cy="3886200"/>
-          </a:xfrm>
-          <a:prstGeom prst="roundRect">
-            <a:avLst>
-              <a:gd name="adj" fmla="val 1882"/>
-            </a:avLst>
-          </a:prstGeom>
-          <a:solidFill>
-            <a:srgbClr val="F4F6F9"/>
-          </a:solidFill>
-          <a:ln w="6350">
-            <a:solidFill>
-              <a:srgbClr val="D7DCE3"/>
-            </a:solidFill>
-            <a:prstDash val="solid"/>
-          </a:ln>
-        </p:spPr>
-      </p:sp>
-      <p:sp>
-        <p:nvSpPr>
-          <p:cNvPr id="13" name="Shape 11"/>
-          <p:cNvSpPr/>
-          <p:nvPr/>
-        </p:nvSpPr>
-        <p:spPr>
-          <a:xfrm>
-            <a:off x="4663440" y="1005840"/>
-            <a:ext cx="91440" cy="3886200"/>
-          </a:xfrm>
-          <a:prstGeom prst="rect">
-            <a:avLst/>
-          </a:prstGeom>
-          <a:solidFill>
-            <a:srgbClr val="0E7C86"/>
-          </a:solidFill>
-          <a:ln/>
-        </p:spPr>
-      </p:sp>
-      <p:sp>
-        <p:nvSpPr>
-          <p:cNvPr id="14" name="Text 12"/>
-          <p:cNvSpPr/>
-          <p:nvPr/>
-        </p:nvSpPr>
-        <p:spPr>
-          <a:xfrm>
-            <a:off x="4864608" y="1097280"/>
-            <a:ext cx="3849624" cy="384048"/>
-          </a:xfrm>
-          <a:prstGeom prst="rect">
-            <a:avLst/>
-          </a:prstGeom>
-          <a:noFill/>
-          <a:ln/>
-        </p:spPr>
-        <p:txBody>
-          <a:bodyPr wrap="square" rtlCol="0" anchor="ctr"/>
-          <a:lstStyle/>
-          <a:p>
-            <a:pPr indent="0" marL="0">
-              <a:buNone/>
-            </a:pPr>
-            <a:r>
-              <a:rPr lang="en-US" sz="1600" b="1" dirty="0">
-                <a:solidFill>
-                  <a:srgbClr val="0E7C86"/>
-                </a:solidFill>
-                <a:latin typeface="Yu Gothic UI Semibold" pitchFamily="34" charset="0"/>
-                <a:ea typeface="Yu Gothic UI Semibold" pitchFamily="34" charset="-122"/>
-                <a:cs typeface="Yu Gothic UI Semibold" pitchFamily="34" charset="-120"/>
-              </a:rPr>
-              <a:t>🎯 AIに作ってもらいたいもの</a:t>
-            </a:r>
-            <a:endParaRPr lang="en-US" sz="1600" dirty="0"/>
-          </a:p>
-        </p:txBody>
-      </p:sp>
-      <p:sp>
-        <p:nvSpPr>
-          <p:cNvPr id="15" name="Text 13"/>
-          <p:cNvSpPr/>
-          <p:nvPr/>
-        </p:nvSpPr>
-        <p:spPr>
-          <a:xfrm>
-            <a:off x="4901184" y="1536192"/>
-            <a:ext cx="3703320" cy="3264408"/>
-          </a:xfrm>
-          <a:prstGeom prst="rect">
-            <a:avLst/>
-          </a:prstGeom>
-          <a:noFill/>
-          <a:ln/>
-        </p:spPr>
-        <p:txBody>
-          <a:bodyPr wrap="square" rtlCol="0" anchor="t"/>
-          <a:lstStyle/>
-          <a:p>
-            <a:pPr marL="342900" indent="-342900">
-              <a:spcAft>
-                <a:spcPts val="400"/>
-              </a:spcAft>
-              <a:buSzPct val="100000"/>
-              <a:buChar char="●"/>
-            </a:pPr>
-            <a:r>
-              <a:rPr lang="en-US" sz="1400" dirty="0">
-                <a:solidFill>
-                  <a:srgbClr val="1A1A1A"/>
-                </a:solidFill>
-                <a:latin typeface="Yu Gothic UI" pitchFamily="34" charset="0"/>
-                <a:ea typeface="Yu Gothic UI" pitchFamily="34" charset="-122"/>
-                <a:cs typeface="Yu Gothic UI" pitchFamily="34" charset="-120"/>
-              </a:rPr>
-              <a:t>DB設計シートで 3〜5シート(顧客カルテ/前提テーブル/独自アドバイスマスタ/シミュレーション履歴 等)を定義</a:t>
-            </a:r>
-            <a:endParaRPr lang="en-US" sz="1400" dirty="0"/>
-          </a:p>
-          <a:p>
-            <a:pPr marL="342900" indent="-342900">
-              <a:spcAft>
-                <a:spcPts val="400"/>
-              </a:spcAft>
-              <a:buSzPct val="100000"/>
-              <a:buChar char="●"/>
-            </a:pPr>
-            <a:r>
-              <a:rPr lang="en-US" sz="1400" dirty="0">
-                <a:solidFill>
-                  <a:srgbClr val="1A1A1A"/>
-                </a:solidFill>
-                <a:latin typeface="Yu Gothic UI" pitchFamily="34" charset="0"/>
-                <a:ea typeface="Yu Gothic UI" pitchFamily="34" charset="-122"/>
-                <a:cs typeface="Yu Gothic UI" pitchFamily="34" charset="-120"/>
-              </a:rPr>
-              <a:t>各シートの列を "カンマ区切り" で列挙、データ更新頻度も明記</a:t>
-            </a:r>
-            <a:endParaRPr lang="en-US" sz="1400" dirty="0"/>
-          </a:p>
-          <a:p>
-            <a:pPr marL="342900" indent="-342900">
-              <a:spcAft>
-                <a:spcPts val="400"/>
-              </a:spcAft>
-              <a:buSzPct val="100000"/>
-              <a:buChar char="●"/>
-            </a:pPr>
-            <a:r>
-              <a:rPr lang="en-US" sz="1400" dirty="0">
-                <a:solidFill>
-                  <a:srgbClr val="1A1A1A"/>
-                </a:solidFill>
-                <a:latin typeface="Yu Gothic UI" pitchFamily="34" charset="0"/>
-                <a:ea typeface="Yu Gothic UI" pitchFamily="34" charset="-122"/>
-                <a:cs typeface="Yu Gothic UI" pitchFamily="34" charset="-120"/>
-              </a:rPr>
-              <a:t>判断基準・数値シートで 15〜20項目を 公的/独自/計算式 で3分類</a:t>
-            </a:r>
-            <a:endParaRPr lang="en-US" sz="1400" dirty="0"/>
-          </a:p>
-          <a:p>
-            <a:pPr marL="342900" indent="-342900">
-              <a:spcAft>
-                <a:spcPts val="400"/>
-              </a:spcAft>
-              <a:buSzPct val="100000"/>
-              <a:buChar char="●"/>
-            </a:pPr>
-            <a:r>
-              <a:rPr lang="en-US" sz="1400" dirty="0">
-                <a:solidFill>
-                  <a:srgbClr val="1A1A1A"/>
-                </a:solidFill>
-                <a:latin typeface="Yu Gothic UI" pitchFamily="34" charset="0"/>
-                <a:ea typeface="Yu Gothic UI" pitchFamily="34" charset="-122"/>
-                <a:cs typeface="Yu Gothic UI" pitchFamily="34" charset="-120"/>
-              </a:rPr>
-              <a:t>独自数値には "なぜその値か" を書く(代理店の実測 or 判断根拠)</a:t>
-            </a:r>
-            <a:endParaRPr lang="en-US" sz="1400" dirty="0"/>
-          </a:p>
-          <a:p>
-            <a:pPr marL="342900" indent="-342900">
-              <a:spcAft>
-                <a:spcPts val="400"/>
-              </a:spcAft>
-              <a:buSzPct val="100000"/>
-              <a:buChar char="●"/>
-            </a:pPr>
-            <a:r>
-              <a:rPr lang="en-US" sz="1400" dirty="0">
-                <a:solidFill>
-                  <a:srgbClr val="1A1A1A"/>
-                </a:solidFill>
-                <a:latin typeface="Yu Gothic UI" pitchFamily="34" charset="0"/>
-                <a:ea typeface="Yu Gothic UI" pitchFamily="34" charset="-122"/>
-                <a:cs typeface="Yu Gothic UI" pitchFamily="34" charset="-120"/>
-              </a:rPr>
-              <a:t>「公的指標だけで十分か、独自数値で強みを出すか」を口頭で議論</a:t>
-            </a:r>
-            <a:endParaRPr lang="en-US" sz="1400" dirty="0"/>
+              <a:t>うち独自の判断・数値を組み込む場所が明確</a:t>
+            </a:r>
+            <a:endParaRPr lang="en-US" sz="1300" dirty="0"/>
           </a:p>
         </p:txBody>
       </p:sp>
@@ -3838,8 +4300,8 @@
         </p:nvSpPr>
         <p:spPr>
           <a:xfrm>
-            <a:off x="411480" y="201168"/>
-            <a:ext cx="8412480" cy="594360"/>
+            <a:off x="411480" y="182880"/>
+            <a:ext cx="8412480" cy="548640"/>
           </a:xfrm>
           <a:prstGeom prst="rect">
             <a:avLst/>
@@ -3855,7 +4317,7 @@
               <a:buNone/>
             </a:pPr>
             <a:r>
-              <a:rPr lang="en-US" sz="2600" b="1" dirty="0">
+              <a:rPr lang="en-US" sz="2400" b="1" dirty="0">
                 <a:solidFill>
                   <a:srgbClr val="1F3A5F"/>
                 </a:solidFill>
@@ -3863,9 +4325,9 @@
                 <a:ea typeface="Yu Gothic UI Semibold" pitchFamily="34" charset="-122"/>
                 <a:cs typeface="Yu Gothic UI Semibold" pitchFamily="34" charset="-120"/>
               </a:rPr>
-              <a:t>演習1 DB設計と 判断基準・数値の設計 — 観点別チェック</a:t>
-            </a:r>
-            <a:endParaRPr lang="en-US" sz="2600" dirty="0"/>
+              <a:t>今日「設計書」に決めることは、この4つ</a:t>
+            </a:r>
+            <a:endParaRPr lang="en-US" sz="2400" dirty="0"/>
           </a:p>
         </p:txBody>
       </p:sp>
@@ -3877,7 +4339,7 @@
         </p:nvSpPr>
         <p:spPr>
           <a:xfrm>
-            <a:off x="411480" y="804672"/>
+            <a:off x="411480" y="749808"/>
             <a:ext cx="8412480" cy="365760"/>
           </a:xfrm>
           <a:prstGeom prst="rect">
@@ -3894,7 +4356,7 @@
               <a:buNone/>
             </a:pPr>
             <a:r>
-              <a:rPr lang="en-US" sz="1500" i="1" dirty="0">
+              <a:rPr lang="en-US" sz="1300" i="1" dirty="0">
                 <a:solidFill>
                   <a:srgbClr val="555555"/>
                 </a:solidFill>
@@ -3902,9 +4364,9 @@
                 <a:ea typeface="Yu Gothic UI" pitchFamily="34" charset="-122"/>
                 <a:cs typeface="Yu Gothic UI" pitchFamily="34" charset="-120"/>
               </a:rPr>
-              <a:t>プロンプトをさらにブラッシュアップ — 3観点でセルフチェック</a:t>
-            </a:r>
-            <a:endParaRPr lang="en-US" sz="1500" dirty="0"/>
+              <a:t>全部を AI と壁打ちしながら、スプレッドシートに埋めていきます</a:t>
+            </a:r>
+            <a:endParaRPr lang="en-US" sz="1300" dirty="0"/>
           </a:p>
         </p:txBody>
       </p:sp>
@@ -3916,18 +4378,18 @@
         </p:nvSpPr>
         <p:spPr>
           <a:xfrm>
-            <a:off x="411480" y="1325880"/>
-            <a:ext cx="2651760" cy="3474720"/>
+            <a:off x="411480" y="1280160"/>
+            <a:ext cx="4069080" cy="1440180"/>
           </a:xfrm>
           <a:prstGeom prst="roundRect">
             <a:avLst>
-              <a:gd name="adj" fmla="val 3448"/>
+              <a:gd name="adj" fmla="val 5079"/>
             </a:avLst>
           </a:prstGeom>
           <a:solidFill>
             <a:srgbClr val="F4F6F9"/>
           </a:solidFill>
-          <a:ln w="15240">
+          <a:ln w="19050">
             <a:solidFill>
               <a:srgbClr val="0E7C86"/>
             </a:solidFill>
@@ -3943,10 +4405,10 @@
         </p:nvSpPr>
         <p:spPr>
           <a:xfrm>
-            <a:off x="411480" y="1325880"/>
-            <a:ext cx="2651760" cy="457200"/>
-          </a:xfrm>
-          <a:prstGeom prst="rect">
+            <a:off x="557784" y="1426464"/>
+            <a:ext cx="502920" cy="502920"/>
+          </a:xfrm>
+          <a:prstGeom prst="ellipse">
             <a:avLst/>
           </a:prstGeom>
           <a:solidFill>
@@ -3963,8 +4425,8 @@
         </p:nvSpPr>
         <p:spPr>
           <a:xfrm>
-            <a:off x="539496" y="1380744"/>
-            <a:ext cx="2395728" cy="365760"/>
+            <a:off x="557784" y="1426464"/>
+            <a:ext cx="502920" cy="502920"/>
           </a:xfrm>
           <a:prstGeom prst="rect">
             <a:avLst/>
@@ -3976,11 +4438,11 @@
           <a:bodyPr wrap="square" rtlCol="0" anchor="ctr"/>
           <a:lstStyle/>
           <a:p>
-            <a:pPr indent="0" marL="0">
-              <a:buNone/>
-            </a:pPr>
-            <a:r>
-              <a:rPr lang="en-US" sz="1500" b="1" dirty="0">
+            <a:pPr algn="ctr" indent="0" marL="0">
+              <a:buNone/>
+            </a:pPr>
+            <a:r>
+              <a:rPr lang="en-US" sz="2000" b="1" dirty="0">
                 <a:solidFill>
                   <a:srgbClr val="FFFFFF"/>
                 </a:solidFill>
@@ -3988,9 +4450,9 @@
                 <a:ea typeface="Yu Gothic UI Semibold" pitchFamily="34" charset="-122"/>
                 <a:cs typeface="Yu Gothic UI Semibold" pitchFamily="34" charset="-120"/>
               </a:rPr>
-              <a:t>観点 A</a:t>
-            </a:r>
-            <a:endParaRPr lang="en-US" sz="1500" dirty="0"/>
+              <a:t>1</a:t>
+            </a:r>
+            <a:endParaRPr lang="en-US" sz="2000" dirty="0"/>
           </a:p>
         </p:txBody>
       </p:sp>
@@ -4002,24 +4464,24 @@
         </p:nvSpPr>
         <p:spPr>
           <a:xfrm>
-            <a:off x="594360" y="1892808"/>
-            <a:ext cx="2359152" cy="548640"/>
-          </a:xfrm>
-          <a:prstGeom prst="rect">
-            <a:avLst/>
-          </a:prstGeom>
-          <a:noFill/>
-          <a:ln/>
-        </p:spPr>
-        <p:txBody>
-          <a:bodyPr wrap="square" rtlCol="0" anchor="t"/>
+            <a:off x="1188720" y="1417320"/>
+            <a:ext cx="3154680" cy="502920"/>
+          </a:xfrm>
+          <a:prstGeom prst="rect">
+            <a:avLst/>
+          </a:prstGeom>
+          <a:noFill/>
+          <a:ln/>
+        </p:spPr>
+        <p:txBody>
+          <a:bodyPr wrap="square" rtlCol="0" anchor="ctr"/>
           <a:lstStyle/>
           <a:p>
             <a:pPr indent="0" marL="0">
               <a:buNone/>
             </a:pPr>
             <a:r>
-              <a:rPr lang="en-US" sz="1500" b="1" dirty="0">
+              <a:rPr lang="en-US" sz="1400" b="1" dirty="0">
                 <a:solidFill>
                   <a:srgbClr val="1F3A5F"/>
                 </a:solidFill>
@@ -4027,9 +4489,9 @@
                 <a:ea typeface="Yu Gothic UI Semibold" pitchFamily="34" charset="-122"/>
                 <a:cs typeface="Yu Gothic UI Semibold" pitchFamily="34" charset="-120"/>
               </a:rPr>
-              <a:t>A. DB分離の妥当性</a:t>
-            </a:r>
-            <a:endParaRPr lang="en-US" sz="1500" dirty="0"/>
+              <a:t>データの入れ物</a:t>
+            </a:r>
+            <a:endParaRPr lang="en-US" sz="1400" dirty="0"/>
           </a:p>
         </p:txBody>
       </p:sp>
@@ -4041,8 +4503,8 @@
         </p:nvSpPr>
         <p:spPr>
           <a:xfrm>
-            <a:off x="594360" y="2514600"/>
-            <a:ext cx="2359152" cy="1051560"/>
+            <a:off x="612648" y="2057400"/>
+            <a:ext cx="3666744" cy="525780"/>
           </a:xfrm>
           <a:prstGeom prst="rect">
             <a:avLst/>
@@ -4055,24 +4517,33 @@
           <a:lstStyle/>
           <a:p>
             <a:pPr indent="0" marL="0">
-              <a:buNone/>
-            </a:pPr>
-            <a:r>
-              <a:rPr lang="en-US" sz="1400" b="1" dirty="0">
-                <a:solidFill>
-                  <a:srgbClr val="0E7C86"/>
+              <a:spcAft>
+                <a:spcPts val="300"/>
+              </a:spcAft>
+              <a:buNone/>
+            </a:pPr>
+            <a:r>
+              <a:rPr lang="en-US" sz="1200" dirty="0">
+                <a:solidFill>
+                  <a:srgbClr val="1A1A1A"/>
                 </a:solidFill>
                 <a:latin typeface="Yu Gothic UI" pitchFamily="34" charset="0"/>
                 <a:ea typeface="Yu Gothic UI" pitchFamily="34" charset="-122"/>
                 <a:cs typeface="Yu Gothic UI" pitchFamily="34" charset="-120"/>
               </a:rPr>
-              <a:t>✓  </a:t>
-            </a:r>
+              <a:t>どんなシートに、何を、どんな並びで保存するか。</a:t>
+            </a:r>
+            <a:endParaRPr lang="en-US" sz="1200" dirty="0"/>
+          </a:p>
+          <a:p>
             <a:pPr indent="0" marL="0">
-              <a:buNone/>
-            </a:pPr>
-            <a:r>
-              <a:rPr lang="en-US" sz="1300" dirty="0">
+              <a:spcAft>
+                <a:spcPts val="300"/>
+              </a:spcAft>
+              <a:buNone/>
+            </a:pPr>
+            <a:r>
+              <a:rPr lang="en-US" sz="1200" dirty="0">
                 <a:solidFill>
                   <a:srgbClr val="1A1A1A"/>
                 </a:solidFill>
@@ -4080,85 +4551,32 @@
                 <a:ea typeface="Yu Gothic UI" pitchFamily="34" charset="-122"/>
                 <a:cs typeface="Yu Gothic UI" pitchFamily="34" charset="-120"/>
               </a:rPr>
-              <a:t>顧客カルテ / 前提 / 独自アドバイス が別シートに分かれているか</a:t>
-            </a:r>
-            <a:endParaRPr lang="en-US" sz="1300" dirty="0"/>
-          </a:p>
-        </p:txBody>
-      </p:sp>
-      <p:sp>
-        <p:nvSpPr>
-          <p:cNvPr id="10" name="Text 8"/>
-          <p:cNvSpPr/>
-          <p:nvPr/>
-        </p:nvSpPr>
-        <p:spPr>
-          <a:xfrm>
-            <a:off x="594360" y="3611880"/>
-            <a:ext cx="2359152" cy="1097280"/>
-          </a:xfrm>
-          <a:prstGeom prst="rect">
-            <a:avLst/>
-          </a:prstGeom>
-          <a:noFill/>
-          <a:ln/>
-        </p:spPr>
-        <p:txBody>
-          <a:bodyPr wrap="square" rtlCol="0" anchor="t"/>
-          <a:lstStyle/>
-          <a:p>
-            <a:pPr indent="0" marL="0">
-              <a:buNone/>
-            </a:pPr>
-            <a:r>
-              <a:rPr lang="en-US" sz="1400" b="1" dirty="0">
-                <a:solidFill>
-                  <a:srgbClr val="E8A33D"/>
-                </a:solidFill>
-                <a:latin typeface="Yu Gothic UI" pitchFamily="34" charset="0"/>
-                <a:ea typeface="Yu Gothic UI" pitchFamily="34" charset="-122"/>
-                <a:cs typeface="Yu Gothic UI" pitchFamily="34" charset="-120"/>
-              </a:rPr>
-              <a:t>💡  </a:t>
-            </a:r>
-            <a:pPr indent="0" marL="0">
-              <a:buNone/>
-            </a:pPr>
-            <a:r>
-              <a:rPr lang="en-US" sz="1300" dirty="0">
-                <a:solidFill>
-                  <a:srgbClr val="1A1A1A"/>
-                </a:solidFill>
-                <a:latin typeface="Yu Gothic UI" pitchFamily="34" charset="0"/>
-                <a:ea typeface="Yu Gothic UI" pitchFamily="34" charset="-122"/>
-                <a:cs typeface="Yu Gothic UI" pitchFamily="34" charset="-120"/>
-              </a:rPr>
-              <a:t>同じシートに 顧客固有と全員共通が混ざっていたら要見直し</a:t>
-            </a:r>
-            <a:endParaRPr lang="en-US" sz="1300" dirty="0"/>
-          </a:p>
-        </p:txBody>
-      </p:sp>
-      <p:sp>
-        <p:nvSpPr>
-          <p:cNvPr id="11" name="Shape 9"/>
-          <p:cNvSpPr/>
-          <p:nvPr/>
-        </p:nvSpPr>
-        <p:spPr>
-          <a:xfrm>
-            <a:off x="3246120" y="1325880"/>
-            <a:ext cx="2651760" cy="3474720"/>
+              <a:t>更新しやすい構造にする。</a:t>
+            </a:r>
+            <a:endParaRPr lang="en-US" sz="1200" dirty="0"/>
+          </a:p>
+        </p:txBody>
+      </p:sp>
+      <p:sp>
+        <p:nvSpPr>
+          <p:cNvPr id="10" name="Shape 8"/>
+          <p:cNvSpPr/>
+          <p:nvPr/>
+        </p:nvSpPr>
+        <p:spPr>
+          <a:xfrm>
+            <a:off x="4663440" y="1280160"/>
+            <a:ext cx="4069080" cy="1440180"/>
           </a:xfrm>
           <a:prstGeom prst="roundRect">
             <a:avLst>
-              <a:gd name="adj" fmla="val 3448"/>
+              <a:gd name="adj" fmla="val 5079"/>
             </a:avLst>
           </a:prstGeom>
           <a:solidFill>
             <a:srgbClr val="F4F6F9"/>
           </a:solidFill>
-          <a:ln w="15240">
+          <a:ln w="19050">
             <a:solidFill>
               <a:srgbClr val="E8A33D"/>
             </a:solidFill>
@@ -4168,16 +4586,16 @@
       </p:sp>
       <p:sp>
         <p:nvSpPr>
-          <p:cNvPr id="12" name="Shape 10"/>
-          <p:cNvSpPr/>
-          <p:nvPr/>
-        </p:nvSpPr>
-        <p:spPr>
-          <a:xfrm>
-            <a:off x="3246120" y="1325880"/>
-            <a:ext cx="2651760" cy="457200"/>
-          </a:xfrm>
-          <a:prstGeom prst="rect">
+          <p:cNvPr id="11" name="Shape 9"/>
+          <p:cNvSpPr/>
+          <p:nvPr/>
+        </p:nvSpPr>
+        <p:spPr>
+          <a:xfrm>
+            <a:off x="4809744" y="1426464"/>
+            <a:ext cx="502920" cy="502920"/>
+          </a:xfrm>
+          <a:prstGeom prst="ellipse">
             <a:avLst/>
           </a:prstGeom>
           <a:solidFill>
@@ -4188,14 +4606,14 @@
       </p:sp>
       <p:sp>
         <p:nvSpPr>
-          <p:cNvPr id="13" name="Text 11"/>
-          <p:cNvSpPr/>
-          <p:nvPr/>
-        </p:nvSpPr>
-        <p:spPr>
-          <a:xfrm>
-            <a:off x="3374136" y="1380744"/>
-            <a:ext cx="2395728" cy="365760"/>
+          <p:cNvPr id="12" name="Text 10"/>
+          <p:cNvSpPr/>
+          <p:nvPr/>
+        </p:nvSpPr>
+        <p:spPr>
+          <a:xfrm>
+            <a:off x="4809744" y="1426464"/>
+            <a:ext cx="502920" cy="502920"/>
           </a:xfrm>
           <a:prstGeom prst="rect">
             <a:avLst/>
@@ -4207,11 +4625,11 @@
           <a:bodyPr wrap="square" rtlCol="0" anchor="ctr"/>
           <a:lstStyle/>
           <a:p>
-            <a:pPr indent="0" marL="0">
-              <a:buNone/>
-            </a:pPr>
-            <a:r>
-              <a:rPr lang="en-US" sz="1500" b="1" dirty="0">
+            <a:pPr algn="ctr" indent="0" marL="0">
+              <a:buNone/>
+            </a:pPr>
+            <a:r>
+              <a:rPr lang="en-US" sz="2000" b="1" dirty="0">
                 <a:solidFill>
                   <a:srgbClr val="FFFFFF"/>
                 </a:solidFill>
@@ -4219,38 +4637,38 @@
                 <a:ea typeface="Yu Gothic UI Semibold" pitchFamily="34" charset="-122"/>
                 <a:cs typeface="Yu Gothic UI Semibold" pitchFamily="34" charset="-120"/>
               </a:rPr>
-              <a:t>観点 B</a:t>
-            </a:r>
-            <a:endParaRPr lang="en-US" sz="1500" dirty="0"/>
-          </a:p>
-        </p:txBody>
-      </p:sp>
-      <p:sp>
-        <p:nvSpPr>
-          <p:cNvPr id="14" name="Text 12"/>
-          <p:cNvSpPr/>
-          <p:nvPr/>
-        </p:nvSpPr>
-        <p:spPr>
-          <a:xfrm>
-            <a:off x="3429000" y="1892808"/>
-            <a:ext cx="2359152" cy="548640"/>
-          </a:xfrm>
-          <a:prstGeom prst="rect">
-            <a:avLst/>
-          </a:prstGeom>
-          <a:noFill/>
-          <a:ln/>
-        </p:spPr>
-        <p:txBody>
-          <a:bodyPr wrap="square" rtlCol="0" anchor="t"/>
+              <a:t>2</a:t>
+            </a:r>
+            <a:endParaRPr lang="en-US" sz="2000" dirty="0"/>
+          </a:p>
+        </p:txBody>
+      </p:sp>
+      <p:sp>
+        <p:nvSpPr>
+          <p:cNvPr id="13" name="Text 11"/>
+          <p:cNvSpPr/>
+          <p:nvPr/>
+        </p:nvSpPr>
+        <p:spPr>
+          <a:xfrm>
+            <a:off x="5440680" y="1417320"/>
+            <a:ext cx="3154680" cy="502920"/>
+          </a:xfrm>
+          <a:prstGeom prst="rect">
+            <a:avLst/>
+          </a:prstGeom>
+          <a:noFill/>
+          <a:ln/>
+        </p:spPr>
+        <p:txBody>
+          <a:bodyPr wrap="square" rtlCol="0" anchor="ctr"/>
           <a:lstStyle/>
           <a:p>
             <a:pPr indent="0" marL="0">
               <a:buNone/>
             </a:pPr>
             <a:r>
-              <a:rPr lang="en-US" sz="1500" b="1" dirty="0">
+              <a:rPr lang="en-US" sz="1400" b="1" dirty="0">
                 <a:solidFill>
                   <a:srgbClr val="1F3A5F"/>
                 </a:solidFill>
@@ -4258,22 +4676,22 @@
                 <a:ea typeface="Yu Gothic UI Semibold" pitchFamily="34" charset="-122"/>
                 <a:cs typeface="Yu Gothic UI Semibold" pitchFamily="34" charset="-120"/>
               </a:rPr>
-              <a:t>B. 判断根拠の分類</a:t>
-            </a:r>
-            <a:endParaRPr lang="en-US" sz="1500" dirty="0"/>
-          </a:p>
-        </p:txBody>
-      </p:sp>
-      <p:sp>
-        <p:nvSpPr>
-          <p:cNvPr id="15" name="Text 13"/>
-          <p:cNvSpPr/>
-          <p:nvPr/>
-        </p:nvSpPr>
-        <p:spPr>
-          <a:xfrm>
-            <a:off x="3429000" y="2514600"/>
-            <a:ext cx="2359152" cy="1051560"/>
+              <a:t>数値の根拠</a:t>
+            </a:r>
+            <a:endParaRPr lang="en-US" sz="1400" dirty="0"/>
+          </a:p>
+        </p:txBody>
+      </p:sp>
+      <p:sp>
+        <p:nvSpPr>
+          <p:cNvPr id="14" name="Text 12"/>
+          <p:cNvSpPr/>
+          <p:nvPr/>
+        </p:nvSpPr>
+        <p:spPr>
+          <a:xfrm>
+            <a:off x="4864608" y="2057400"/>
+            <a:ext cx="3666744" cy="525780"/>
           </a:xfrm>
           <a:prstGeom prst="rect">
             <a:avLst/>
@@ -4286,24 +4704,33 @@
           <a:lstStyle/>
           <a:p>
             <a:pPr indent="0" marL="0">
-              <a:buNone/>
-            </a:pPr>
-            <a:r>
-              <a:rPr lang="en-US" sz="1400" b="1" dirty="0">
-                <a:solidFill>
-                  <a:srgbClr val="0E7C86"/>
+              <a:spcAft>
+                <a:spcPts val="300"/>
+              </a:spcAft>
+              <a:buNone/>
+            </a:pPr>
+            <a:r>
+              <a:rPr lang="en-US" sz="1200" dirty="0">
+                <a:solidFill>
+                  <a:srgbClr val="1A1A1A"/>
                 </a:solidFill>
                 <a:latin typeface="Yu Gothic UI" pitchFamily="34" charset="0"/>
                 <a:ea typeface="Yu Gothic UI" pitchFamily="34" charset="-122"/>
                 <a:cs typeface="Yu Gothic UI" pitchFamily="34" charset="-120"/>
               </a:rPr>
-              <a:t>✓  </a:t>
-            </a:r>
+              <a:t>「国の公式データを使う」か「うちの独自の判断」か。</a:t>
+            </a:r>
+            <a:endParaRPr lang="en-US" sz="1200" dirty="0"/>
+          </a:p>
+          <a:p>
             <a:pPr indent="0" marL="0">
-              <a:buNone/>
-            </a:pPr>
-            <a:r>
-              <a:rPr lang="en-US" sz="1300" dirty="0">
+              <a:spcAft>
+                <a:spcPts val="300"/>
+              </a:spcAft>
+              <a:buNone/>
+            </a:pPr>
+            <a:r>
+              <a:rPr lang="en-US" sz="1200" dirty="0">
                 <a:solidFill>
                   <a:srgbClr val="1A1A1A"/>
                 </a:solidFill>
@@ -4311,22 +4738,147 @@
                 <a:ea typeface="Yu Gothic UI" pitchFamily="34" charset="-122"/>
                 <a:cs typeface="Yu Gothic UI" pitchFamily="34" charset="-120"/>
               </a:rPr>
-              <a:t>各数値が 公的/独自/計算式 のどれかに分類されているか</a:t>
-            </a:r>
-            <a:endParaRPr lang="en-US" sz="1300" dirty="0"/>
-          </a:p>
-        </p:txBody>
-      </p:sp>
-      <p:sp>
-        <p:nvSpPr>
-          <p:cNvPr id="16" name="Text 14"/>
-          <p:cNvSpPr/>
-          <p:nvPr/>
-        </p:nvSpPr>
-        <p:spPr>
-          <a:xfrm>
-            <a:off x="3429000" y="3611880"/>
-            <a:ext cx="2359152" cy="1097280"/>
+              <a:t>各数値の "出所" を分ける。</a:t>
+            </a:r>
+            <a:endParaRPr lang="en-US" sz="1200" dirty="0"/>
+          </a:p>
+        </p:txBody>
+      </p:sp>
+      <p:sp>
+        <p:nvSpPr>
+          <p:cNvPr id="15" name="Shape 13"/>
+          <p:cNvSpPr/>
+          <p:nvPr/>
+        </p:nvSpPr>
+        <p:spPr>
+          <a:xfrm>
+            <a:off x="411480" y="2857500"/>
+            <a:ext cx="4069080" cy="1440180"/>
+          </a:xfrm>
+          <a:prstGeom prst="roundRect">
+            <a:avLst>
+              <a:gd name="adj" fmla="val 5079"/>
+            </a:avLst>
+          </a:prstGeom>
+          <a:solidFill>
+            <a:srgbClr val="F4F6F9"/>
+          </a:solidFill>
+          <a:ln w="19050">
+            <a:solidFill>
+              <a:srgbClr val="1F3A5F"/>
+            </a:solidFill>
+            <a:prstDash val="solid"/>
+          </a:ln>
+        </p:spPr>
+      </p:sp>
+      <p:sp>
+        <p:nvSpPr>
+          <p:cNvPr id="16" name="Shape 14"/>
+          <p:cNvSpPr/>
+          <p:nvPr/>
+        </p:nvSpPr>
+        <p:spPr>
+          <a:xfrm>
+            <a:off x="557784" y="3003804"/>
+            <a:ext cx="502920" cy="502920"/>
+          </a:xfrm>
+          <a:prstGeom prst="ellipse">
+            <a:avLst/>
+          </a:prstGeom>
+          <a:solidFill>
+            <a:srgbClr val="1F3A5F"/>
+          </a:solidFill>
+          <a:ln/>
+        </p:spPr>
+      </p:sp>
+      <p:sp>
+        <p:nvSpPr>
+          <p:cNvPr id="17" name="Text 15"/>
+          <p:cNvSpPr/>
+          <p:nvPr/>
+        </p:nvSpPr>
+        <p:spPr>
+          <a:xfrm>
+            <a:off x="557784" y="3003804"/>
+            <a:ext cx="502920" cy="502920"/>
+          </a:xfrm>
+          <a:prstGeom prst="rect">
+            <a:avLst/>
+          </a:prstGeom>
+          <a:noFill/>
+          <a:ln/>
+        </p:spPr>
+        <p:txBody>
+          <a:bodyPr wrap="square" rtlCol="0" anchor="ctr"/>
+          <a:lstStyle/>
+          <a:p>
+            <a:pPr algn="ctr" indent="0" marL="0">
+              <a:buNone/>
+            </a:pPr>
+            <a:r>
+              <a:rPr lang="en-US" sz="2000" b="1" dirty="0">
+                <a:solidFill>
+                  <a:srgbClr val="FFFFFF"/>
+                </a:solidFill>
+                <a:latin typeface="Yu Gothic UI Semibold" pitchFamily="34" charset="0"/>
+                <a:ea typeface="Yu Gothic UI Semibold" pitchFamily="34" charset="-122"/>
+                <a:cs typeface="Yu Gothic UI Semibold" pitchFamily="34" charset="-120"/>
+              </a:rPr>
+              <a:t>3</a:t>
+            </a:r>
+            <a:endParaRPr lang="en-US" sz="2000" dirty="0"/>
+          </a:p>
+        </p:txBody>
+      </p:sp>
+      <p:sp>
+        <p:nvSpPr>
+          <p:cNvPr id="18" name="Text 16"/>
+          <p:cNvSpPr/>
+          <p:nvPr/>
+        </p:nvSpPr>
+        <p:spPr>
+          <a:xfrm>
+            <a:off x="1188720" y="2994660"/>
+            <a:ext cx="3154680" cy="502920"/>
+          </a:xfrm>
+          <a:prstGeom prst="rect">
+            <a:avLst/>
+          </a:prstGeom>
+          <a:noFill/>
+          <a:ln/>
+        </p:spPr>
+        <p:txBody>
+          <a:bodyPr wrap="square" rtlCol="0" anchor="ctr"/>
+          <a:lstStyle/>
+          <a:p>
+            <a:pPr indent="0" marL="0">
+              <a:buNone/>
+            </a:pPr>
+            <a:r>
+              <a:rPr lang="en-US" sz="1400" b="1" dirty="0">
+                <a:solidFill>
+                  <a:srgbClr val="1F3A5F"/>
+                </a:solidFill>
+                <a:latin typeface="Yu Gothic UI Semibold" pitchFamily="34" charset="0"/>
+                <a:ea typeface="Yu Gothic UI Semibold" pitchFamily="34" charset="-122"/>
+                <a:cs typeface="Yu Gothic UI Semibold" pitchFamily="34" charset="-120"/>
+              </a:rPr>
+              <a:t>使うときの画面</a:t>
+            </a:r>
+            <a:endParaRPr lang="en-US" sz="1400" dirty="0"/>
+          </a:p>
+        </p:txBody>
+      </p:sp>
+      <p:sp>
+        <p:nvSpPr>
+          <p:cNvPr id="19" name="Text 17"/>
+          <p:cNvSpPr/>
+          <p:nvPr/>
+        </p:nvSpPr>
+        <p:spPr>
+          <a:xfrm>
+            <a:off x="612648" y="3634740"/>
+            <a:ext cx="3666744" cy="525780"/>
           </a:xfrm>
           <a:prstGeom prst="rect">
             <a:avLst/>
@@ -4339,24 +4891,33 @@
           <a:lstStyle/>
           <a:p>
             <a:pPr indent="0" marL="0">
-              <a:buNone/>
-            </a:pPr>
-            <a:r>
-              <a:rPr lang="en-US" sz="1400" b="1" dirty="0">
-                <a:solidFill>
-                  <a:srgbClr val="E8A33D"/>
+              <a:spcAft>
+                <a:spcPts val="300"/>
+              </a:spcAft>
+              <a:buNone/>
+            </a:pPr>
+            <a:r>
+              <a:rPr lang="en-US" sz="1200" dirty="0">
+                <a:solidFill>
+                  <a:srgbClr val="1A1A1A"/>
                 </a:solidFill>
                 <a:latin typeface="Yu Gothic UI" pitchFamily="34" charset="0"/>
                 <a:ea typeface="Yu Gothic UI" pitchFamily="34" charset="-122"/>
                 <a:cs typeface="Yu Gothic UI" pitchFamily="34" charset="-120"/>
               </a:rPr>
-              <a:t>💡  </a:t>
-            </a:r>
+              <a:t>サイドバー / Webアプリ / フォーム の3択。</a:t>
+            </a:r>
+            <a:endParaRPr lang="en-US" sz="1200" dirty="0"/>
+          </a:p>
+          <a:p>
             <a:pPr indent="0" marL="0">
-              <a:buNone/>
-            </a:pPr>
-            <a:r>
-              <a:rPr lang="en-US" sz="1300" dirty="0">
+              <a:spcAft>
+                <a:spcPts val="300"/>
+              </a:spcAft>
+              <a:buNone/>
+            </a:pPr>
+            <a:r>
+              <a:rPr lang="en-US" sz="1200" dirty="0">
                 <a:solidFill>
                   <a:srgbClr val="1A1A1A"/>
                 </a:solidFill>
@@ -4364,32 +4925,32 @@
                 <a:ea typeface="Yu Gothic UI" pitchFamily="34" charset="-122"/>
                 <a:cs typeface="Yu Gothic UI" pitchFamily="34" charset="-120"/>
               </a:rPr>
-              <a:t>「独自」の項目には必ず "なぜその値か" が書かれているか目視</a:t>
-            </a:r>
-            <a:endParaRPr lang="en-US" sz="1300" dirty="0"/>
-          </a:p>
-        </p:txBody>
-      </p:sp>
-      <p:sp>
-        <p:nvSpPr>
-          <p:cNvPr id="17" name="Shape 15"/>
-          <p:cNvSpPr/>
-          <p:nvPr/>
-        </p:nvSpPr>
-        <p:spPr>
-          <a:xfrm>
-            <a:off x="6080760" y="1325880"/>
-            <a:ext cx="2651760" cy="3474720"/>
+              <a:t>自社の使い方に合うものを1つ選ぶ。</a:t>
+            </a:r>
+            <a:endParaRPr lang="en-US" sz="1200" dirty="0"/>
+          </a:p>
+        </p:txBody>
+      </p:sp>
+      <p:sp>
+        <p:nvSpPr>
+          <p:cNvPr id="20" name="Shape 18"/>
+          <p:cNvSpPr/>
+          <p:nvPr/>
+        </p:nvSpPr>
+        <p:spPr>
+          <a:xfrm>
+            <a:off x="4663440" y="2857500"/>
+            <a:ext cx="4069080" cy="1440180"/>
           </a:xfrm>
           <a:prstGeom prst="roundRect">
             <a:avLst>
-              <a:gd name="adj" fmla="val 3448"/>
+              <a:gd name="adj" fmla="val 5079"/>
             </a:avLst>
           </a:prstGeom>
           <a:solidFill>
             <a:srgbClr val="F4F6F9"/>
           </a:solidFill>
-          <a:ln w="15240">
+          <a:ln w="19050">
             <a:solidFill>
               <a:srgbClr val="7C5F8A"/>
             </a:solidFill>
@@ -4399,16 +4960,16 @@
       </p:sp>
       <p:sp>
         <p:nvSpPr>
-          <p:cNvPr id="18" name="Shape 16"/>
-          <p:cNvSpPr/>
-          <p:nvPr/>
-        </p:nvSpPr>
-        <p:spPr>
-          <a:xfrm>
-            <a:off x="6080760" y="1325880"/>
-            <a:ext cx="2651760" cy="457200"/>
-          </a:xfrm>
-          <a:prstGeom prst="rect">
+          <p:cNvPr id="21" name="Shape 19"/>
+          <p:cNvSpPr/>
+          <p:nvPr/>
+        </p:nvSpPr>
+        <p:spPr>
+          <a:xfrm>
+            <a:off x="4809744" y="3003804"/>
+            <a:ext cx="502920" cy="502920"/>
+          </a:xfrm>
+          <a:prstGeom prst="ellipse">
             <a:avLst/>
           </a:prstGeom>
           <a:solidFill>
@@ -4419,14 +4980,14 @@
       </p:sp>
       <p:sp>
         <p:nvSpPr>
-          <p:cNvPr id="19" name="Text 17"/>
-          <p:cNvSpPr/>
-          <p:nvPr/>
-        </p:nvSpPr>
-        <p:spPr>
-          <a:xfrm>
-            <a:off x="6208776" y="1380744"/>
-            <a:ext cx="2395728" cy="365760"/>
+          <p:cNvPr id="22" name="Text 20"/>
+          <p:cNvSpPr/>
+          <p:nvPr/>
+        </p:nvSpPr>
+        <p:spPr>
+          <a:xfrm>
+            <a:off x="4809744" y="3003804"/>
+            <a:ext cx="502920" cy="502920"/>
           </a:xfrm>
           <a:prstGeom prst="rect">
             <a:avLst/>
@@ -4438,11 +4999,11 @@
           <a:bodyPr wrap="square" rtlCol="0" anchor="ctr"/>
           <a:lstStyle/>
           <a:p>
-            <a:pPr indent="0" marL="0">
-              <a:buNone/>
-            </a:pPr>
-            <a:r>
-              <a:rPr lang="en-US" sz="1500" b="1" dirty="0">
+            <a:pPr algn="ctr" indent="0" marL="0">
+              <a:buNone/>
+            </a:pPr>
+            <a:r>
+              <a:rPr lang="en-US" sz="2000" b="1" dirty="0">
                 <a:solidFill>
                   <a:srgbClr val="FFFFFF"/>
                 </a:solidFill>
@@ -4450,38 +5011,38 @@
                 <a:ea typeface="Yu Gothic UI Semibold" pitchFamily="34" charset="-122"/>
                 <a:cs typeface="Yu Gothic UI Semibold" pitchFamily="34" charset="-120"/>
               </a:rPr>
-              <a:t>観点 C</a:t>
-            </a:r>
-            <a:endParaRPr lang="en-US" sz="1500" dirty="0"/>
-          </a:p>
-        </p:txBody>
-      </p:sp>
-      <p:sp>
-        <p:nvSpPr>
-          <p:cNvPr id="20" name="Text 18"/>
-          <p:cNvSpPr/>
-          <p:nvPr/>
-        </p:nvSpPr>
-        <p:spPr>
-          <a:xfrm>
-            <a:off x="6263640" y="1892808"/>
-            <a:ext cx="2359152" cy="548640"/>
-          </a:xfrm>
-          <a:prstGeom prst="rect">
-            <a:avLst/>
-          </a:prstGeom>
-          <a:noFill/>
-          <a:ln/>
-        </p:spPr>
-        <p:txBody>
-          <a:bodyPr wrap="square" rtlCol="0" anchor="t"/>
+              <a:t>4</a:t>
+            </a:r>
+            <a:endParaRPr lang="en-US" sz="2000" dirty="0"/>
+          </a:p>
+        </p:txBody>
+      </p:sp>
+      <p:sp>
+        <p:nvSpPr>
+          <p:cNvPr id="23" name="Text 21"/>
+          <p:cNvSpPr/>
+          <p:nvPr/>
+        </p:nvSpPr>
+        <p:spPr>
+          <a:xfrm>
+            <a:off x="5440680" y="2994660"/>
+            <a:ext cx="3154680" cy="502920"/>
+          </a:xfrm>
+          <a:prstGeom prst="rect">
+            <a:avLst/>
+          </a:prstGeom>
+          <a:noFill/>
+          <a:ln/>
+        </p:spPr>
+        <p:txBody>
+          <a:bodyPr wrap="square" rtlCol="0" anchor="ctr"/>
           <a:lstStyle/>
           <a:p>
             <a:pPr indent="0" marL="0">
               <a:buNone/>
             </a:pPr>
             <a:r>
-              <a:rPr lang="en-US" sz="1500" b="1" dirty="0">
+              <a:rPr lang="en-US" sz="1400" b="1" dirty="0">
                 <a:solidFill>
                   <a:srgbClr val="1F3A5F"/>
                 </a:solidFill>
@@ -4489,22 +5050,22 @@
                 <a:ea typeface="Yu Gothic UI Semibold" pitchFamily="34" charset="-122"/>
                 <a:cs typeface="Yu Gothic UI Semibold" pitchFamily="34" charset="-120"/>
               </a:rPr>
-              <a:t>C. 更新運用の意識</a:t>
-            </a:r>
-            <a:endParaRPr lang="en-US" sz="1500" dirty="0"/>
-          </a:p>
-        </p:txBody>
-      </p:sp>
-      <p:sp>
-        <p:nvSpPr>
-          <p:cNvPr id="21" name="Text 19"/>
-          <p:cNvSpPr/>
-          <p:nvPr/>
-        </p:nvSpPr>
-        <p:spPr>
-          <a:xfrm>
-            <a:off x="6263640" y="2514600"/>
-            <a:ext cx="2359152" cy="1051560"/>
+              <a:t>うちならではの提案パターン</a:t>
+            </a:r>
+            <a:endParaRPr lang="en-US" sz="1400" dirty="0"/>
+          </a:p>
+        </p:txBody>
+      </p:sp>
+      <p:sp>
+        <p:nvSpPr>
+          <p:cNvPr id="24" name="Text 22"/>
+          <p:cNvSpPr/>
+          <p:nvPr/>
+        </p:nvSpPr>
+        <p:spPr>
+          <a:xfrm>
+            <a:off x="4864608" y="3634740"/>
+            <a:ext cx="3666744" cy="525780"/>
           </a:xfrm>
           <a:prstGeom prst="rect">
             <a:avLst/>
@@ -4517,24 +5078,33 @@
           <a:lstStyle/>
           <a:p>
             <a:pPr indent="0" marL="0">
-              <a:buNone/>
-            </a:pPr>
-            <a:r>
-              <a:rPr lang="en-US" sz="1400" b="1" dirty="0">
-                <a:solidFill>
-                  <a:srgbClr val="0E7C86"/>
+              <a:spcAft>
+                <a:spcPts val="300"/>
+              </a:spcAft>
+              <a:buNone/>
+            </a:pPr>
+            <a:r>
+              <a:rPr lang="en-US" sz="1200" dirty="0">
+                <a:solidFill>
+                  <a:srgbClr val="1A1A1A"/>
                 </a:solidFill>
                 <a:latin typeface="Yu Gothic UI" pitchFamily="34" charset="0"/>
                 <a:ea typeface="Yu Gothic UI" pitchFamily="34" charset="-122"/>
                 <a:cs typeface="Yu Gothic UI" pitchFamily="34" charset="-120"/>
               </a:rPr>
-              <a:t>✓  </a:t>
-            </a:r>
+              <a:t>こういう顧客ならこう提案、を3〜5個。</a:t>
+            </a:r>
+            <a:endParaRPr lang="en-US" sz="1200" dirty="0"/>
+          </a:p>
+          <a:p>
             <a:pPr indent="0" marL="0">
-              <a:buNone/>
-            </a:pPr>
-            <a:r>
-              <a:rPr lang="en-US" sz="1300" dirty="0">
+              <a:spcAft>
+                <a:spcPts val="300"/>
+              </a:spcAft>
+              <a:buNone/>
+            </a:pPr>
+            <a:r>
+              <a:rPr lang="en-US" sz="1200" dirty="0">
                 <a:solidFill>
                   <a:srgbClr val="1A1A1A"/>
                 </a:solidFill>
@@ -4542,62 +5112,70 @@
                 <a:ea typeface="Yu Gothic UI" pitchFamily="34" charset="-122"/>
                 <a:cs typeface="Yu Gothic UI" pitchFamily="34" charset="-120"/>
               </a:rPr>
-              <a:t>「誰が いつ 何を見直すか」の視点で列と頻度が設計されているか</a:t>
-            </a:r>
-            <a:endParaRPr lang="en-US" sz="1300" dirty="0"/>
-          </a:p>
-        </p:txBody>
-      </p:sp>
-      <p:sp>
-        <p:nvSpPr>
-          <p:cNvPr id="22" name="Text 20"/>
-          <p:cNvSpPr/>
-          <p:nvPr/>
-        </p:nvSpPr>
-        <p:spPr>
-          <a:xfrm>
-            <a:off x="6263640" y="3611880"/>
-            <a:ext cx="2359152" cy="1097280"/>
-          </a:xfrm>
-          <a:prstGeom prst="rect">
-            <a:avLst/>
-          </a:prstGeom>
-          <a:noFill/>
-          <a:ln/>
-        </p:spPr>
-        <p:txBody>
-          <a:bodyPr wrap="square" rtlCol="0" anchor="t"/>
-          <a:lstStyle/>
-          <a:p>
-            <a:pPr indent="0" marL="0">
-              <a:buNone/>
-            </a:pPr>
-            <a:r>
-              <a:rPr lang="en-US" sz="1400" b="1" dirty="0">
-                <a:solidFill>
-                  <a:srgbClr val="E8A33D"/>
-                </a:solidFill>
-                <a:latin typeface="Yu Gothic UI" pitchFamily="34" charset="0"/>
-                <a:ea typeface="Yu Gothic UI" pitchFamily="34" charset="-122"/>
-                <a:cs typeface="Yu Gothic UI" pitchFamily="34" charset="-120"/>
-              </a:rPr>
-              <a:t>💡  </a:t>
-            </a:r>
-            <a:pPr indent="0" marL="0">
-              <a:buNone/>
-            </a:pPr>
-            <a:r>
-              <a:rPr lang="en-US" sz="1300" dirty="0">
-                <a:solidFill>
-                  <a:srgbClr val="1A1A1A"/>
-                </a:solidFill>
-                <a:latin typeface="Yu Gothic UI" pitchFamily="34" charset="0"/>
-                <a:ea typeface="Yu Gothic UI" pitchFamily="34" charset="-122"/>
-                <a:cs typeface="Yu Gothic UI" pitchFamily="34" charset="-120"/>
-              </a:rPr>
-              <a:t>公的指標は年1回、独自数値は月1回など 頻度を書けているか</a:t>
-            </a:r>
-            <a:endParaRPr lang="en-US" sz="1300" dirty="0"/>
+              <a:t>ここで代理店の "らしさ" を入れる。</a:t>
+            </a:r>
+            <a:endParaRPr lang="en-US" sz="1200" dirty="0"/>
+          </a:p>
+        </p:txBody>
+      </p:sp>
+      <p:sp>
+        <p:nvSpPr>
+          <p:cNvPr id="25" name="Shape 23"/>
+          <p:cNvSpPr/>
+          <p:nvPr/>
+        </p:nvSpPr>
+        <p:spPr>
+          <a:xfrm>
+            <a:off x="411480" y="4434840"/>
+            <a:ext cx="8321040" cy="411480"/>
+          </a:xfrm>
+          <a:prstGeom prst="roundRect">
+            <a:avLst>
+              <a:gd name="adj" fmla="val 13333"/>
+            </a:avLst>
+          </a:prstGeom>
+          <a:solidFill>
+            <a:srgbClr val="E8A33D"/>
+          </a:solidFill>
+          <a:ln/>
+        </p:spPr>
+      </p:sp>
+      <p:sp>
+        <p:nvSpPr>
+          <p:cNvPr id="26" name="Text 24"/>
+          <p:cNvSpPr/>
+          <p:nvPr/>
+        </p:nvSpPr>
+        <p:spPr>
+          <a:xfrm>
+            <a:off x="411480" y="4434840"/>
+            <a:ext cx="8321040" cy="411480"/>
+          </a:xfrm>
+          <a:prstGeom prst="rect">
+            <a:avLst/>
+          </a:prstGeom>
+          <a:noFill/>
+          <a:ln/>
+        </p:spPr>
+        <p:txBody>
+          <a:bodyPr wrap="square" rtlCol="0" anchor="ctr"/>
+          <a:lstStyle/>
+          <a:p>
+            <a:pPr algn="ctr" indent="0" marL="0">
+              <a:buNone/>
+            </a:pPr>
+            <a:r>
+              <a:rPr lang="en-US" sz="1200" b="1" dirty="0">
+                <a:solidFill>
+                  <a:srgbClr val="1F3A5F"/>
+                </a:solidFill>
+                <a:latin typeface="Yu Gothic UI Semibold" pitchFamily="34" charset="0"/>
+                <a:ea typeface="Yu Gothic UI Semibold" pitchFamily="34" charset="-122"/>
+                <a:cs typeface="Yu Gothic UI Semibold" pitchFamily="34" charset="-120"/>
+              </a:rPr>
+              <a:t>★ ここに漏れがあると、良いアプリは作れません</a:t>
+            </a:r>
+            <a:endParaRPr lang="en-US" sz="1200" dirty="0"/>
           </a:p>
         </p:txBody>
       </p:sp>
@@ -4661,8 +5239,8 @@
         </p:nvSpPr>
         <p:spPr>
           <a:xfrm>
-            <a:off x="411480" y="201168"/>
-            <a:ext cx="8412480" cy="594360"/>
+            <a:off x="411480" y="182880"/>
+            <a:ext cx="8412480" cy="548640"/>
           </a:xfrm>
           <a:prstGeom prst="rect">
             <a:avLst/>
@@ -4678,7 +5256,7 @@
               <a:buNone/>
             </a:pPr>
             <a:r>
-              <a:rPr lang="en-US" sz="2600" b="1" dirty="0">
+              <a:rPr lang="en-US" sz="2400" b="1" dirty="0">
                 <a:solidFill>
                   <a:srgbClr val="1F3A5F"/>
                 </a:solidFill>
@@ -4686,34 +5264,73 @@
                 <a:ea typeface="Yu Gothic UI Semibold" pitchFamily="34" charset="-122"/>
                 <a:cs typeface="Yu Gothic UI Semibold" pitchFamily="34" charset="-120"/>
               </a:rPr>
-              <a:t>演習2 UI設計と 独自アドバイスの言語化</a:t>
-            </a:r>
-            <a:endParaRPr lang="en-US" sz="2600" dirty="0"/>
-          </a:p>
-        </p:txBody>
-      </p:sp>
-      <p:sp>
-        <p:nvSpPr>
-          <p:cNvPr id="4" name="Shape 2"/>
-          <p:cNvSpPr/>
-          <p:nvPr/>
-        </p:nvSpPr>
-        <p:spPr>
-          <a:xfrm>
-            <a:off x="411480" y="1005840"/>
-            <a:ext cx="4160520" cy="1783080"/>
+              <a:t>演習1 ─ データの入れ物 と 数値の根拠 を決める</a:t>
+            </a:r>
+            <a:endParaRPr lang="en-US" sz="2400" dirty="0"/>
+          </a:p>
+        </p:txBody>
+      </p:sp>
+      <p:sp>
+        <p:nvSpPr>
+          <p:cNvPr id="4" name="Text 2"/>
+          <p:cNvSpPr/>
+          <p:nvPr/>
+        </p:nvSpPr>
+        <p:spPr>
+          <a:xfrm>
+            <a:off x="411480" y="749808"/>
+            <a:ext cx="8412480" cy="365760"/>
+          </a:xfrm>
+          <a:prstGeom prst="rect">
+            <a:avLst/>
+          </a:prstGeom>
+          <a:noFill/>
+          <a:ln/>
+        </p:spPr>
+        <p:txBody>
+          <a:bodyPr wrap="square" rtlCol="0" anchor="ctr"/>
+          <a:lstStyle/>
+          <a:p>
+            <a:pPr indent="0" marL="0">
+              <a:buNone/>
+            </a:pPr>
+            <a:r>
+              <a:rPr lang="en-US" sz="1300" i="1" dirty="0">
+                <a:solidFill>
+                  <a:srgbClr val="555555"/>
+                </a:solidFill>
+                <a:latin typeface="Yu Gothic UI" pitchFamily="34" charset="0"/>
+                <a:ea typeface="Yu Gothic UI" pitchFamily="34" charset="-122"/>
+                <a:cs typeface="Yu Gothic UI" pitchFamily="34" charset="-120"/>
+              </a:rPr>
+              <a:t>同梱「W1_設計書テンプレート.xlsx」を開いて 埋めていきます</a:t>
+            </a:r>
+            <a:endParaRPr lang="en-US" sz="1300" dirty="0"/>
+          </a:p>
+        </p:txBody>
+      </p:sp>
+      <p:sp>
+        <p:nvSpPr>
+          <p:cNvPr id="5" name="Shape 3"/>
+          <p:cNvSpPr/>
+          <p:nvPr/>
+        </p:nvSpPr>
+        <p:spPr>
+          <a:xfrm>
+            <a:off x="411480" y="1234440"/>
+            <a:ext cx="3429000" cy="1691640"/>
           </a:xfrm>
           <a:prstGeom prst="roundRect">
             <a:avLst>
-              <a:gd name="adj" fmla="val 4103"/>
+              <a:gd name="adj" fmla="val 4324"/>
             </a:avLst>
           </a:prstGeom>
           <a:solidFill>
             <a:srgbClr val="F4F6F9"/>
           </a:solidFill>
-          <a:ln w="6350">
+          <a:ln w="25400">
             <a:solidFill>
-              <a:srgbClr val="D7DCE3"/>
+              <a:srgbClr val="1F3A5F"/>
             </a:solidFill>
             <a:prstDash val="solid"/>
           </a:ln>
@@ -4721,34 +5338,14 @@
       </p:sp>
       <p:sp>
         <p:nvSpPr>
-          <p:cNvPr id="5" name="Shape 3"/>
-          <p:cNvSpPr/>
-          <p:nvPr/>
-        </p:nvSpPr>
-        <p:spPr>
-          <a:xfrm>
-            <a:off x="411480" y="1005840"/>
-            <a:ext cx="91440" cy="1783080"/>
-          </a:xfrm>
-          <a:prstGeom prst="rect">
-            <a:avLst/>
-          </a:prstGeom>
-          <a:solidFill>
-            <a:srgbClr val="1F3A5F"/>
-          </a:solidFill>
-          <a:ln/>
-        </p:spPr>
-      </p:sp>
-      <p:sp>
-        <p:nvSpPr>
           <p:cNvPr id="6" name="Text 4"/>
           <p:cNvSpPr/>
           <p:nvPr/>
         </p:nvSpPr>
         <p:spPr>
           <a:xfrm>
-            <a:off x="612648" y="1097280"/>
-            <a:ext cx="3849624" cy="384048"/>
+            <a:off x="548640" y="1325880"/>
+            <a:ext cx="3154680" cy="365760"/>
           </a:xfrm>
           <a:prstGeom prst="rect">
             <a:avLst/>
@@ -4764,7 +5361,7 @@
               <a:buNone/>
             </a:pPr>
             <a:r>
-              <a:rPr lang="en-US" sz="1600" b="1" dirty="0">
+              <a:rPr lang="en-US" sz="1400" b="1" dirty="0">
                 <a:solidFill>
                   <a:srgbClr val="1F3A5F"/>
                 </a:solidFill>
@@ -4772,9 +5369,9 @@
                 <a:ea typeface="Yu Gothic UI Semibold" pitchFamily="34" charset="-122"/>
                 <a:cs typeface="Yu Gothic UI Semibold" pitchFamily="34" charset="-120"/>
               </a:rPr>
-              <a:t>📍 シチュエーション</a:t>
-            </a:r>
-            <a:endParaRPr lang="en-US" sz="1600" dirty="0"/>
+              <a:t>📌 シチュエーション</a:t>
+            </a:r>
+            <a:endParaRPr lang="en-US" sz="1400" dirty="0"/>
           </a:p>
         </p:txBody>
       </p:sp>
@@ -4786,8 +5383,8 @@
         </p:nvSpPr>
         <p:spPr>
           <a:xfrm>
-            <a:off x="649224" y="1536192"/>
-            <a:ext cx="3703320" cy="1161288"/>
+            <a:off x="548640" y="1709928"/>
+            <a:ext cx="3154680" cy="1143000"/>
           </a:xfrm>
           <a:prstGeom prst="rect">
             <a:avLst/>
@@ -4801,12 +5398,12 @@
           <a:p>
             <a:pPr indent="0" marL="0">
               <a:spcAft>
-                <a:spcPts val="400"/>
+                <a:spcPts val="300"/>
               </a:spcAft>
               <a:buNone/>
             </a:pPr>
             <a:r>
-              <a:rPr lang="en-US" sz="1400" dirty="0">
+              <a:rPr lang="en-US" sz="1200" dirty="0">
                 <a:solidFill>
                   <a:srgbClr val="1A1A1A"/>
                 </a:solidFill>
@@ -4814,19 +5411,28 @@
                 <a:ea typeface="Yu Gothic UI" pitchFamily="34" charset="-122"/>
                 <a:cs typeface="Yu Gothic UI" pitchFamily="34" charset="-120"/>
               </a:rPr>
-              <a:t>「どの画面でこのAI を使うか」を先に決めないと、コード書き方が決まらない。</a:t>
-            </a:r>
-            <a:endParaRPr lang="en-US" sz="1400" dirty="0"/>
+              <a:t>スプレッドシートを "データの入れ物" として使います。</a:t>
+            </a:r>
+            <a:endParaRPr lang="en-US" sz="1200" dirty="0"/>
           </a:p>
           <a:p>
             <a:pPr indent="0" marL="0">
               <a:spcAft>
-                <a:spcPts val="400"/>
+                <a:spcPts val="300"/>
               </a:spcAft>
               <a:buNone/>
             </a:pPr>
-            <a:r>
-              <a:rPr lang="en-US" sz="1400" dirty="0">
+            <a:endParaRPr lang="en-US" sz="1200" dirty="0"/>
+          </a:p>
+          <a:p>
+            <a:pPr indent="0" marL="0">
+              <a:spcAft>
+                <a:spcPts val="300"/>
+              </a:spcAft>
+              <a:buNone/>
+            </a:pPr>
+            <a:r>
+              <a:rPr lang="en-US" sz="1200" dirty="0">
                 <a:solidFill>
                   <a:srgbClr val="1A1A1A"/>
                 </a:solidFill>
@@ -4834,19 +5440,28 @@
                 <a:ea typeface="Yu Gothic UI" pitchFamily="34" charset="-122"/>
                 <a:cs typeface="Yu Gothic UI" pitchFamily="34" charset="-120"/>
               </a:rPr>
-              <a:t>サイドバー/WebApp/フォーム の3択から1つ選び、その理由を書く。</a:t>
-            </a:r>
-            <a:endParaRPr lang="en-US" sz="1400" dirty="0"/>
+              <a:t>3〜5枚のシートに分けて、それぞれに何を入れるかを決めます。</a:t>
+            </a:r>
+            <a:endParaRPr lang="en-US" sz="1200" dirty="0"/>
           </a:p>
           <a:p>
             <a:pPr indent="0" marL="0">
               <a:spcAft>
-                <a:spcPts val="400"/>
+                <a:spcPts val="300"/>
               </a:spcAft>
               <a:buNone/>
             </a:pPr>
-            <a:r>
-              <a:rPr lang="en-US" sz="1400" dirty="0">
+            <a:endParaRPr lang="en-US" sz="1200" dirty="0"/>
+          </a:p>
+          <a:p>
+            <a:pPr indent="0" marL="0">
+              <a:spcAft>
+                <a:spcPts val="300"/>
+              </a:spcAft>
+              <a:buNone/>
+            </a:pPr>
+            <a:r>
+              <a:rPr lang="en-US" sz="1200" dirty="0">
                 <a:solidFill>
                   <a:srgbClr val="1A1A1A"/>
                 </a:solidFill>
@@ -4854,9 +5469,29 @@
                 <a:ea typeface="Yu Gothic UI" pitchFamily="34" charset="-122"/>
                 <a:cs typeface="Yu Gothic UI" pitchFamily="34" charset="-120"/>
               </a:rPr>
-              <a:t>あわせて「独自アドバイスマスタ」に代理店ならではの提案パターン 3〜5個を書き出す。</a:t>
-            </a:r>
-            <a:endParaRPr lang="en-US" sz="1400" dirty="0"/>
+              <a:t>数値は「国の公式データ」「うちの独自の判断」「計算で出す」の</a:t>
+            </a:r>
+            <a:endParaRPr lang="en-US" sz="1200" dirty="0"/>
+          </a:p>
+          <a:p>
+            <a:pPr indent="0" marL="0">
+              <a:spcAft>
+                <a:spcPts val="300"/>
+              </a:spcAft>
+              <a:buNone/>
+            </a:pPr>
+            <a:r>
+              <a:rPr lang="en-US" sz="1200" dirty="0">
+                <a:solidFill>
+                  <a:srgbClr val="1A1A1A"/>
+                </a:solidFill>
+                <a:latin typeface="Yu Gothic UI" pitchFamily="34" charset="0"/>
+                <a:ea typeface="Yu Gothic UI" pitchFamily="34" charset="-122"/>
+                <a:cs typeface="Yu Gothic UI" pitchFamily="34" charset="-120"/>
+              </a:rPr>
+              <a:t>3種類に分類します。</a:t>
+            </a:r>
+            <a:endParaRPr lang="en-US" sz="1200" dirty="0"/>
           </a:p>
         </p:txBody>
       </p:sp>
@@ -4868,20 +5503,20 @@
         </p:nvSpPr>
         <p:spPr>
           <a:xfrm>
-            <a:off x="411480" y="2880360"/>
-            <a:ext cx="4160520" cy="2011680"/>
+            <a:off x="411480" y="3063240"/>
+            <a:ext cx="3429000" cy="1874520"/>
           </a:xfrm>
           <a:prstGeom prst="roundRect">
             <a:avLst>
-              <a:gd name="adj" fmla="val 3636"/>
+              <a:gd name="adj" fmla="val 3902"/>
             </a:avLst>
           </a:prstGeom>
           <a:solidFill>
-            <a:srgbClr val="F4F6F9"/>
-          </a:solidFill>
-          <a:ln w="6350">
+            <a:srgbClr val="FFF3E0"/>
+          </a:solidFill>
+          <a:ln w="19050">
             <a:solidFill>
-              <a:srgbClr val="D7DCE3"/>
+              <a:srgbClr val="E8A33D"/>
             </a:solidFill>
             <a:prstDash val="solid"/>
           </a:ln>
@@ -4889,34 +5524,14 @@
       </p:sp>
       <p:sp>
         <p:nvSpPr>
-          <p:cNvPr id="9" name="Shape 7"/>
-          <p:cNvSpPr/>
-          <p:nvPr/>
-        </p:nvSpPr>
-        <p:spPr>
-          <a:xfrm>
-            <a:off x="411480" y="2880360"/>
-            <a:ext cx="91440" cy="2011680"/>
-          </a:xfrm>
-          <a:prstGeom prst="rect">
-            <a:avLst/>
-          </a:prstGeom>
-          <a:solidFill>
-            <a:srgbClr val="E8A33D"/>
-          </a:solidFill>
-          <a:ln/>
-        </p:spPr>
-      </p:sp>
-      <p:sp>
-        <p:nvSpPr>
-          <p:cNvPr id="10" name="Text 8"/>
-          <p:cNvSpPr/>
-          <p:nvPr/>
-        </p:nvSpPr>
-        <p:spPr>
-          <a:xfrm>
-            <a:off x="612648" y="2971800"/>
-            <a:ext cx="3849624" cy="384048"/>
+          <p:cNvPr id="9" name="Text 7"/>
+          <p:cNvSpPr/>
+          <p:nvPr/>
+        </p:nvSpPr>
+        <p:spPr>
+          <a:xfrm>
+            <a:off x="548640" y="3154680"/>
+            <a:ext cx="3154680" cy="365760"/>
           </a:xfrm>
           <a:prstGeom prst="rect">
             <a:avLst/>
@@ -4932,7 +5547,7 @@
               <a:buNone/>
             </a:pPr>
             <a:r>
-              <a:rPr lang="en-US" sz="1600" b="1" dirty="0">
+              <a:rPr lang="en-US" sz="1300" b="1" dirty="0">
                 <a:solidFill>
                   <a:srgbClr val="E8A33D"/>
                 </a:solidFill>
@@ -4940,22 +5555,22 @@
                 <a:ea typeface="Yu Gothic UI Semibold" pitchFamily="34" charset="-122"/>
                 <a:cs typeface="Yu Gothic UI Semibold" pitchFamily="34" charset="-120"/>
               </a:rPr>
-              <a:t>💭 プロンプトのヒント</a:t>
-            </a:r>
-            <a:endParaRPr lang="en-US" sz="1600" dirty="0"/>
-          </a:p>
-        </p:txBody>
-      </p:sp>
-      <p:sp>
-        <p:nvSpPr>
-          <p:cNvPr id="11" name="Text 9"/>
-          <p:cNvSpPr/>
-          <p:nvPr/>
-        </p:nvSpPr>
-        <p:spPr>
-          <a:xfrm>
-            <a:off x="649224" y="3410712"/>
-            <a:ext cx="3703320" cy="1389888"/>
+              <a:t>💬 AIとの壁打ちヒント</a:t>
+            </a:r>
+            <a:endParaRPr lang="en-US" sz="1300" dirty="0"/>
+          </a:p>
+        </p:txBody>
+      </p:sp>
+      <p:sp>
+        <p:nvSpPr>
+          <p:cNvPr id="10" name="Text 8"/>
+          <p:cNvSpPr/>
+          <p:nvPr/>
+        </p:nvSpPr>
+        <p:spPr>
+          <a:xfrm>
+            <a:off x="621792" y="3538728"/>
+            <a:ext cx="3081528" cy="1325880"/>
           </a:xfrm>
           <a:prstGeom prst="rect">
             <a:avLst/>
@@ -4972,10 +5587,10 @@
                 <a:spcPts val="400"/>
               </a:spcAft>
               <a:buSzPct val="100000"/>
-              <a:buChar char="●"/>
-            </a:pPr>
-            <a:r>
-              <a:rPr lang="en-US" sz="1400" dirty="0">
+              <a:buChar char="•"/>
+            </a:pPr>
+            <a:r>
+              <a:rPr lang="en-US" sz="1100" dirty="0">
                 <a:solidFill>
                   <a:srgbClr val="1A1A1A"/>
                 </a:solidFill>
@@ -4983,9 +5598,9 @@
                 <a:ea typeface="Yu Gothic UI" pitchFamily="34" charset="-122"/>
                 <a:cs typeface="Yu Gothic UI" pitchFamily="34" charset="-120"/>
               </a:rPr>
-              <a:t>サイドバー=事務所面談中に最速 / WebApp=訪問中や共有向き / フォーム=若手入力+ベテラン確認</a:t>
-            </a:r>
-            <a:endParaRPr lang="en-US" sz="1400" dirty="0"/>
+              <a:t>「AI、保険代理店のライフプランAIをスプシで作りたい。</a:t>
+            </a:r>
+            <a:endParaRPr lang="en-US" sz="1100" dirty="0"/>
           </a:p>
           <a:p>
             <a:pPr marL="342900" indent="-342900">
@@ -4993,10 +5608,10 @@
                 <a:spcPts val="400"/>
               </a:spcAft>
               <a:buSzPct val="100000"/>
-              <a:buChar char="●"/>
-            </a:pPr>
-            <a:r>
-              <a:rPr lang="en-US" sz="1400" dirty="0">
+              <a:buChar char="•"/>
+            </a:pPr>
+            <a:r>
+              <a:rPr lang="en-US" sz="1100" dirty="0">
                 <a:solidFill>
                   <a:srgbClr val="1A1A1A"/>
                 </a:solidFill>
@@ -5004,9 +5619,9 @@
                 <a:ea typeface="Yu Gothic UI" pitchFamily="34" charset="-122"/>
                 <a:cs typeface="Yu Gothic UI" pitchFamily="34" charset="-120"/>
               </a:rPr>
-              <a:t>独自アドバイスは "誰にとっての強みか" を意識(30代夫婦 / 経営者 / シニア独身 etc.)</a:t>
-            </a:r>
-            <a:endParaRPr lang="en-US" sz="1400" dirty="0"/>
+              <a:t>シートは何枚に分ける?」と Gemini に相談</a:t>
+            </a:r>
+            <a:endParaRPr lang="en-US" sz="1100" dirty="0"/>
           </a:p>
           <a:p>
             <a:pPr marL="342900" indent="-342900">
@@ -5014,10 +5629,10 @@
                 <a:spcPts val="400"/>
               </a:spcAft>
               <a:buSzPct val="100000"/>
-              <a:buChar char="●"/>
-            </a:pPr>
-            <a:r>
-              <a:rPr lang="en-US" sz="1400" dirty="0">
+              <a:buChar char="•"/>
+            </a:pPr>
+            <a:r>
+              <a:rPr lang="en-US" sz="1100" dirty="0">
                 <a:solidFill>
                   <a:srgbClr val="1A1A1A"/>
                 </a:solidFill>
@@ -5025,9 +5640,9 @@
                 <a:ea typeface="Yu Gothic UI" pitchFamily="34" charset="-122"/>
                 <a:cs typeface="Yu Gothic UI" pitchFamily="34" charset="-120"/>
               </a:rPr>
-              <a:t>提案文言テンプレは 顧客に説明するトーンで(専門用語羅列 NG)</a:t>
-            </a:r>
-            <a:endParaRPr lang="en-US" sz="1400" dirty="0"/>
+              <a:t>独自数値の例:投資リターンを控えめ1.5% / 都市部の生活費+15%</a:t>
+            </a:r>
+            <a:endParaRPr lang="en-US" sz="1100" dirty="0"/>
           </a:p>
           <a:p>
             <a:pPr marL="342900" indent="-342900">
@@ -5035,10 +5650,10 @@
                 <a:spcPts val="400"/>
               </a:spcAft>
               <a:buSzPct val="100000"/>
-              <a:buChar char="●"/>
-            </a:pPr>
-            <a:r>
-              <a:rPr lang="en-US" sz="1400" dirty="0">
+              <a:buChar char="•"/>
+            </a:pPr>
+            <a:r>
+              <a:rPr lang="en-US" sz="1100" dirty="0">
                 <a:solidFill>
                   <a:srgbClr val="1A1A1A"/>
                 </a:solidFill>
@@ -5046,128 +5661,20 @@
                 <a:ea typeface="Yu Gothic UI" pitchFamily="34" charset="-122"/>
                 <a:cs typeface="Yu Gothic UI" pitchFamily="34" charset="-120"/>
               </a:rPr>
-              <a:t>根拠に「当代理店の実績」「連携先(税理士等)」「外部調査」を明記できると信頼度UP</a:t>
-            </a:r>
-            <a:endParaRPr lang="en-US" sz="1400" dirty="0"/>
-          </a:p>
-        </p:txBody>
-      </p:sp>
-      <p:sp>
-        <p:nvSpPr>
-          <p:cNvPr id="12" name="Shape 10"/>
-          <p:cNvSpPr/>
-          <p:nvPr/>
-        </p:nvSpPr>
-        <p:spPr>
-          <a:xfrm>
-            <a:off x="4663440" y="1005840"/>
-            <a:ext cx="4160520" cy="3886200"/>
-          </a:xfrm>
-          <a:prstGeom prst="roundRect">
-            <a:avLst>
-              <a:gd name="adj" fmla="val 1882"/>
-            </a:avLst>
-          </a:prstGeom>
-          <a:solidFill>
-            <a:srgbClr val="F4F6F9"/>
-          </a:solidFill>
-          <a:ln w="6350">
-            <a:solidFill>
-              <a:srgbClr val="D7DCE3"/>
-            </a:solidFill>
-            <a:prstDash val="solid"/>
-          </a:ln>
-        </p:spPr>
-      </p:sp>
-      <p:sp>
-        <p:nvSpPr>
-          <p:cNvPr id="13" name="Shape 11"/>
-          <p:cNvSpPr/>
-          <p:nvPr/>
-        </p:nvSpPr>
-        <p:spPr>
-          <a:xfrm>
-            <a:off x="4663440" y="1005840"/>
-            <a:ext cx="91440" cy="3886200"/>
-          </a:xfrm>
-          <a:prstGeom prst="rect">
-            <a:avLst/>
-          </a:prstGeom>
-          <a:solidFill>
-            <a:srgbClr val="0E7C86"/>
-          </a:solidFill>
-          <a:ln/>
-        </p:spPr>
-      </p:sp>
-      <p:sp>
-        <p:nvSpPr>
-          <p:cNvPr id="14" name="Text 12"/>
-          <p:cNvSpPr/>
-          <p:nvPr/>
-        </p:nvSpPr>
-        <p:spPr>
-          <a:xfrm>
-            <a:off x="4864608" y="1097280"/>
-            <a:ext cx="3849624" cy="384048"/>
-          </a:xfrm>
-          <a:prstGeom prst="rect">
-            <a:avLst/>
-          </a:prstGeom>
-          <a:noFill/>
-          <a:ln/>
-        </p:spPr>
-        <p:txBody>
-          <a:bodyPr wrap="square" rtlCol="0" anchor="ctr"/>
-          <a:lstStyle/>
-          <a:p>
-            <a:pPr indent="0" marL="0">
-              <a:buNone/>
-            </a:pPr>
-            <a:r>
-              <a:rPr lang="en-US" sz="1600" b="1" dirty="0">
-                <a:solidFill>
-                  <a:srgbClr val="0E7C86"/>
-                </a:solidFill>
-                <a:latin typeface="Yu Gothic UI Semibold" pitchFamily="34" charset="0"/>
-                <a:ea typeface="Yu Gothic UI Semibold" pitchFamily="34" charset="-122"/>
-                <a:cs typeface="Yu Gothic UI Semibold" pitchFamily="34" charset="-120"/>
-              </a:rPr>
-              <a:t>🎯 AIに作ってもらいたいもの</a:t>
-            </a:r>
-            <a:endParaRPr lang="en-US" sz="1600" dirty="0"/>
-          </a:p>
-        </p:txBody>
-      </p:sp>
-      <p:sp>
-        <p:nvSpPr>
-          <p:cNvPr id="15" name="Text 13"/>
-          <p:cNvSpPr/>
-          <p:nvPr/>
-        </p:nvSpPr>
-        <p:spPr>
-          <a:xfrm>
-            <a:off x="4901184" y="1536192"/>
-            <a:ext cx="3703320" cy="3264408"/>
-          </a:xfrm>
-          <a:prstGeom prst="rect">
-            <a:avLst/>
-          </a:prstGeom>
-          <a:noFill/>
-          <a:ln/>
-        </p:spPr>
-        <p:txBody>
-          <a:bodyPr wrap="square" rtlCol="0" anchor="t"/>
-          <a:lstStyle/>
+              <a:t>更新頻度が違うシートは 分けて持つ(顧客情報と共通前提を分離)</a:t>
+            </a:r>
+            <a:endParaRPr lang="en-US" sz="1100" dirty="0"/>
+          </a:p>
           <a:p>
             <a:pPr marL="342900" indent="-342900">
               <a:spcAft>
                 <a:spcPts val="400"/>
               </a:spcAft>
               <a:buSzPct val="100000"/>
-              <a:buChar char="●"/>
-            </a:pPr>
-            <a:r>
-              <a:rPr lang="en-US" sz="1400" dirty="0">
+              <a:buChar char="•"/>
+            </a:pPr>
+            <a:r>
+              <a:rPr lang="en-US" sz="1100" dirty="0">
                 <a:solidFill>
                   <a:srgbClr val="1A1A1A"/>
                 </a:solidFill>
@@ -5175,20 +5682,128 @@
                 <a:ea typeface="Yu Gothic UI" pitchFamily="34" charset="-122"/>
                 <a:cs typeface="Yu Gothic UI" pitchFamily="34" charset="-120"/>
               </a:rPr>
-              <a:t>3_UI設計 シートで 3つの UI形式を比較 → 1つ選択 → 選択理由を3〜5行で言語化</a:t>
+              <a:t>完成見本の "★" マークが 代理店らしさの入れどころ</a:t>
+            </a:r>
+            <a:endParaRPr lang="en-US" sz="1100" dirty="0"/>
+          </a:p>
+        </p:txBody>
+      </p:sp>
+      <p:sp>
+        <p:nvSpPr>
+          <p:cNvPr id="11" name="Shape 9"/>
+          <p:cNvSpPr/>
+          <p:nvPr/>
+        </p:nvSpPr>
+        <p:spPr>
+          <a:xfrm>
+            <a:off x="4069080" y="1234440"/>
+            <a:ext cx="4663440" cy="3566160"/>
+          </a:xfrm>
+          <a:prstGeom prst="roundRect">
+            <a:avLst>
+              <a:gd name="adj" fmla="val 2051"/>
+            </a:avLst>
+          </a:prstGeom>
+          <a:solidFill>
+            <a:srgbClr val="FFFFFF"/>
+          </a:solidFill>
+          <a:ln w="25400">
+            <a:solidFill>
+              <a:srgbClr val="0E7C86"/>
+            </a:solidFill>
+            <a:prstDash val="solid"/>
+          </a:ln>
+        </p:spPr>
+      </p:sp>
+      <p:sp>
+        <p:nvSpPr>
+          <p:cNvPr id="12" name="Shape 10"/>
+          <p:cNvSpPr/>
+          <p:nvPr/>
+        </p:nvSpPr>
+        <p:spPr>
+          <a:xfrm>
+            <a:off x="4069080" y="1234440"/>
+            <a:ext cx="4663440" cy="502920"/>
+          </a:xfrm>
+          <a:prstGeom prst="rect">
+            <a:avLst/>
+          </a:prstGeom>
+          <a:solidFill>
+            <a:srgbClr val="0E7C86"/>
+          </a:solidFill>
+          <a:ln/>
+        </p:spPr>
+      </p:sp>
+      <p:sp>
+        <p:nvSpPr>
+          <p:cNvPr id="13" name="Text 11"/>
+          <p:cNvSpPr/>
+          <p:nvPr/>
+        </p:nvSpPr>
+        <p:spPr>
+          <a:xfrm>
+            <a:off x="4206240" y="1234440"/>
+            <a:ext cx="4389120" cy="502920"/>
+          </a:xfrm>
+          <a:prstGeom prst="rect">
+            <a:avLst/>
+          </a:prstGeom>
+          <a:noFill/>
+          <a:ln/>
+        </p:spPr>
+        <p:txBody>
+          <a:bodyPr wrap="square" rtlCol="0" anchor="ctr"/>
+          <a:lstStyle/>
+          <a:p>
+            <a:pPr indent="0" marL="0">
+              <a:buNone/>
+            </a:pPr>
+            <a:r>
+              <a:rPr lang="en-US" sz="1400" b="1" dirty="0">
+                <a:solidFill>
+                  <a:srgbClr val="FFFFFF"/>
+                </a:solidFill>
+                <a:latin typeface="Yu Gothic UI Semibold" pitchFamily="34" charset="0"/>
+                <a:ea typeface="Yu Gothic UI Semibold" pitchFamily="34" charset="-122"/>
+                <a:cs typeface="Yu Gothic UI Semibold" pitchFamily="34" charset="-120"/>
+              </a:rPr>
+              <a:t>🎯 今日やること</a:t>
             </a:r>
             <a:endParaRPr lang="en-US" sz="1400" dirty="0"/>
           </a:p>
+        </p:txBody>
+      </p:sp>
+      <p:sp>
+        <p:nvSpPr>
+          <p:cNvPr id="14" name="Text 12"/>
+          <p:cNvSpPr/>
+          <p:nvPr/>
+        </p:nvSpPr>
+        <p:spPr>
+          <a:xfrm>
+            <a:off x="4288536" y="1874520"/>
+            <a:ext cx="4224528" cy="2834640"/>
+          </a:xfrm>
+          <a:prstGeom prst="rect">
+            <a:avLst/>
+          </a:prstGeom>
+          <a:noFill/>
+          <a:ln/>
+        </p:spPr>
+        <p:txBody>
+          <a:bodyPr wrap="square" rtlCol="0" anchor="t"/>
+          <a:lstStyle/>
           <a:p>
             <a:pPr marL="342900" indent="-342900">
               <a:spcAft>
-                <a:spcPts val="400"/>
+                <a:spcPts val="600"/>
               </a:spcAft>
               <a:buSzPct val="100000"/>
-              <a:buChar char="●"/>
-            </a:pPr>
-            <a:r>
-              <a:rPr lang="en-US" sz="1400" dirty="0">
+              <a:buChar char="■"/>
+            </a:pPr>
+            <a:r>
+              <a:rPr lang="en-US" sz="1200" dirty="0">
                 <a:solidFill>
                   <a:srgbClr val="1A1A1A"/>
                 </a:solidFill>
@@ -5196,20 +5811,20 @@
                 <a:ea typeface="Yu Gothic UI" pitchFamily="34" charset="-122"/>
                 <a:cs typeface="Yu Gothic UI" pitchFamily="34" charset="-120"/>
               </a:rPr>
-              <a:t>選んだ UI が 面談中/訪問中/事務所内 のどのシーンで使いやすいかを確認</a:t>
-            </a:r>
-            <a:endParaRPr lang="en-US" sz="1400" dirty="0"/>
+              <a:t>W1設計書テンプレートを開き、まず記入見本を眺めて完成イメージを掴む</a:t>
+            </a:r>
+            <a:endParaRPr lang="en-US" sz="1200" dirty="0"/>
           </a:p>
           <a:p>
             <a:pPr marL="342900" indent="-342900">
               <a:spcAft>
-                <a:spcPts val="400"/>
+                <a:spcPts val="600"/>
               </a:spcAft>
               <a:buSzPct val="100000"/>
-              <a:buChar char="●"/>
-            </a:pPr>
-            <a:r>
-              <a:rPr lang="en-US" sz="1400" dirty="0">
+              <a:buChar char="■"/>
+            </a:pPr>
+            <a:r>
+              <a:rPr lang="en-US" sz="1200" dirty="0">
                 <a:solidFill>
                   <a:srgbClr val="1A1A1A"/>
                 </a:solidFill>
@@ -5217,20 +5832,20 @@
                 <a:ea typeface="Yu Gothic UI" pitchFamily="34" charset="-122"/>
                 <a:cs typeface="Yu Gothic UI" pitchFamily="34" charset="-120"/>
               </a:rPr>
-              <a:t>4_独自アドバイス シートで 発動条件+提案商品タイプ+提案文言+根拠 のパターンを3〜5個書く</a:t>
-            </a:r>
-            <a:endParaRPr lang="en-US" sz="1400" dirty="0"/>
+              <a:t>シート「1_DB設計」で、3〜5枚のシート構成と各列を決める</a:t>
+            </a:r>
+            <a:endParaRPr lang="en-US" sz="1200" dirty="0"/>
           </a:p>
           <a:p>
             <a:pPr marL="342900" indent="-342900">
               <a:spcAft>
-                <a:spcPts val="400"/>
+                <a:spcPts val="600"/>
               </a:spcAft>
               <a:buSzPct val="100000"/>
-              <a:buChar char="●"/>
-            </a:pPr>
-            <a:r>
-              <a:rPr lang="en-US" sz="1400" dirty="0">
+              <a:buChar char="■"/>
+            </a:pPr>
+            <a:r>
+              <a:rPr lang="en-US" sz="1200" dirty="0">
                 <a:solidFill>
                   <a:srgbClr val="1A1A1A"/>
                 </a:solidFill>
@@ -5238,20 +5853,20 @@
                 <a:ea typeface="Yu Gothic UI" pitchFamily="34" charset="-122"/>
                 <a:cs typeface="Yu Gothic UI" pitchFamily="34" charset="-120"/>
               </a:rPr>
-              <a:t>独自アドバイスをどう AI プロンプトに反映するか(スプシ→プロンプト末尾に埋め込む)を確認</a:t>
-            </a:r>
-            <a:endParaRPr lang="en-US" sz="1400" dirty="0"/>
+              <a:t>各シートの "更新頻度" も書く(毎回 / 年1回 / 月1回 など)</a:t>
+            </a:r>
+            <a:endParaRPr lang="en-US" sz="1200" dirty="0"/>
           </a:p>
           <a:p>
             <a:pPr marL="342900" indent="-342900">
               <a:spcAft>
-                <a:spcPts val="400"/>
+                <a:spcPts val="600"/>
               </a:spcAft>
               <a:buSzPct val="100000"/>
-              <a:buChar char="●"/>
-            </a:pPr>
-            <a:r>
-              <a:rPr lang="en-US" sz="1400" dirty="0">
+              <a:buChar char="■"/>
+            </a:pPr>
+            <a:r>
+              <a:rPr lang="en-US" sz="1200" dirty="0">
                 <a:solidFill>
                   <a:srgbClr val="1A1A1A"/>
                 </a:solidFill>
@@ -5259,9 +5874,30 @@
                 <a:ea typeface="Yu Gothic UI" pitchFamily="34" charset="-122"/>
                 <a:cs typeface="Yu Gothic UI" pitchFamily="34" charset="-120"/>
               </a:rPr>
-              <a:t>完成した設計書を "W2 バイブコーディングの指示書" として使えることを確認</a:t>
-            </a:r>
-            <a:endParaRPr lang="en-US" sz="1400" dirty="0"/>
+              <a:t>シート「2_判断基準・数値」で、15〜20項目を分類する</a:t>
+            </a:r>
+            <a:endParaRPr lang="en-US" sz="1200" dirty="0"/>
+          </a:p>
+          <a:p>
+            <a:pPr marL="342900" indent="-342900">
+              <a:spcAft>
+                <a:spcPts val="600"/>
+              </a:spcAft>
+              <a:buSzPct val="100000"/>
+              <a:buChar char="■"/>
+            </a:pPr>
+            <a:r>
+              <a:rPr lang="en-US" sz="1200" dirty="0">
+                <a:solidFill>
+                  <a:srgbClr val="1A1A1A"/>
+                </a:solidFill>
+                <a:latin typeface="Yu Gothic UI" pitchFamily="34" charset="0"/>
+                <a:ea typeface="Yu Gothic UI" pitchFamily="34" charset="-122"/>
+                <a:cs typeface="Yu Gothic UI" pitchFamily="34" charset="-120"/>
+              </a:rPr>
+              <a:t>独自の数値には「なぜその値なのか」を必ず書く</a:t>
+            </a:r>
+            <a:endParaRPr lang="en-US" sz="1200" dirty="0"/>
           </a:p>
         </p:txBody>
       </p:sp>
@@ -5325,8 +5961,8 @@
         </p:nvSpPr>
         <p:spPr>
           <a:xfrm>
-            <a:off x="411480" y="201168"/>
-            <a:ext cx="8412480" cy="594360"/>
+            <a:off x="411480" y="182880"/>
+            <a:ext cx="8412480" cy="548640"/>
           </a:xfrm>
           <a:prstGeom prst="rect">
             <a:avLst/>
@@ -5342,7 +5978,7 @@
               <a:buNone/>
             </a:pPr>
             <a:r>
-              <a:rPr lang="en-US" sz="2600" b="1" dirty="0">
+              <a:rPr lang="en-US" sz="2400" b="1" dirty="0">
                 <a:solidFill>
                   <a:srgbClr val="1F3A5F"/>
                 </a:solidFill>
@@ -5350,9 +5986,9 @@
                 <a:ea typeface="Yu Gothic UI Semibold" pitchFamily="34" charset="-122"/>
                 <a:cs typeface="Yu Gothic UI Semibold" pitchFamily="34" charset="-120"/>
               </a:rPr>
-              <a:t>演習2 UI設計と 独自アドバイスの言語化 — 観点別チェック</a:t>
-            </a:r>
-            <a:endParaRPr lang="en-US" sz="2600" dirty="0"/>
+              <a:t>演習1 の 完了チェック</a:t>
+            </a:r>
+            <a:endParaRPr lang="en-US" sz="2400" dirty="0"/>
           </a:p>
         </p:txBody>
       </p:sp>
@@ -5364,7 +6000,7 @@
         </p:nvSpPr>
         <p:spPr>
           <a:xfrm>
-            <a:off x="411480" y="804672"/>
+            <a:off x="411480" y="749808"/>
             <a:ext cx="8412480" cy="365760"/>
           </a:xfrm>
           <a:prstGeom prst="rect">
@@ -5381,7 +6017,7 @@
               <a:buNone/>
             </a:pPr>
             <a:r>
-              <a:rPr lang="en-US" sz="1500" i="1" dirty="0">
+              <a:rPr lang="en-US" sz="1300" i="1" dirty="0">
                 <a:solidFill>
                   <a:srgbClr val="555555"/>
                 </a:solidFill>
@@ -5389,9 +6025,9 @@
                 <a:ea typeface="Yu Gothic UI" pitchFamily="34" charset="-122"/>
                 <a:cs typeface="Yu Gothic UI" pitchFamily="34" charset="-120"/>
               </a:rPr>
-              <a:t>プロンプトをさらにブラッシュアップ — 3観点でセルフチェック</a:t>
-            </a:r>
-            <a:endParaRPr lang="en-US" sz="1500" dirty="0"/>
+              <a:t>ここができていれば、次に進んでOKです</a:t>
+            </a:r>
+            <a:endParaRPr lang="en-US" sz="1300" dirty="0"/>
           </a:p>
         </p:txBody>
       </p:sp>
@@ -5403,18 +6039,18 @@
         </p:nvSpPr>
         <p:spPr>
           <a:xfrm>
-            <a:off x="411480" y="1325880"/>
-            <a:ext cx="2651760" cy="3474720"/>
+            <a:off x="411480" y="1280160"/>
+            <a:ext cx="4046220" cy="3017520"/>
           </a:xfrm>
           <a:prstGeom prst="roundRect">
             <a:avLst>
-              <a:gd name="adj" fmla="val 3448"/>
+              <a:gd name="adj" fmla="val 3030"/>
             </a:avLst>
           </a:prstGeom>
           <a:solidFill>
-            <a:srgbClr val="F4F6F9"/>
-          </a:solidFill>
-          <a:ln w="15240">
+            <a:srgbClr val="E6F4EA"/>
+          </a:solidFill>
+          <a:ln w="25400">
             <a:solidFill>
               <a:srgbClr val="0E7C86"/>
             </a:solidFill>
@@ -5430,8 +6066,8 @@
         </p:nvSpPr>
         <p:spPr>
           <a:xfrm>
-            <a:off x="411480" y="1325880"/>
-            <a:ext cx="2651760" cy="457200"/>
+            <a:off x="411480" y="1280160"/>
+            <a:ext cx="4046220" cy="502920"/>
           </a:xfrm>
           <a:prstGeom prst="rect">
             <a:avLst/>
@@ -5450,8 +6086,8 @@
         </p:nvSpPr>
         <p:spPr>
           <a:xfrm>
-            <a:off x="539496" y="1380744"/>
-            <a:ext cx="2395728" cy="365760"/>
+            <a:off x="411480" y="1280160"/>
+            <a:ext cx="4046220" cy="502920"/>
           </a:xfrm>
           <a:prstGeom prst="rect">
             <a:avLst/>
@@ -5463,11 +6099,11 @@
           <a:bodyPr wrap="square" rtlCol="0" anchor="ctr"/>
           <a:lstStyle/>
           <a:p>
-            <a:pPr indent="0" marL="0">
-              <a:buNone/>
-            </a:pPr>
-            <a:r>
-              <a:rPr lang="en-US" sz="1500" b="1" dirty="0">
+            <a:pPr algn="ctr" indent="0" marL="0">
+              <a:buNone/>
+            </a:pPr>
+            <a:r>
+              <a:rPr lang="en-US" sz="1400" b="1" dirty="0">
                 <a:solidFill>
                   <a:srgbClr val="FFFFFF"/>
                 </a:solidFill>
@@ -5475,9 +6111,9 @@
                 <a:ea typeface="Yu Gothic UI Semibold" pitchFamily="34" charset="-122"/>
                 <a:cs typeface="Yu Gothic UI Semibold" pitchFamily="34" charset="-120"/>
               </a:rPr>
-              <a:t>観点 A</a:t>
-            </a:r>
-            <a:endParaRPr lang="en-US" sz="1500" dirty="0"/>
+              <a:t>✅ できていればOK</a:t>
+            </a:r>
+            <a:endParaRPr lang="en-US" sz="1400" dirty="0"/>
           </a:p>
         </p:txBody>
       </p:sp>
@@ -5489,8 +6125,8 @@
         </p:nvSpPr>
         <p:spPr>
           <a:xfrm>
-            <a:off x="594360" y="1892808"/>
-            <a:ext cx="2359152" cy="548640"/>
+            <a:off x="594360" y="1938528"/>
+            <a:ext cx="3680460" cy="2240280"/>
           </a:xfrm>
           <a:prstGeom prst="rect">
             <a:avLst/>
@@ -5502,34 +6138,187 @@
           <a:bodyPr wrap="square" rtlCol="0" anchor="t"/>
           <a:lstStyle/>
           <a:p>
-            <a:pPr indent="0" marL="0">
-              <a:buNone/>
-            </a:pPr>
-            <a:r>
-              <a:rPr lang="en-US" sz="1500" b="1" dirty="0">
-                <a:solidFill>
-                  <a:srgbClr val="1F3A5F"/>
+            <a:pPr marL="342900" indent="-342900">
+              <a:spcAft>
+                <a:spcPts val="800"/>
+              </a:spcAft>
+              <a:buSzPct val="100000"/>
+              <a:buChar char="•"/>
+            </a:pPr>
+            <a:r>
+              <a:rPr lang="en-US" sz="1300" dirty="0">
+                <a:solidFill>
+                  <a:srgbClr val="1A1A1A"/>
+                </a:solidFill>
+                <a:latin typeface="Yu Gothic UI" pitchFamily="34" charset="0"/>
+                <a:ea typeface="Yu Gothic UI" pitchFamily="34" charset="-122"/>
+                <a:cs typeface="Yu Gothic UI" pitchFamily="34" charset="-120"/>
+              </a:rPr>
+              <a:t>シートが 3〜5枚 決まっている</a:t>
+            </a:r>
+            <a:endParaRPr lang="en-US" sz="1300" dirty="0"/>
+          </a:p>
+          <a:p>
+            <a:pPr marL="342900" indent="-342900">
+              <a:spcAft>
+                <a:spcPts val="800"/>
+              </a:spcAft>
+              <a:buSzPct val="100000"/>
+              <a:buChar char="•"/>
+            </a:pPr>
+            <a:r>
+              <a:rPr lang="en-US" sz="1300" dirty="0">
+                <a:solidFill>
+                  <a:srgbClr val="1A1A1A"/>
+                </a:solidFill>
+                <a:latin typeface="Yu Gothic UI" pitchFamily="34" charset="0"/>
+                <a:ea typeface="Yu Gothic UI" pitchFamily="34" charset="-122"/>
+                <a:cs typeface="Yu Gothic UI" pitchFamily="34" charset="-120"/>
+              </a:rPr>
+              <a:t>各シートに 何を入れるか + 更新頻度 が書けている</a:t>
+            </a:r>
+            <a:endParaRPr lang="en-US" sz="1300" dirty="0"/>
+          </a:p>
+          <a:p>
+            <a:pPr marL="342900" indent="-342900">
+              <a:spcAft>
+                <a:spcPts val="800"/>
+              </a:spcAft>
+              <a:buSzPct val="100000"/>
+              <a:buChar char="•"/>
+            </a:pPr>
+            <a:r>
+              <a:rPr lang="en-US" sz="1300" dirty="0">
+                <a:solidFill>
+                  <a:srgbClr val="1A1A1A"/>
+                </a:solidFill>
+                <a:latin typeface="Yu Gothic UI" pitchFamily="34" charset="0"/>
+                <a:ea typeface="Yu Gothic UI" pitchFamily="34" charset="-122"/>
+                <a:cs typeface="Yu Gothic UI" pitchFamily="34" charset="-120"/>
+              </a:rPr>
+              <a:t>数値の項目が「公式 / 独自 / 計算」で分類できている</a:t>
+            </a:r>
+            <a:endParaRPr lang="en-US" sz="1300" dirty="0"/>
+          </a:p>
+          <a:p>
+            <a:pPr marL="342900" indent="-342900">
+              <a:spcAft>
+                <a:spcPts val="800"/>
+              </a:spcAft>
+              <a:buSzPct val="100000"/>
+              <a:buChar char="•"/>
+            </a:pPr>
+            <a:r>
+              <a:rPr lang="en-US" sz="1300" dirty="0">
+                <a:solidFill>
+                  <a:srgbClr val="1A1A1A"/>
+                </a:solidFill>
+                <a:latin typeface="Yu Gothic UI" pitchFamily="34" charset="0"/>
+                <a:ea typeface="Yu Gothic UI" pitchFamily="34" charset="-122"/>
+                <a:cs typeface="Yu Gothic UI" pitchFamily="34" charset="-120"/>
+              </a:rPr>
+              <a:t>独自の数値には「なぜその値か」が全て書けている</a:t>
+            </a:r>
+            <a:endParaRPr lang="en-US" sz="1300" dirty="0"/>
+          </a:p>
+        </p:txBody>
+      </p:sp>
+      <p:sp>
+        <p:nvSpPr>
+          <p:cNvPr id="9" name="Shape 7"/>
+          <p:cNvSpPr/>
+          <p:nvPr/>
+        </p:nvSpPr>
+        <p:spPr>
+          <a:xfrm>
+            <a:off x="4686300" y="1280160"/>
+            <a:ext cx="4046220" cy="3017520"/>
+          </a:xfrm>
+          <a:prstGeom prst="roundRect">
+            <a:avLst>
+              <a:gd name="adj" fmla="val 3030"/>
+            </a:avLst>
+          </a:prstGeom>
+          <a:solidFill>
+            <a:srgbClr val="FDECEA"/>
+          </a:solidFill>
+          <a:ln w="25400">
+            <a:solidFill>
+              <a:srgbClr val="C76B7A"/>
+            </a:solidFill>
+            <a:prstDash val="solid"/>
+          </a:ln>
+        </p:spPr>
+      </p:sp>
+      <p:sp>
+        <p:nvSpPr>
+          <p:cNvPr id="10" name="Shape 8"/>
+          <p:cNvSpPr/>
+          <p:nvPr/>
+        </p:nvSpPr>
+        <p:spPr>
+          <a:xfrm>
+            <a:off x="4686300" y="1280160"/>
+            <a:ext cx="4046220" cy="502920"/>
+          </a:xfrm>
+          <a:prstGeom prst="rect">
+            <a:avLst/>
+          </a:prstGeom>
+          <a:solidFill>
+            <a:srgbClr val="C76B7A"/>
+          </a:solidFill>
+          <a:ln/>
+        </p:spPr>
+      </p:sp>
+      <p:sp>
+        <p:nvSpPr>
+          <p:cNvPr id="11" name="Text 9"/>
+          <p:cNvSpPr/>
+          <p:nvPr/>
+        </p:nvSpPr>
+        <p:spPr>
+          <a:xfrm>
+            <a:off x="4686300" y="1280160"/>
+            <a:ext cx="4046220" cy="502920"/>
+          </a:xfrm>
+          <a:prstGeom prst="rect">
+            <a:avLst/>
+          </a:prstGeom>
+          <a:noFill/>
+          <a:ln/>
+        </p:spPr>
+        <p:txBody>
+          <a:bodyPr wrap="square" rtlCol="0" anchor="ctr"/>
+          <a:lstStyle/>
+          <a:p>
+            <a:pPr algn="ctr" indent="0" marL="0">
+              <a:buNone/>
+            </a:pPr>
+            <a:r>
+              <a:rPr lang="en-US" sz="1400" b="1" dirty="0">
+                <a:solidFill>
+                  <a:srgbClr val="FFFFFF"/>
                 </a:solidFill>
                 <a:latin typeface="Yu Gothic UI Semibold" pitchFamily="34" charset="0"/>
                 <a:ea typeface="Yu Gothic UI Semibold" pitchFamily="34" charset="-122"/>
                 <a:cs typeface="Yu Gothic UI Semibold" pitchFamily="34" charset="-120"/>
               </a:rPr>
-              <a:t>A. UI選択の理由の明確さ</a:t>
-            </a:r>
-            <a:endParaRPr lang="en-US" sz="1500" dirty="0"/>
-          </a:p>
-        </p:txBody>
-      </p:sp>
-      <p:sp>
-        <p:nvSpPr>
-          <p:cNvPr id="9" name="Text 7"/>
-          <p:cNvSpPr/>
-          <p:nvPr/>
-        </p:nvSpPr>
-        <p:spPr>
-          <a:xfrm>
-            <a:off x="594360" y="2514600"/>
-            <a:ext cx="2359152" cy="1051560"/>
+              <a:t>⚠️ 漏れがあると</a:t>
+            </a:r>
+            <a:endParaRPr lang="en-US" sz="1400" dirty="0"/>
+          </a:p>
+        </p:txBody>
+      </p:sp>
+      <p:sp>
+        <p:nvSpPr>
+          <p:cNvPr id="12" name="Text 10"/>
+          <p:cNvSpPr/>
+          <p:nvPr/>
+        </p:nvSpPr>
+        <p:spPr>
+          <a:xfrm>
+            <a:off x="4869180" y="1938528"/>
+            <a:ext cx="3680460" cy="2240280"/>
           </a:xfrm>
           <a:prstGeom prst="rect">
             <a:avLst/>
@@ -5541,22 +6330,33 @@
           <a:bodyPr wrap="square" rtlCol="0" anchor="t"/>
           <a:lstStyle/>
           <a:p>
-            <a:pPr indent="0" marL="0">
-              <a:buNone/>
-            </a:pPr>
-            <a:r>
-              <a:rPr lang="en-US" sz="1400" b="1" dirty="0">
-                <a:solidFill>
-                  <a:srgbClr val="0E7C86"/>
+            <a:pPr marL="342900" indent="-342900">
+              <a:spcAft>
+                <a:spcPts val="800"/>
+              </a:spcAft>
+              <a:buSzPct val="100000"/>
+              <a:buChar char="•"/>
+            </a:pPr>
+            <a:r>
+              <a:rPr lang="en-US" sz="1300" dirty="0">
+                <a:solidFill>
+                  <a:srgbClr val="1A1A1A"/>
                 </a:solidFill>
                 <a:latin typeface="Yu Gothic UI" pitchFamily="34" charset="0"/>
                 <a:ea typeface="Yu Gothic UI" pitchFamily="34" charset="-122"/>
                 <a:cs typeface="Yu Gothic UI" pitchFamily="34" charset="-120"/>
               </a:rPr>
-              <a:t>✓  </a:t>
-            </a:r>
-            <a:pPr indent="0" marL="0">
-              <a:buNone/>
+              <a:t>後で「あの項目忘れてた」→ 作り直し</a:t>
+            </a:r>
+            <a:endParaRPr lang="en-US" sz="1300" dirty="0"/>
+          </a:p>
+          <a:p>
+            <a:pPr marL="342900" indent="-342900">
+              <a:spcAft>
+                <a:spcPts val="800"/>
+              </a:spcAft>
+              <a:buSzPct val="100000"/>
+              <a:buChar char="•"/>
             </a:pPr>
             <a:r>
               <a:rPr lang="en-US" sz="1300" dirty="0">
@@ -5567,49 +6367,38 @@
                 <a:ea typeface="Yu Gothic UI" pitchFamily="34" charset="-122"/>
                 <a:cs typeface="Yu Gothic UI" pitchFamily="34" charset="-120"/>
               </a:rPr>
-              <a:t>選んだ UI と 選んだ理由が 3〜5行で言語化できているか</a:t>
+              <a:t>数値の "なぜ" が空欄 → 半年後の自分が読んで分からない</a:t>
             </a:r>
             <a:endParaRPr lang="en-US" sz="1300" dirty="0"/>
           </a:p>
-        </p:txBody>
-      </p:sp>
-      <p:sp>
-        <p:nvSpPr>
-          <p:cNvPr id="10" name="Text 8"/>
-          <p:cNvSpPr/>
-          <p:nvPr/>
-        </p:nvSpPr>
-        <p:spPr>
-          <a:xfrm>
-            <a:off x="594360" y="3611880"/>
-            <a:ext cx="2359152" cy="1097280"/>
-          </a:xfrm>
-          <a:prstGeom prst="rect">
-            <a:avLst/>
-          </a:prstGeom>
-          <a:noFill/>
-          <a:ln/>
-        </p:spPr>
-        <p:txBody>
-          <a:bodyPr wrap="square" rtlCol="0" anchor="t"/>
-          <a:lstStyle/>
-          <a:p>
-            <a:pPr indent="0" marL="0">
-              <a:buNone/>
-            </a:pPr>
-            <a:r>
-              <a:rPr lang="en-US" sz="1400" b="1" dirty="0">
-                <a:solidFill>
-                  <a:srgbClr val="E8A33D"/>
+          <a:p>
+            <a:pPr marL="342900" indent="-342900">
+              <a:spcAft>
+                <a:spcPts val="800"/>
+              </a:spcAft>
+              <a:buSzPct val="100000"/>
+              <a:buChar char="•"/>
+            </a:pPr>
+            <a:r>
+              <a:rPr lang="en-US" sz="1300" dirty="0">
+                <a:solidFill>
+                  <a:srgbClr val="1A1A1A"/>
                 </a:solidFill>
                 <a:latin typeface="Yu Gothic UI" pitchFamily="34" charset="0"/>
                 <a:ea typeface="Yu Gothic UI" pitchFamily="34" charset="-122"/>
                 <a:cs typeface="Yu Gothic UI" pitchFamily="34" charset="-120"/>
               </a:rPr>
-              <a:t>💡  </a:t>
-            </a:r>
-            <a:pPr indent="0" marL="0">
-              <a:buNone/>
+              <a:t>顧客情報と共通前提が同じシート → 更新のたび全書き換え</a:t>
+            </a:r>
+            <a:endParaRPr lang="en-US" sz="1300" dirty="0"/>
+          </a:p>
+          <a:p>
+            <a:pPr marL="342900" indent="-342900">
+              <a:spcAft>
+                <a:spcPts val="800"/>
+              </a:spcAft>
+              <a:buSzPct val="100000"/>
+              <a:buChar char="•"/>
             </a:pPr>
             <a:r>
               <a:rPr lang="en-US" sz="1300" dirty="0">
@@ -5620,469 +6409,7 @@
                 <a:ea typeface="Yu Gothic UI" pitchFamily="34" charset="-122"/>
                 <a:cs typeface="Yu Gothic UI" pitchFamily="34" charset="-120"/>
               </a:rPr>
-              <a:t>「なんとなくサイドバー」ではなく "面談シーン" 等の根拠があるか</a:t>
-            </a:r>
-            <a:endParaRPr lang="en-US" sz="1300" dirty="0"/>
-          </a:p>
-        </p:txBody>
-      </p:sp>
-      <p:sp>
-        <p:nvSpPr>
-          <p:cNvPr id="11" name="Shape 9"/>
-          <p:cNvSpPr/>
-          <p:nvPr/>
-        </p:nvSpPr>
-        <p:spPr>
-          <a:xfrm>
-            <a:off x="3246120" y="1325880"/>
-            <a:ext cx="2651760" cy="3474720"/>
-          </a:xfrm>
-          <a:prstGeom prst="roundRect">
-            <a:avLst>
-              <a:gd name="adj" fmla="val 3448"/>
-            </a:avLst>
-          </a:prstGeom>
-          <a:solidFill>
-            <a:srgbClr val="F4F6F9"/>
-          </a:solidFill>
-          <a:ln w="15240">
-            <a:solidFill>
-              <a:srgbClr val="E8A33D"/>
-            </a:solidFill>
-            <a:prstDash val="solid"/>
-          </a:ln>
-        </p:spPr>
-      </p:sp>
-      <p:sp>
-        <p:nvSpPr>
-          <p:cNvPr id="12" name="Shape 10"/>
-          <p:cNvSpPr/>
-          <p:nvPr/>
-        </p:nvSpPr>
-        <p:spPr>
-          <a:xfrm>
-            <a:off x="3246120" y="1325880"/>
-            <a:ext cx="2651760" cy="457200"/>
-          </a:xfrm>
-          <a:prstGeom prst="rect">
-            <a:avLst/>
-          </a:prstGeom>
-          <a:solidFill>
-            <a:srgbClr val="E8A33D"/>
-          </a:solidFill>
-          <a:ln/>
-        </p:spPr>
-      </p:sp>
-      <p:sp>
-        <p:nvSpPr>
-          <p:cNvPr id="13" name="Text 11"/>
-          <p:cNvSpPr/>
-          <p:nvPr/>
-        </p:nvSpPr>
-        <p:spPr>
-          <a:xfrm>
-            <a:off x="3374136" y="1380744"/>
-            <a:ext cx="2395728" cy="365760"/>
-          </a:xfrm>
-          <a:prstGeom prst="rect">
-            <a:avLst/>
-          </a:prstGeom>
-          <a:noFill/>
-          <a:ln/>
-        </p:spPr>
-        <p:txBody>
-          <a:bodyPr wrap="square" rtlCol="0" anchor="ctr"/>
-          <a:lstStyle/>
-          <a:p>
-            <a:pPr indent="0" marL="0">
-              <a:buNone/>
-            </a:pPr>
-            <a:r>
-              <a:rPr lang="en-US" sz="1500" b="1" dirty="0">
-                <a:solidFill>
-                  <a:srgbClr val="FFFFFF"/>
-                </a:solidFill>
-                <a:latin typeface="Yu Gothic UI Semibold" pitchFamily="34" charset="0"/>
-                <a:ea typeface="Yu Gothic UI Semibold" pitchFamily="34" charset="-122"/>
-                <a:cs typeface="Yu Gothic UI Semibold" pitchFamily="34" charset="-120"/>
-              </a:rPr>
-              <a:t>観点 B</a:t>
-            </a:r>
-            <a:endParaRPr lang="en-US" sz="1500" dirty="0"/>
-          </a:p>
-        </p:txBody>
-      </p:sp>
-      <p:sp>
-        <p:nvSpPr>
-          <p:cNvPr id="14" name="Text 12"/>
-          <p:cNvSpPr/>
-          <p:nvPr/>
-        </p:nvSpPr>
-        <p:spPr>
-          <a:xfrm>
-            <a:off x="3429000" y="1892808"/>
-            <a:ext cx="2359152" cy="548640"/>
-          </a:xfrm>
-          <a:prstGeom prst="rect">
-            <a:avLst/>
-          </a:prstGeom>
-          <a:noFill/>
-          <a:ln/>
-        </p:spPr>
-        <p:txBody>
-          <a:bodyPr wrap="square" rtlCol="0" anchor="t"/>
-          <a:lstStyle/>
-          <a:p>
-            <a:pPr indent="0" marL="0">
-              <a:buNone/>
-            </a:pPr>
-            <a:r>
-              <a:rPr lang="en-US" sz="1500" b="1" dirty="0">
-                <a:solidFill>
-                  <a:srgbClr val="1F3A5F"/>
-                </a:solidFill>
-                <a:latin typeface="Yu Gothic UI Semibold" pitchFamily="34" charset="0"/>
-                <a:ea typeface="Yu Gothic UI Semibold" pitchFamily="34" charset="-122"/>
-                <a:cs typeface="Yu Gothic UI Semibold" pitchFamily="34" charset="-120"/>
-              </a:rPr>
-              <a:t>B. 独自アドバイスの具体性</a:t>
-            </a:r>
-            <a:endParaRPr lang="en-US" sz="1500" dirty="0"/>
-          </a:p>
-        </p:txBody>
-      </p:sp>
-      <p:sp>
-        <p:nvSpPr>
-          <p:cNvPr id="15" name="Text 13"/>
-          <p:cNvSpPr/>
-          <p:nvPr/>
-        </p:nvSpPr>
-        <p:spPr>
-          <a:xfrm>
-            <a:off x="3429000" y="2514600"/>
-            <a:ext cx="2359152" cy="1051560"/>
-          </a:xfrm>
-          <a:prstGeom prst="rect">
-            <a:avLst/>
-          </a:prstGeom>
-          <a:noFill/>
-          <a:ln/>
-        </p:spPr>
-        <p:txBody>
-          <a:bodyPr wrap="square" rtlCol="0" anchor="t"/>
-          <a:lstStyle/>
-          <a:p>
-            <a:pPr indent="0" marL="0">
-              <a:buNone/>
-            </a:pPr>
-            <a:r>
-              <a:rPr lang="en-US" sz="1400" b="1" dirty="0">
-                <a:solidFill>
-                  <a:srgbClr val="0E7C86"/>
-                </a:solidFill>
-                <a:latin typeface="Yu Gothic UI" pitchFamily="34" charset="0"/>
-                <a:ea typeface="Yu Gothic UI" pitchFamily="34" charset="-122"/>
-                <a:cs typeface="Yu Gothic UI" pitchFamily="34" charset="-120"/>
-              </a:rPr>
-              <a:t>✓  </a:t>
-            </a:r>
-            <a:pPr indent="0" marL="0">
-              <a:buNone/>
-            </a:pPr>
-            <a:r>
-              <a:rPr lang="en-US" sz="1300" dirty="0">
-                <a:solidFill>
-                  <a:srgbClr val="1A1A1A"/>
-                </a:solidFill>
-                <a:latin typeface="Yu Gothic UI" pitchFamily="34" charset="0"/>
-                <a:ea typeface="Yu Gothic UI" pitchFamily="34" charset="-122"/>
-                <a:cs typeface="Yu Gothic UI" pitchFamily="34" charset="-120"/>
-              </a:rPr>
-              <a:t>発動条件が "40代夫婦" のように具体的で、AI が判定できる形か</a:t>
-            </a:r>
-            <a:endParaRPr lang="en-US" sz="1300" dirty="0"/>
-          </a:p>
-        </p:txBody>
-      </p:sp>
-      <p:sp>
-        <p:nvSpPr>
-          <p:cNvPr id="16" name="Text 14"/>
-          <p:cNvSpPr/>
-          <p:nvPr/>
-        </p:nvSpPr>
-        <p:spPr>
-          <a:xfrm>
-            <a:off x="3429000" y="3611880"/>
-            <a:ext cx="2359152" cy="1097280"/>
-          </a:xfrm>
-          <a:prstGeom prst="rect">
-            <a:avLst/>
-          </a:prstGeom>
-          <a:noFill/>
-          <a:ln/>
-        </p:spPr>
-        <p:txBody>
-          <a:bodyPr wrap="square" rtlCol="0" anchor="t"/>
-          <a:lstStyle/>
-          <a:p>
-            <a:pPr indent="0" marL="0">
-              <a:buNone/>
-            </a:pPr>
-            <a:r>
-              <a:rPr lang="en-US" sz="1400" b="1" dirty="0">
-                <a:solidFill>
-                  <a:srgbClr val="E8A33D"/>
-                </a:solidFill>
-                <a:latin typeface="Yu Gothic UI" pitchFamily="34" charset="0"/>
-                <a:ea typeface="Yu Gothic UI" pitchFamily="34" charset="-122"/>
-                <a:cs typeface="Yu Gothic UI" pitchFamily="34" charset="-120"/>
-              </a:rPr>
-              <a:t>💡  </a:t>
-            </a:r>
-            <a:pPr indent="0" marL="0">
-              <a:buNone/>
-            </a:pPr>
-            <a:r>
-              <a:rPr lang="en-US" sz="1300" dirty="0">
-                <a:solidFill>
-                  <a:srgbClr val="1A1A1A"/>
-                </a:solidFill>
-                <a:latin typeface="Yu Gothic UI" pitchFamily="34" charset="0"/>
-                <a:ea typeface="Yu Gothic UI" pitchFamily="34" charset="-122"/>
-                <a:cs typeface="Yu Gothic UI" pitchFamily="34" charset="-120"/>
-              </a:rPr>
-              <a:t>提案文言テンプレが 顧客に読み上げできる自然な日本語か</a:t>
-            </a:r>
-            <a:endParaRPr lang="en-US" sz="1300" dirty="0"/>
-          </a:p>
-        </p:txBody>
-      </p:sp>
-      <p:sp>
-        <p:nvSpPr>
-          <p:cNvPr id="17" name="Shape 15"/>
-          <p:cNvSpPr/>
-          <p:nvPr/>
-        </p:nvSpPr>
-        <p:spPr>
-          <a:xfrm>
-            <a:off x="6080760" y="1325880"/>
-            <a:ext cx="2651760" cy="3474720"/>
-          </a:xfrm>
-          <a:prstGeom prst="roundRect">
-            <a:avLst>
-              <a:gd name="adj" fmla="val 3448"/>
-            </a:avLst>
-          </a:prstGeom>
-          <a:solidFill>
-            <a:srgbClr val="F4F6F9"/>
-          </a:solidFill>
-          <a:ln w="15240">
-            <a:solidFill>
-              <a:srgbClr val="7C5F8A"/>
-            </a:solidFill>
-            <a:prstDash val="solid"/>
-          </a:ln>
-        </p:spPr>
-      </p:sp>
-      <p:sp>
-        <p:nvSpPr>
-          <p:cNvPr id="18" name="Shape 16"/>
-          <p:cNvSpPr/>
-          <p:nvPr/>
-        </p:nvSpPr>
-        <p:spPr>
-          <a:xfrm>
-            <a:off x="6080760" y="1325880"/>
-            <a:ext cx="2651760" cy="457200"/>
-          </a:xfrm>
-          <a:prstGeom prst="rect">
-            <a:avLst/>
-          </a:prstGeom>
-          <a:solidFill>
-            <a:srgbClr val="7C5F8A"/>
-          </a:solidFill>
-          <a:ln/>
-        </p:spPr>
-      </p:sp>
-      <p:sp>
-        <p:nvSpPr>
-          <p:cNvPr id="19" name="Text 17"/>
-          <p:cNvSpPr/>
-          <p:nvPr/>
-        </p:nvSpPr>
-        <p:spPr>
-          <a:xfrm>
-            <a:off x="6208776" y="1380744"/>
-            <a:ext cx="2395728" cy="365760"/>
-          </a:xfrm>
-          <a:prstGeom prst="rect">
-            <a:avLst/>
-          </a:prstGeom>
-          <a:noFill/>
-          <a:ln/>
-        </p:spPr>
-        <p:txBody>
-          <a:bodyPr wrap="square" rtlCol="0" anchor="ctr"/>
-          <a:lstStyle/>
-          <a:p>
-            <a:pPr indent="0" marL="0">
-              <a:buNone/>
-            </a:pPr>
-            <a:r>
-              <a:rPr lang="en-US" sz="1500" b="1" dirty="0">
-                <a:solidFill>
-                  <a:srgbClr val="FFFFFF"/>
-                </a:solidFill>
-                <a:latin typeface="Yu Gothic UI Semibold" pitchFamily="34" charset="0"/>
-                <a:ea typeface="Yu Gothic UI Semibold" pitchFamily="34" charset="-122"/>
-                <a:cs typeface="Yu Gothic UI Semibold" pitchFamily="34" charset="-120"/>
-              </a:rPr>
-              <a:t>観点 C</a:t>
-            </a:r>
-            <a:endParaRPr lang="en-US" sz="1500" dirty="0"/>
-          </a:p>
-        </p:txBody>
-      </p:sp>
-      <p:sp>
-        <p:nvSpPr>
-          <p:cNvPr id="20" name="Text 18"/>
-          <p:cNvSpPr/>
-          <p:nvPr/>
-        </p:nvSpPr>
-        <p:spPr>
-          <a:xfrm>
-            <a:off x="6263640" y="1892808"/>
-            <a:ext cx="2359152" cy="548640"/>
-          </a:xfrm>
-          <a:prstGeom prst="rect">
-            <a:avLst/>
-          </a:prstGeom>
-          <a:noFill/>
-          <a:ln/>
-        </p:spPr>
-        <p:txBody>
-          <a:bodyPr wrap="square" rtlCol="0" anchor="t"/>
-          <a:lstStyle/>
-          <a:p>
-            <a:pPr indent="0" marL="0">
-              <a:buNone/>
-            </a:pPr>
-            <a:r>
-              <a:rPr lang="en-US" sz="1500" b="1" dirty="0">
-                <a:solidFill>
-                  <a:srgbClr val="1F3A5F"/>
-                </a:solidFill>
-                <a:latin typeface="Yu Gothic UI Semibold" pitchFamily="34" charset="0"/>
-                <a:ea typeface="Yu Gothic UI Semibold" pitchFamily="34" charset="-122"/>
-                <a:cs typeface="Yu Gothic UI Semibold" pitchFamily="34" charset="-120"/>
-              </a:rPr>
-              <a:t>C. プロンプト反映方針</a:t>
-            </a:r>
-            <a:endParaRPr lang="en-US" sz="1500" dirty="0"/>
-          </a:p>
-        </p:txBody>
-      </p:sp>
-      <p:sp>
-        <p:nvSpPr>
-          <p:cNvPr id="21" name="Text 19"/>
-          <p:cNvSpPr/>
-          <p:nvPr/>
-        </p:nvSpPr>
-        <p:spPr>
-          <a:xfrm>
-            <a:off x="6263640" y="2514600"/>
-            <a:ext cx="2359152" cy="1051560"/>
-          </a:xfrm>
-          <a:prstGeom prst="rect">
-            <a:avLst/>
-          </a:prstGeom>
-          <a:noFill/>
-          <a:ln/>
-        </p:spPr>
-        <p:txBody>
-          <a:bodyPr wrap="square" rtlCol="0" anchor="t"/>
-          <a:lstStyle/>
-          <a:p>
-            <a:pPr indent="0" marL="0">
-              <a:buNone/>
-            </a:pPr>
-            <a:r>
-              <a:rPr lang="en-US" sz="1400" b="1" dirty="0">
-                <a:solidFill>
-                  <a:srgbClr val="0E7C86"/>
-                </a:solidFill>
-                <a:latin typeface="Yu Gothic UI" pitchFamily="34" charset="0"/>
-                <a:ea typeface="Yu Gothic UI" pitchFamily="34" charset="-122"/>
-                <a:cs typeface="Yu Gothic UI" pitchFamily="34" charset="-120"/>
-              </a:rPr>
-              <a:t>✓  </a:t>
-            </a:r>
-            <a:pPr indent="0" marL="0">
-              <a:buNone/>
-            </a:pPr>
-            <a:r>
-              <a:rPr lang="en-US" sz="1300" dirty="0">
-                <a:solidFill>
-                  <a:srgbClr val="1A1A1A"/>
-                </a:solidFill>
-                <a:latin typeface="Yu Gothic UI" pitchFamily="34" charset="0"/>
-                <a:ea typeface="Yu Gothic UI" pitchFamily="34" charset="-122"/>
-                <a:cs typeface="Yu Gothic UI" pitchFamily="34" charset="-120"/>
-              </a:rPr>
-              <a:t>このマスタを どうAIに投げ込むかの方針が決まっているか</a:t>
-            </a:r>
-            <a:endParaRPr lang="en-US" sz="1300" dirty="0"/>
-          </a:p>
-        </p:txBody>
-      </p:sp>
-      <p:sp>
-        <p:nvSpPr>
-          <p:cNvPr id="22" name="Text 20"/>
-          <p:cNvSpPr/>
-          <p:nvPr/>
-        </p:nvSpPr>
-        <p:spPr>
-          <a:xfrm>
-            <a:off x="6263640" y="3611880"/>
-            <a:ext cx="2359152" cy="1097280"/>
-          </a:xfrm>
-          <a:prstGeom prst="rect">
-            <a:avLst/>
-          </a:prstGeom>
-          <a:noFill/>
-          <a:ln/>
-        </p:spPr>
-        <p:txBody>
-          <a:bodyPr wrap="square" rtlCol="0" anchor="t"/>
-          <a:lstStyle/>
-          <a:p>
-            <a:pPr indent="0" marL="0">
-              <a:buNone/>
-            </a:pPr>
-            <a:r>
-              <a:rPr lang="en-US" sz="1400" b="1" dirty="0">
-                <a:solidFill>
-                  <a:srgbClr val="E8A33D"/>
-                </a:solidFill>
-                <a:latin typeface="Yu Gothic UI" pitchFamily="34" charset="0"/>
-                <a:ea typeface="Yu Gothic UI" pitchFamily="34" charset="-122"/>
-                <a:cs typeface="Yu Gothic UI" pitchFamily="34" charset="-120"/>
-              </a:rPr>
-              <a:t>💡  </a:t>
-            </a:r>
-            <a:pPr indent="0" marL="0">
-              <a:buNone/>
-            </a:pPr>
-            <a:r>
-              <a:rPr lang="en-US" sz="1300" dirty="0">
-                <a:solidFill>
-                  <a:srgbClr val="1A1A1A"/>
-                </a:solidFill>
-                <a:latin typeface="Yu Gothic UI" pitchFamily="34" charset="0"/>
-                <a:ea typeface="Yu Gothic UI" pitchFamily="34" charset="-122"/>
-                <a:cs typeface="Yu Gothic UI" pitchFamily="34" charset="-120"/>
-              </a:rPr>
-              <a:t>「スプシから読んでプロンプト末尾に貼る」までを 口頭で説明できるか</a:t>
+              <a:t>独自の数値ゼロ → 市販ツールと変わらない ",らしさ" 不足</a:t>
             </a:r>
             <a:endParaRPr lang="en-US" sz="1300" dirty="0"/>
           </a:p>
@@ -6102,7 +6429,7 @@
     <p:bg>
       <p:bgPr>
         <a:solidFill>
-          <a:srgbClr val="1F3A5F"/>
+          <a:srgbClr val="FFFFFF"/>
         </a:solidFill>
       </p:bgPr>
     </p:bg>
@@ -6122,14 +6449,34 @@
       </p:grpSpPr>
       <p:sp>
         <p:nvSpPr>
-          <p:cNvPr id="2" name="Text 0"/>
-          <p:cNvSpPr/>
-          <p:nvPr/>
-        </p:nvSpPr>
-        <p:spPr>
-          <a:xfrm>
-            <a:off x="457200" y="365760"/>
-            <a:ext cx="8229600" cy="777240"/>
+          <p:cNvPr id="2" name="Shape 0"/>
+          <p:cNvSpPr/>
+          <p:nvPr/>
+        </p:nvSpPr>
+        <p:spPr>
+          <a:xfrm>
+            <a:off x="0" y="0"/>
+            <a:ext cx="164592" cy="5143500"/>
+          </a:xfrm>
+          <a:prstGeom prst="rect">
+            <a:avLst/>
+          </a:prstGeom>
+          <a:solidFill>
+            <a:srgbClr val="0E7C86"/>
+          </a:solidFill>
+          <a:ln/>
+        </p:spPr>
+      </p:sp>
+      <p:sp>
+        <p:nvSpPr>
+          <p:cNvPr id="3" name="Text 1"/>
+          <p:cNvSpPr/>
+          <p:nvPr/>
+        </p:nvSpPr>
+        <p:spPr>
+          <a:xfrm>
+            <a:off x="411480" y="182880"/>
+            <a:ext cx="8412480" cy="548640"/>
           </a:xfrm>
           <a:prstGeom prst="rect">
             <a:avLst/>
@@ -6145,60 +6492,448 @@
               <a:buNone/>
             </a:pPr>
             <a:r>
-              <a:rPr lang="en-US" sz="3200" b="1" dirty="0">
-                <a:solidFill>
-                  <a:srgbClr val="FFFFFF"/>
+              <a:rPr lang="en-US" sz="2400" b="1" dirty="0">
+                <a:solidFill>
+                  <a:srgbClr val="1F3A5F"/>
                 </a:solidFill>
                 <a:latin typeface="Yu Gothic UI Semibold" pitchFamily="34" charset="0"/>
                 <a:ea typeface="Yu Gothic UI Semibold" pitchFamily="34" charset="-122"/>
                 <a:cs typeface="Yu Gothic UI Semibold" pitchFamily="34" charset="-120"/>
               </a:rPr>
-              <a:t>今日の持ち帰り</a:t>
-            </a:r>
-            <a:endParaRPr lang="en-US" sz="3200" dirty="0"/>
-          </a:p>
-        </p:txBody>
-      </p:sp>
-      <p:sp>
-        <p:nvSpPr>
-          <p:cNvPr id="3" name="Shape 1"/>
-          <p:cNvSpPr/>
-          <p:nvPr/>
-        </p:nvSpPr>
-        <p:spPr>
-          <a:xfrm>
-            <a:off x="457200" y="1188720"/>
-            <a:ext cx="1371600" cy="54864"/>
-          </a:xfrm>
-          <a:prstGeom prst="rect">
-            <a:avLst/>
-          </a:prstGeom>
-          <a:solidFill>
-            <a:srgbClr val="E8A33D"/>
-          </a:solidFill>
-          <a:ln/>
-        </p:spPr>
-      </p:sp>
-      <p:sp>
-        <p:nvSpPr>
-          <p:cNvPr id="4" name="Shape 2"/>
-          <p:cNvSpPr/>
-          <p:nvPr/>
-        </p:nvSpPr>
-        <p:spPr>
-          <a:xfrm>
-            <a:off x="457200" y="1554480"/>
-            <a:ext cx="8229600" cy="1051560"/>
+              <a:t>演習2 ─ 使うときの画面 と 独自の提案パターン を決める</a:t>
+            </a:r>
+            <a:endParaRPr lang="en-US" sz="2400" dirty="0"/>
+          </a:p>
+        </p:txBody>
+      </p:sp>
+      <p:sp>
+        <p:nvSpPr>
+          <p:cNvPr id="4" name="Text 2"/>
+          <p:cNvSpPr/>
+          <p:nvPr/>
+        </p:nvSpPr>
+        <p:spPr>
+          <a:xfrm>
+            <a:off x="411480" y="749808"/>
+            <a:ext cx="8412480" cy="365760"/>
+          </a:xfrm>
+          <a:prstGeom prst="rect">
+            <a:avLst/>
+          </a:prstGeom>
+          <a:noFill/>
+          <a:ln/>
+        </p:spPr>
+        <p:txBody>
+          <a:bodyPr wrap="square" rtlCol="0" anchor="ctr"/>
+          <a:lstStyle/>
+          <a:p>
+            <a:pPr indent="0" marL="0">
+              <a:buNone/>
+            </a:pPr>
+            <a:r>
+              <a:rPr lang="en-US" sz="1300" i="1" dirty="0">
+                <a:solidFill>
+                  <a:srgbClr val="555555"/>
+                </a:solidFill>
+                <a:latin typeface="Yu Gothic UI" pitchFamily="34" charset="0"/>
+                <a:ea typeface="Yu Gothic UI" pitchFamily="34" charset="-122"/>
+                <a:cs typeface="Yu Gothic UI" pitchFamily="34" charset="-120"/>
+              </a:rPr>
+              <a:t>コーディング前に「どんな画面で使うか」と「うちの強み」を言語化します</a:t>
+            </a:r>
+            <a:endParaRPr lang="en-US" sz="1300" dirty="0"/>
+          </a:p>
+        </p:txBody>
+      </p:sp>
+      <p:sp>
+        <p:nvSpPr>
+          <p:cNvPr id="5" name="Shape 3"/>
+          <p:cNvSpPr/>
+          <p:nvPr/>
+        </p:nvSpPr>
+        <p:spPr>
+          <a:xfrm>
+            <a:off x="411480" y="1234440"/>
+            <a:ext cx="3429000" cy="1691640"/>
           </a:xfrm>
           <a:prstGeom prst="roundRect">
             <a:avLst>
-              <a:gd name="adj" fmla="val 6957"/>
+              <a:gd name="adj" fmla="val 4324"/>
             </a:avLst>
           </a:prstGeom>
           <a:solidFill>
-            <a:srgbClr val="2A4A75"/>
-          </a:solidFill>
-          <a:ln w="6350">
+            <a:srgbClr val="F4F6F9"/>
+          </a:solidFill>
+          <a:ln w="25400">
+            <a:solidFill>
+              <a:srgbClr val="1F3A5F"/>
+            </a:solidFill>
+            <a:prstDash val="solid"/>
+          </a:ln>
+        </p:spPr>
+      </p:sp>
+      <p:sp>
+        <p:nvSpPr>
+          <p:cNvPr id="6" name="Text 4"/>
+          <p:cNvSpPr/>
+          <p:nvPr/>
+        </p:nvSpPr>
+        <p:spPr>
+          <a:xfrm>
+            <a:off x="548640" y="1325880"/>
+            <a:ext cx="3154680" cy="365760"/>
+          </a:xfrm>
+          <a:prstGeom prst="rect">
+            <a:avLst/>
+          </a:prstGeom>
+          <a:noFill/>
+          <a:ln/>
+        </p:spPr>
+        <p:txBody>
+          <a:bodyPr wrap="square" rtlCol="0" anchor="ctr"/>
+          <a:lstStyle/>
+          <a:p>
+            <a:pPr indent="0" marL="0">
+              <a:buNone/>
+            </a:pPr>
+            <a:r>
+              <a:rPr lang="en-US" sz="1400" b="1" dirty="0">
+                <a:solidFill>
+                  <a:srgbClr val="1F3A5F"/>
+                </a:solidFill>
+                <a:latin typeface="Yu Gothic UI Semibold" pitchFamily="34" charset="0"/>
+                <a:ea typeface="Yu Gothic UI Semibold" pitchFamily="34" charset="-122"/>
+                <a:cs typeface="Yu Gothic UI Semibold" pitchFamily="34" charset="-120"/>
+              </a:rPr>
+              <a:t>📌 シチュエーション</a:t>
+            </a:r>
+            <a:endParaRPr lang="en-US" sz="1400" dirty="0"/>
+          </a:p>
+        </p:txBody>
+      </p:sp>
+      <p:sp>
+        <p:nvSpPr>
+          <p:cNvPr id="7" name="Text 5"/>
+          <p:cNvSpPr/>
+          <p:nvPr/>
+        </p:nvSpPr>
+        <p:spPr>
+          <a:xfrm>
+            <a:off x="548640" y="1709928"/>
+            <a:ext cx="3154680" cy="1143000"/>
+          </a:xfrm>
+          <a:prstGeom prst="rect">
+            <a:avLst/>
+          </a:prstGeom>
+          <a:noFill/>
+          <a:ln/>
+        </p:spPr>
+        <p:txBody>
+          <a:bodyPr wrap="square" rtlCol="0" anchor="t"/>
+          <a:lstStyle/>
+          <a:p>
+            <a:pPr indent="0" marL="0">
+              <a:spcAft>
+                <a:spcPts val="300"/>
+              </a:spcAft>
+              <a:buNone/>
+            </a:pPr>
+            <a:r>
+              <a:rPr lang="en-US" sz="1200" dirty="0">
+                <a:solidFill>
+                  <a:srgbClr val="1A1A1A"/>
+                </a:solidFill>
+                <a:latin typeface="Yu Gothic UI" pitchFamily="34" charset="0"/>
+                <a:ea typeface="Yu Gothic UI" pitchFamily="34" charset="-122"/>
+                <a:cs typeface="Yu Gothic UI" pitchFamily="34" charset="-120"/>
+              </a:rPr>
+              <a:t>画面の形式を3つの選択肢から1つ選びます。</a:t>
+            </a:r>
+            <a:endParaRPr lang="en-US" sz="1200" dirty="0"/>
+          </a:p>
+          <a:p>
+            <a:pPr indent="0" marL="0">
+              <a:spcAft>
+                <a:spcPts val="300"/>
+              </a:spcAft>
+              <a:buNone/>
+            </a:pPr>
+            <a:r>
+              <a:rPr lang="en-US" sz="1200" dirty="0">
+                <a:solidFill>
+                  <a:srgbClr val="1A1A1A"/>
+                </a:solidFill>
+                <a:latin typeface="Yu Gothic UI" pitchFamily="34" charset="0"/>
+                <a:ea typeface="Yu Gothic UI" pitchFamily="34" charset="-122"/>
+                <a:cs typeface="Yu Gothic UI" pitchFamily="34" charset="-120"/>
+              </a:rPr>
+              <a:t>A: サイドバー(スプシ内で表示)</a:t>
+            </a:r>
+            <a:endParaRPr lang="en-US" sz="1200" dirty="0"/>
+          </a:p>
+          <a:p>
+            <a:pPr indent="0" marL="0">
+              <a:spcAft>
+                <a:spcPts val="300"/>
+              </a:spcAft>
+              <a:buNone/>
+            </a:pPr>
+            <a:r>
+              <a:rPr lang="en-US" sz="1200" dirty="0">
+                <a:solidFill>
+                  <a:srgbClr val="1A1A1A"/>
+                </a:solidFill>
+                <a:latin typeface="Yu Gothic UI" pitchFamily="34" charset="0"/>
+                <a:ea typeface="Yu Gothic UI" pitchFamily="34" charset="-122"/>
+                <a:cs typeface="Yu Gothic UI" pitchFamily="34" charset="-120"/>
+              </a:rPr>
+              <a:t>B: Webアプリ(独立URL、スマホでもOK)</a:t>
+            </a:r>
+            <a:endParaRPr lang="en-US" sz="1200" dirty="0"/>
+          </a:p>
+          <a:p>
+            <a:pPr indent="0" marL="0">
+              <a:spcAft>
+                <a:spcPts val="300"/>
+              </a:spcAft>
+              <a:buNone/>
+            </a:pPr>
+            <a:r>
+              <a:rPr lang="en-US" sz="1200" dirty="0">
+                <a:solidFill>
+                  <a:srgbClr val="1A1A1A"/>
+                </a:solidFill>
+                <a:latin typeface="Yu Gothic UI" pitchFamily="34" charset="0"/>
+                <a:ea typeface="Yu Gothic UI" pitchFamily="34" charset="-122"/>
+                <a:cs typeface="Yu Gothic UI" pitchFamily="34" charset="-120"/>
+              </a:rPr>
+              <a:t>C: Googleフォーム(入力だけシンプル)</a:t>
+            </a:r>
+            <a:endParaRPr lang="en-US" sz="1200" dirty="0"/>
+          </a:p>
+          <a:p>
+            <a:pPr indent="0" marL="0">
+              <a:spcAft>
+                <a:spcPts val="300"/>
+              </a:spcAft>
+              <a:buNone/>
+            </a:pPr>
+            <a:endParaRPr lang="en-US" sz="1200" dirty="0"/>
+          </a:p>
+          <a:p>
+            <a:pPr indent="0" marL="0">
+              <a:spcAft>
+                <a:spcPts val="300"/>
+              </a:spcAft>
+              <a:buNone/>
+            </a:pPr>
+            <a:r>
+              <a:rPr lang="en-US" sz="1200" dirty="0">
+                <a:solidFill>
+                  <a:srgbClr val="1A1A1A"/>
+                </a:solidFill>
+                <a:latin typeface="Yu Gothic UI" pitchFamily="34" charset="0"/>
+                <a:ea typeface="Yu Gothic UI" pitchFamily="34" charset="-122"/>
+                <a:cs typeface="Yu Gothic UI" pitchFamily="34" charset="-120"/>
+              </a:rPr>
+              <a:t>そして、うちならこう提案する というパターンを 3〜5個 言葉にします。</a:t>
+            </a:r>
+            <a:endParaRPr lang="en-US" sz="1200" dirty="0"/>
+          </a:p>
+        </p:txBody>
+      </p:sp>
+      <p:sp>
+        <p:nvSpPr>
+          <p:cNvPr id="8" name="Shape 6"/>
+          <p:cNvSpPr/>
+          <p:nvPr/>
+        </p:nvSpPr>
+        <p:spPr>
+          <a:xfrm>
+            <a:off x="411480" y="3063240"/>
+            <a:ext cx="3429000" cy="1874520"/>
+          </a:xfrm>
+          <a:prstGeom prst="roundRect">
+            <a:avLst>
+              <a:gd name="adj" fmla="val 3902"/>
+            </a:avLst>
+          </a:prstGeom>
+          <a:solidFill>
+            <a:srgbClr val="FFF3E0"/>
+          </a:solidFill>
+          <a:ln w="19050">
+            <a:solidFill>
+              <a:srgbClr val="E8A33D"/>
+            </a:solidFill>
+            <a:prstDash val="solid"/>
+          </a:ln>
+        </p:spPr>
+      </p:sp>
+      <p:sp>
+        <p:nvSpPr>
+          <p:cNvPr id="9" name="Text 7"/>
+          <p:cNvSpPr/>
+          <p:nvPr/>
+        </p:nvSpPr>
+        <p:spPr>
+          <a:xfrm>
+            <a:off x="548640" y="3154680"/>
+            <a:ext cx="3154680" cy="365760"/>
+          </a:xfrm>
+          <a:prstGeom prst="rect">
+            <a:avLst/>
+          </a:prstGeom>
+          <a:noFill/>
+          <a:ln/>
+        </p:spPr>
+        <p:txBody>
+          <a:bodyPr wrap="square" rtlCol="0" anchor="ctr"/>
+          <a:lstStyle/>
+          <a:p>
+            <a:pPr indent="0" marL="0">
+              <a:buNone/>
+            </a:pPr>
+            <a:r>
+              <a:rPr lang="en-US" sz="1300" b="1" dirty="0">
+                <a:solidFill>
+                  <a:srgbClr val="E8A33D"/>
+                </a:solidFill>
+                <a:latin typeface="Yu Gothic UI Semibold" pitchFamily="34" charset="0"/>
+                <a:ea typeface="Yu Gothic UI Semibold" pitchFamily="34" charset="-122"/>
+                <a:cs typeface="Yu Gothic UI Semibold" pitchFamily="34" charset="-120"/>
+              </a:rPr>
+              <a:t>💬 AIとの壁打ちヒント</a:t>
+            </a:r>
+            <a:endParaRPr lang="en-US" sz="1300" dirty="0"/>
+          </a:p>
+        </p:txBody>
+      </p:sp>
+      <p:sp>
+        <p:nvSpPr>
+          <p:cNvPr id="10" name="Text 8"/>
+          <p:cNvSpPr/>
+          <p:nvPr/>
+        </p:nvSpPr>
+        <p:spPr>
+          <a:xfrm>
+            <a:off x="621792" y="3538728"/>
+            <a:ext cx="3081528" cy="1325880"/>
+          </a:xfrm>
+          <a:prstGeom prst="rect">
+            <a:avLst/>
+          </a:prstGeom>
+          <a:noFill/>
+          <a:ln/>
+        </p:spPr>
+        <p:txBody>
+          <a:bodyPr wrap="square" rtlCol="0" anchor="t"/>
+          <a:lstStyle/>
+          <a:p>
+            <a:pPr marL="342900" indent="-342900">
+              <a:spcAft>
+                <a:spcPts val="400"/>
+              </a:spcAft>
+              <a:buSzPct val="100000"/>
+              <a:buChar char="•"/>
+            </a:pPr>
+            <a:r>
+              <a:rPr lang="en-US" sz="1100" dirty="0">
+                <a:solidFill>
+                  <a:srgbClr val="1A1A1A"/>
+                </a:solidFill>
+                <a:latin typeface="Yu Gothic UI" pitchFamily="34" charset="0"/>
+                <a:ea typeface="Yu Gothic UI" pitchFamily="34" charset="-122"/>
+                <a:cs typeface="Yu Gothic UI" pitchFamily="34" charset="-120"/>
+              </a:rPr>
+              <a:t>「面談は事務所?訪問?」で画面選択が変わる</a:t>
+            </a:r>
+            <a:endParaRPr lang="en-US" sz="1100" dirty="0"/>
+          </a:p>
+          <a:p>
+            <a:pPr marL="342900" indent="-342900">
+              <a:spcAft>
+                <a:spcPts val="400"/>
+              </a:spcAft>
+              <a:buSzPct val="100000"/>
+              <a:buChar char="•"/>
+            </a:pPr>
+            <a:r>
+              <a:rPr lang="en-US" sz="1100" dirty="0">
+                <a:solidFill>
+                  <a:srgbClr val="1A1A1A"/>
+                </a:solidFill>
+                <a:latin typeface="Yu Gothic UI" pitchFamily="34" charset="0"/>
+                <a:ea typeface="Yu Gothic UI" pitchFamily="34" charset="-122"/>
+                <a:cs typeface="Yu Gothic UI" pitchFamily="34" charset="-120"/>
+              </a:rPr>
+              <a:t>事務所面談 → サイドバー / 訪問中 → Webアプリ</a:t>
+            </a:r>
+            <a:endParaRPr lang="en-US" sz="1100" dirty="0"/>
+          </a:p>
+          <a:p>
+            <a:pPr marL="342900" indent="-342900">
+              <a:spcAft>
+                <a:spcPts val="400"/>
+              </a:spcAft>
+              <a:buSzPct val="100000"/>
+              <a:buChar char="•"/>
+            </a:pPr>
+            <a:r>
+              <a:rPr lang="en-US" sz="1100" dirty="0">
+                <a:solidFill>
+                  <a:srgbClr val="1A1A1A"/>
+                </a:solidFill>
+                <a:latin typeface="Yu Gothic UI" pitchFamily="34" charset="0"/>
+                <a:ea typeface="Yu Gothic UI" pitchFamily="34" charset="-122"/>
+                <a:cs typeface="Yu Gothic UI" pitchFamily="34" charset="-120"/>
+              </a:rPr>
+              <a:t>「AI、30代夫婦+子2人 に強みを出せる提案パターン考えて」</a:t>
+            </a:r>
+            <a:endParaRPr lang="en-US" sz="1100" dirty="0"/>
+          </a:p>
+          <a:p>
+            <a:pPr marL="342900" indent="-342900">
+              <a:spcAft>
+                <a:spcPts val="400"/>
+              </a:spcAft>
+              <a:buSzPct val="100000"/>
+              <a:buChar char="•"/>
+            </a:pPr>
+            <a:r>
+              <a:rPr lang="en-US" sz="1100" dirty="0">
+                <a:solidFill>
+                  <a:srgbClr val="1A1A1A"/>
+                </a:solidFill>
+                <a:latin typeface="Yu Gothic UI" pitchFamily="34" charset="0"/>
+                <a:ea typeface="Yu Gothic UI" pitchFamily="34" charset="-122"/>
+                <a:cs typeface="Yu Gothic UI" pitchFamily="34" charset="-120"/>
+              </a:rPr>
+              <a:t>独自パターンは 代理店の実績・連携先(税理士等) を根拠に</a:t>
+            </a:r>
+            <a:endParaRPr lang="en-US" sz="1100" dirty="0"/>
+          </a:p>
+        </p:txBody>
+      </p:sp>
+      <p:sp>
+        <p:nvSpPr>
+          <p:cNvPr id="11" name="Shape 9"/>
+          <p:cNvSpPr/>
+          <p:nvPr/>
+        </p:nvSpPr>
+        <p:spPr>
+          <a:xfrm>
+            <a:off x="4069080" y="1234440"/>
+            <a:ext cx="4663440" cy="3566160"/>
+          </a:xfrm>
+          <a:prstGeom prst="roundRect">
+            <a:avLst>
+              <a:gd name="adj" fmla="val 2051"/>
+            </a:avLst>
+          </a:prstGeom>
+          <a:solidFill>
+            <a:srgbClr val="FFFFFF"/>
+          </a:solidFill>
+          <a:ln w="25400">
             <a:solidFill>
               <a:srgbClr val="0E7C86"/>
             </a:solidFill>
@@ -6208,14 +6943,34 @@
       </p:sp>
       <p:sp>
         <p:nvSpPr>
-          <p:cNvPr id="5" name="Text 3"/>
-          <p:cNvSpPr/>
-          <p:nvPr/>
-        </p:nvSpPr>
-        <p:spPr>
-          <a:xfrm>
-            <a:off x="658368" y="1719072"/>
-            <a:ext cx="777240" cy="777240"/>
+          <p:cNvPr id="12" name="Shape 10"/>
+          <p:cNvSpPr/>
+          <p:nvPr/>
+        </p:nvSpPr>
+        <p:spPr>
+          <a:xfrm>
+            <a:off x="4069080" y="1234440"/>
+            <a:ext cx="4663440" cy="502920"/>
+          </a:xfrm>
+          <a:prstGeom prst="rect">
+            <a:avLst/>
+          </a:prstGeom>
+          <a:solidFill>
+            <a:srgbClr val="0E7C86"/>
+          </a:solidFill>
+          <a:ln/>
+        </p:spPr>
+      </p:sp>
+      <p:sp>
+        <p:nvSpPr>
+          <p:cNvPr id="13" name="Text 11"/>
+          <p:cNvSpPr/>
+          <p:nvPr/>
+        </p:nvSpPr>
+        <p:spPr>
+          <a:xfrm>
+            <a:off x="4206240" y="1234440"/>
+            <a:ext cx="4389120" cy="502920"/>
           </a:xfrm>
           <a:prstGeom prst="rect">
             <a:avLst/>
@@ -6231,30 +6986,209 @@
               <a:buNone/>
             </a:pPr>
             <a:r>
-              <a:rPr lang="en-US" sz="3400" b="1" dirty="0">
-                <a:solidFill>
-                  <a:srgbClr val="E8A33D"/>
+              <a:rPr lang="en-US" sz="1400" b="1" dirty="0">
+                <a:solidFill>
+                  <a:srgbClr val="FFFFFF"/>
                 </a:solidFill>
                 <a:latin typeface="Yu Gothic UI Semibold" pitchFamily="34" charset="0"/>
                 <a:ea typeface="Yu Gothic UI Semibold" pitchFamily="34" charset="-122"/>
                 <a:cs typeface="Yu Gothic UI Semibold" pitchFamily="34" charset="-120"/>
               </a:rPr>
-              <a:t>01</a:t>
-            </a:r>
-            <a:endParaRPr lang="en-US" sz="3400" dirty="0"/>
-          </a:p>
-        </p:txBody>
-      </p:sp>
-      <p:sp>
-        <p:nvSpPr>
-          <p:cNvPr id="6" name="Text 4"/>
-          <p:cNvSpPr/>
-          <p:nvPr/>
-        </p:nvSpPr>
-        <p:spPr>
-          <a:xfrm>
-            <a:off x="1508760" y="1691640"/>
-            <a:ext cx="6949440" cy="411480"/>
+              <a:t>🎯 今日やること</a:t>
+            </a:r>
+            <a:endParaRPr lang="en-US" sz="1400" dirty="0"/>
+          </a:p>
+        </p:txBody>
+      </p:sp>
+      <p:sp>
+        <p:nvSpPr>
+          <p:cNvPr id="14" name="Text 12"/>
+          <p:cNvSpPr/>
+          <p:nvPr/>
+        </p:nvSpPr>
+        <p:spPr>
+          <a:xfrm>
+            <a:off x="4288536" y="1874520"/>
+            <a:ext cx="4224528" cy="2834640"/>
+          </a:xfrm>
+          <a:prstGeom prst="rect">
+            <a:avLst/>
+          </a:prstGeom>
+          <a:noFill/>
+          <a:ln/>
+        </p:spPr>
+        <p:txBody>
+          <a:bodyPr wrap="square" rtlCol="0" anchor="t"/>
+          <a:lstStyle/>
+          <a:p>
+            <a:pPr marL="342900" indent="-342900">
+              <a:spcAft>
+                <a:spcPts val="600"/>
+              </a:spcAft>
+              <a:buSzPct val="100000"/>
+              <a:buChar char="■"/>
+            </a:pPr>
+            <a:r>
+              <a:rPr lang="en-US" sz="1200" dirty="0">
+                <a:solidFill>
+                  <a:srgbClr val="1A1A1A"/>
+                </a:solidFill>
+                <a:latin typeface="Yu Gothic UI" pitchFamily="34" charset="0"/>
+                <a:ea typeface="Yu Gothic UI" pitchFamily="34" charset="-122"/>
+                <a:cs typeface="Yu Gothic UI" pitchFamily="34" charset="-120"/>
+              </a:rPr>
+              <a:t>シート「3_UI設計」で 3つの選択肢を比較 → 1つ選ぶ</a:t>
+            </a:r>
+            <a:endParaRPr lang="en-US" sz="1200" dirty="0"/>
+          </a:p>
+          <a:p>
+            <a:pPr marL="342900" indent="-342900">
+              <a:spcAft>
+                <a:spcPts val="600"/>
+              </a:spcAft>
+              <a:buSzPct val="100000"/>
+              <a:buChar char="■"/>
+            </a:pPr>
+            <a:r>
+              <a:rPr lang="en-US" sz="1200" dirty="0">
+                <a:solidFill>
+                  <a:srgbClr val="1A1A1A"/>
+                </a:solidFill>
+                <a:latin typeface="Yu Gothic UI" pitchFamily="34" charset="0"/>
+                <a:ea typeface="Yu Gothic UI" pitchFamily="34" charset="-122"/>
+                <a:cs typeface="Yu Gothic UI" pitchFamily="34" charset="-120"/>
+              </a:rPr>
+              <a:t>選んだ画面と 選んだ理由を 3〜5行で書く</a:t>
+            </a:r>
+            <a:endParaRPr lang="en-US" sz="1200" dirty="0"/>
+          </a:p>
+          <a:p>
+            <a:pPr marL="342900" indent="-342900">
+              <a:spcAft>
+                <a:spcPts val="600"/>
+              </a:spcAft>
+              <a:buSzPct val="100000"/>
+              <a:buChar char="■"/>
+            </a:pPr>
+            <a:r>
+              <a:rPr lang="en-US" sz="1200" dirty="0">
+                <a:solidFill>
+                  <a:srgbClr val="1A1A1A"/>
+                </a:solidFill>
+                <a:latin typeface="Yu Gothic UI" pitchFamily="34" charset="0"/>
+                <a:ea typeface="Yu Gothic UI" pitchFamily="34" charset="-122"/>
+                <a:cs typeface="Yu Gothic UI" pitchFamily="34" charset="-120"/>
+              </a:rPr>
+              <a:t>シート「4_独自アドバイス」で 提案パターンを 3〜5個 書く</a:t>
+            </a:r>
+            <a:endParaRPr lang="en-US" sz="1200" dirty="0"/>
+          </a:p>
+          <a:p>
+            <a:pPr marL="342900" indent="-342900">
+              <a:spcAft>
+                <a:spcPts val="600"/>
+              </a:spcAft>
+              <a:buSzPct val="100000"/>
+              <a:buChar char="■"/>
+            </a:pPr>
+            <a:r>
+              <a:rPr lang="en-US" sz="1200" dirty="0">
+                <a:solidFill>
+                  <a:srgbClr val="1A1A1A"/>
+                </a:solidFill>
+                <a:latin typeface="Yu Gothic UI" pitchFamily="34" charset="0"/>
+                <a:ea typeface="Yu Gothic UI" pitchFamily="34" charset="-122"/>
+                <a:cs typeface="Yu Gothic UI" pitchFamily="34" charset="-120"/>
+              </a:rPr>
+              <a:t>各パターン: どんな顧客?(発動条件)/ 何を提案?/ 根拠は?</a:t>
+            </a:r>
+            <a:endParaRPr lang="en-US" sz="1200" dirty="0"/>
+          </a:p>
+          <a:p>
+            <a:pPr marL="342900" indent="-342900">
+              <a:spcAft>
+                <a:spcPts val="600"/>
+              </a:spcAft>
+              <a:buSzPct val="100000"/>
+              <a:buChar char="■"/>
+            </a:pPr>
+            <a:r>
+              <a:rPr lang="en-US" sz="1200" dirty="0">
+                <a:solidFill>
+                  <a:srgbClr val="1A1A1A"/>
+                </a:solidFill>
+                <a:latin typeface="Yu Gothic UI" pitchFamily="34" charset="0"/>
+                <a:ea typeface="Yu Gothic UI" pitchFamily="34" charset="-122"/>
+                <a:cs typeface="Yu Gothic UI" pitchFamily="34" charset="-120"/>
+              </a:rPr>
+              <a:t>提案パターンはスプシに書く → 増やしても更新しやすい</a:t>
+            </a:r>
+            <a:endParaRPr lang="en-US" sz="1200" dirty="0"/>
+          </a:p>
+        </p:txBody>
+      </p:sp>
+    </p:spTree>
+  </p:cSld>
+  <p:clrMapOvr>
+    <a:masterClrMapping/>
+  </p:clrMapOvr>
+</p:sld>
+</file>
+
+<file path=ppt/slides/slide9.xml><?xml version="1.0" encoding="utf-8"?>
+<p:sld xmlns:a="http://schemas.openxmlformats.org/drawingml/2006/main" xmlns:r="http://schemas.openxmlformats.org/officeDocument/2006/relationships" xmlns:p="http://schemas.openxmlformats.org/presentationml/2006/main">
+  <p:cSld name="Slide 9">
+    <p:bg>
+      <p:bgPr>
+        <a:solidFill>
+          <a:srgbClr val="FFFFFF"/>
+        </a:solidFill>
+      </p:bgPr>
+    </p:bg>
+    <p:spTree>
+      <p:nvGrpSpPr>
+        <p:cNvPr id="1" name=""/>
+        <p:cNvGrpSpPr/>
+        <p:nvPr/>
+      </p:nvGrpSpPr>
+      <p:grpSpPr>
+        <a:xfrm>
+          <a:off x="0" y="0"/>
+          <a:ext cx="0" cy="0"/>
+          <a:chOff x="0" y="0"/>
+          <a:chExt cx="0" cy="0"/>
+        </a:xfrm>
+      </p:grpSpPr>
+      <p:sp>
+        <p:nvSpPr>
+          <p:cNvPr id="2" name="Shape 0"/>
+          <p:cNvSpPr/>
+          <p:nvPr/>
+        </p:nvSpPr>
+        <p:spPr>
+          <a:xfrm>
+            <a:off x="0" y="0"/>
+            <a:ext cx="164592" cy="5143500"/>
+          </a:xfrm>
+          <a:prstGeom prst="rect">
+            <a:avLst/>
+          </a:prstGeom>
+          <a:solidFill>
+            <a:srgbClr val="0E7C86"/>
+          </a:solidFill>
+          <a:ln/>
+        </p:spPr>
+      </p:sp>
+      <p:sp>
+        <p:nvSpPr>
+          <p:cNvPr id="3" name="Text 1"/>
+          <p:cNvSpPr/>
+          <p:nvPr/>
+        </p:nvSpPr>
+        <p:spPr>
+          <a:xfrm>
+            <a:off x="411480" y="182880"/>
+            <a:ext cx="8412480" cy="548640"/>
           </a:xfrm>
           <a:prstGeom prst="rect">
             <a:avLst/>
@@ -6270,54 +7204,54 @@
               <a:buNone/>
             </a:pPr>
             <a:r>
-              <a:rPr lang="en-US" sz="1800" b="1" dirty="0">
-                <a:solidFill>
-                  <a:srgbClr val="FFFFFF"/>
+              <a:rPr lang="en-US" sz="2400" b="1" dirty="0">
+                <a:solidFill>
+                  <a:srgbClr val="1F3A5F"/>
                 </a:solidFill>
                 <a:latin typeface="Yu Gothic UI Semibold" pitchFamily="34" charset="0"/>
                 <a:ea typeface="Yu Gothic UI Semibold" pitchFamily="34" charset="-122"/>
                 <a:cs typeface="Yu Gothic UI Semibold" pitchFamily="34" charset="-120"/>
               </a:rPr>
-              <a:t>設計書が完成</a:t>
-            </a:r>
-            <a:endParaRPr lang="en-US" sz="1800" dirty="0"/>
-          </a:p>
-        </p:txBody>
-      </p:sp>
-      <p:sp>
-        <p:nvSpPr>
-          <p:cNvPr id="7" name="Text 5"/>
-          <p:cNvSpPr/>
-          <p:nvPr/>
-        </p:nvSpPr>
-        <p:spPr>
-          <a:xfrm>
-            <a:off x="1508760" y="2121408"/>
-            <a:ext cx="6949440" cy="457200"/>
-          </a:xfrm>
-          <a:prstGeom prst="rect">
-            <a:avLst/>
-          </a:prstGeom>
-          <a:noFill/>
-          <a:ln/>
-        </p:spPr>
-        <p:txBody>
-          <a:bodyPr wrap="square" rtlCol="0" anchor="t"/>
+              <a:t>演習2 の 完了チェック</a:t>
+            </a:r>
+            <a:endParaRPr lang="en-US" sz="2400" dirty="0"/>
+          </a:p>
+        </p:txBody>
+      </p:sp>
+      <p:sp>
+        <p:nvSpPr>
+          <p:cNvPr id="4" name="Text 2"/>
+          <p:cNvSpPr/>
+          <p:nvPr/>
+        </p:nvSpPr>
+        <p:spPr>
+          <a:xfrm>
+            <a:off x="411480" y="749808"/>
+            <a:ext cx="8412480" cy="365760"/>
+          </a:xfrm>
+          <a:prstGeom prst="rect">
+            <a:avLst/>
+          </a:prstGeom>
+          <a:noFill/>
+          <a:ln/>
+        </p:spPr>
+        <p:txBody>
+          <a:bodyPr wrap="square" rtlCol="0" anchor="ctr"/>
           <a:lstStyle/>
           <a:p>
             <a:pPr indent="0" marL="0">
               <a:buNone/>
             </a:pPr>
             <a:r>
-              <a:rPr lang="en-US" sz="1300" dirty="0">
-                <a:solidFill>
-                  <a:srgbClr val="E6ECF3"/>
+              <a:rPr lang="en-US" sz="1300" i="1" dirty="0">
+                <a:solidFill>
+                  <a:srgbClr val="555555"/>
                 </a:solidFill>
                 <a:latin typeface="Yu Gothic UI" pitchFamily="34" charset="0"/>
                 <a:ea typeface="Yu Gothic UI" pitchFamily="34" charset="-122"/>
                 <a:cs typeface="Yu Gothic UI" pitchFamily="34" charset="-120"/>
               </a:rPr>
-              <a:t>DB / 判断基準・数値 / UI / 独自アドバイス の4面が言語化された。W2 の指示書ができた。</a:t>
+              <a:t>ここができていれば、設計書は完成です</a:t>
             </a:r>
             <a:endParaRPr lang="en-US" sz="1300" dirty="0"/>
           </a:p>
@@ -6325,24 +7259,24 @@
       </p:sp>
       <p:sp>
         <p:nvSpPr>
-          <p:cNvPr id="8" name="Shape 6"/>
-          <p:cNvSpPr/>
-          <p:nvPr/>
-        </p:nvSpPr>
-        <p:spPr>
-          <a:xfrm>
-            <a:off x="457200" y="2807208"/>
-            <a:ext cx="8229600" cy="1051560"/>
+          <p:cNvPr id="5" name="Shape 3"/>
+          <p:cNvSpPr/>
+          <p:nvPr/>
+        </p:nvSpPr>
+        <p:spPr>
+          <a:xfrm>
+            <a:off x="411480" y="1280160"/>
+            <a:ext cx="4046220" cy="3017520"/>
           </a:xfrm>
           <a:prstGeom prst="roundRect">
             <a:avLst>
-              <a:gd name="adj" fmla="val 6957"/>
+              <a:gd name="adj" fmla="val 3030"/>
             </a:avLst>
           </a:prstGeom>
           <a:solidFill>
-            <a:srgbClr val="2A4A75"/>
-          </a:solidFill>
-          <a:ln w="6350">
+            <a:srgbClr val="E6F4EA"/>
+          </a:solidFill>
+          <a:ln w="25400">
             <a:solidFill>
               <a:srgbClr val="0E7C86"/>
             </a:solidFill>
@@ -6352,14 +7286,34 @@
       </p:sp>
       <p:sp>
         <p:nvSpPr>
-          <p:cNvPr id="9" name="Text 7"/>
-          <p:cNvSpPr/>
-          <p:nvPr/>
-        </p:nvSpPr>
-        <p:spPr>
-          <a:xfrm>
-            <a:off x="658368" y="2971800"/>
-            <a:ext cx="777240" cy="777240"/>
+          <p:cNvPr id="6" name="Shape 4"/>
+          <p:cNvSpPr/>
+          <p:nvPr/>
+        </p:nvSpPr>
+        <p:spPr>
+          <a:xfrm>
+            <a:off x="411480" y="1280160"/>
+            <a:ext cx="4046220" cy="502920"/>
+          </a:xfrm>
+          <a:prstGeom prst="rect">
+            <a:avLst/>
+          </a:prstGeom>
+          <a:solidFill>
+            <a:srgbClr val="0E7C86"/>
+          </a:solidFill>
+          <a:ln/>
+        </p:spPr>
+      </p:sp>
+      <p:sp>
+        <p:nvSpPr>
+          <p:cNvPr id="7" name="Text 5"/>
+          <p:cNvSpPr/>
+          <p:nvPr/>
+        </p:nvSpPr>
+        <p:spPr>
+          <a:xfrm>
+            <a:off x="411480" y="1280160"/>
+            <a:ext cx="4046220" cy="502920"/>
           </a:xfrm>
           <a:prstGeom prst="rect">
             <a:avLst/>
@@ -6371,34 +7325,187 @@
           <a:bodyPr wrap="square" rtlCol="0" anchor="ctr"/>
           <a:lstStyle/>
           <a:p>
-            <a:pPr indent="0" marL="0">
-              <a:buNone/>
-            </a:pPr>
-            <a:r>
-              <a:rPr lang="en-US" sz="3400" b="1" dirty="0">
-                <a:solidFill>
-                  <a:srgbClr val="E8A33D"/>
+            <a:pPr algn="ctr" indent="0" marL="0">
+              <a:buNone/>
+            </a:pPr>
+            <a:r>
+              <a:rPr lang="en-US" sz="1400" b="1" dirty="0">
+                <a:solidFill>
+                  <a:srgbClr val="FFFFFF"/>
                 </a:solidFill>
                 <a:latin typeface="Yu Gothic UI Semibold" pitchFamily="34" charset="0"/>
                 <a:ea typeface="Yu Gothic UI Semibold" pitchFamily="34" charset="-122"/>
                 <a:cs typeface="Yu Gothic UI Semibold" pitchFamily="34" charset="-120"/>
               </a:rPr>
-              <a:t>02</a:t>
-            </a:r>
-            <a:endParaRPr lang="en-US" sz="3400" dirty="0"/>
-          </a:p>
-        </p:txBody>
-      </p:sp>
-      <p:sp>
-        <p:nvSpPr>
-          <p:cNvPr id="10" name="Text 8"/>
-          <p:cNvSpPr/>
-          <p:nvPr/>
-        </p:nvSpPr>
-        <p:spPr>
-          <a:xfrm>
-            <a:off x="1508760" y="2944368"/>
-            <a:ext cx="6949440" cy="411480"/>
+              <a:t>✅ できていればOK</a:t>
+            </a:r>
+            <a:endParaRPr lang="en-US" sz="1400" dirty="0"/>
+          </a:p>
+        </p:txBody>
+      </p:sp>
+      <p:sp>
+        <p:nvSpPr>
+          <p:cNvPr id="8" name="Text 6"/>
+          <p:cNvSpPr/>
+          <p:nvPr/>
+        </p:nvSpPr>
+        <p:spPr>
+          <a:xfrm>
+            <a:off x="594360" y="1938528"/>
+            <a:ext cx="3680460" cy="2240280"/>
+          </a:xfrm>
+          <a:prstGeom prst="rect">
+            <a:avLst/>
+          </a:prstGeom>
+          <a:noFill/>
+          <a:ln/>
+        </p:spPr>
+        <p:txBody>
+          <a:bodyPr wrap="square" rtlCol="0" anchor="t"/>
+          <a:lstStyle/>
+          <a:p>
+            <a:pPr marL="342900" indent="-342900">
+              <a:spcAft>
+                <a:spcPts val="800"/>
+              </a:spcAft>
+              <a:buSzPct val="100000"/>
+              <a:buChar char="•"/>
+            </a:pPr>
+            <a:r>
+              <a:rPr lang="en-US" sz="1300" dirty="0">
+                <a:solidFill>
+                  <a:srgbClr val="1A1A1A"/>
+                </a:solidFill>
+                <a:latin typeface="Yu Gothic UI" pitchFamily="34" charset="0"/>
+                <a:ea typeface="Yu Gothic UI" pitchFamily="34" charset="-122"/>
+                <a:cs typeface="Yu Gothic UI" pitchFamily="34" charset="-120"/>
+              </a:rPr>
+              <a:t>画面の形式が1つ選べた + 選んだ理由が書けた</a:t>
+            </a:r>
+            <a:endParaRPr lang="en-US" sz="1300" dirty="0"/>
+          </a:p>
+          <a:p>
+            <a:pPr marL="342900" indent="-342900">
+              <a:spcAft>
+                <a:spcPts val="800"/>
+              </a:spcAft>
+              <a:buSzPct val="100000"/>
+              <a:buChar char="•"/>
+            </a:pPr>
+            <a:r>
+              <a:rPr lang="en-US" sz="1300" dirty="0">
+                <a:solidFill>
+                  <a:srgbClr val="1A1A1A"/>
+                </a:solidFill>
+                <a:latin typeface="Yu Gothic UI" pitchFamily="34" charset="0"/>
+                <a:ea typeface="Yu Gothic UI" pitchFamily="34" charset="-122"/>
+                <a:cs typeface="Yu Gothic UI" pitchFamily="34" charset="-120"/>
+              </a:rPr>
+              <a:t>独自の提案パターンが 3〜5個 書けた</a:t>
+            </a:r>
+            <a:endParaRPr lang="en-US" sz="1300" dirty="0"/>
+          </a:p>
+          <a:p>
+            <a:pPr marL="342900" indent="-342900">
+              <a:spcAft>
+                <a:spcPts val="800"/>
+              </a:spcAft>
+              <a:buSzPct val="100000"/>
+              <a:buChar char="•"/>
+            </a:pPr>
+            <a:r>
+              <a:rPr lang="en-US" sz="1300" dirty="0">
+                <a:solidFill>
+                  <a:srgbClr val="1A1A1A"/>
+                </a:solidFill>
+                <a:latin typeface="Yu Gothic UI" pitchFamily="34" charset="0"/>
+                <a:ea typeface="Yu Gothic UI" pitchFamily="34" charset="-122"/>
+                <a:cs typeface="Yu Gothic UI" pitchFamily="34" charset="-120"/>
+              </a:rPr>
+              <a:t>各パターンに 発動条件・提案内容・根拠 が揃った</a:t>
+            </a:r>
+            <a:endParaRPr lang="en-US" sz="1300" dirty="0"/>
+          </a:p>
+          <a:p>
+            <a:pPr marL="342900" indent="-342900">
+              <a:spcAft>
+                <a:spcPts val="800"/>
+              </a:spcAft>
+              <a:buSzPct val="100000"/>
+              <a:buChar char="•"/>
+            </a:pPr>
+            <a:r>
+              <a:rPr lang="en-US" sz="1300" dirty="0">
+                <a:solidFill>
+                  <a:srgbClr val="1A1A1A"/>
+                </a:solidFill>
+                <a:latin typeface="Yu Gothic UI" pitchFamily="34" charset="0"/>
+                <a:ea typeface="Yu Gothic UI" pitchFamily="34" charset="-122"/>
+                <a:cs typeface="Yu Gothic UI" pitchFamily="34" charset="-120"/>
+              </a:rPr>
+              <a:t>「これをAIに読ませたら うちらしい提案が出る」感覚がある</a:t>
+            </a:r>
+            <a:endParaRPr lang="en-US" sz="1300" dirty="0"/>
+          </a:p>
+        </p:txBody>
+      </p:sp>
+      <p:sp>
+        <p:nvSpPr>
+          <p:cNvPr id="9" name="Shape 7"/>
+          <p:cNvSpPr/>
+          <p:nvPr/>
+        </p:nvSpPr>
+        <p:spPr>
+          <a:xfrm>
+            <a:off x="4686300" y="1280160"/>
+            <a:ext cx="4046220" cy="3017520"/>
+          </a:xfrm>
+          <a:prstGeom prst="roundRect">
+            <a:avLst>
+              <a:gd name="adj" fmla="val 3030"/>
+            </a:avLst>
+          </a:prstGeom>
+          <a:solidFill>
+            <a:srgbClr val="FDECEA"/>
+          </a:solidFill>
+          <a:ln w="25400">
+            <a:solidFill>
+              <a:srgbClr val="C76B7A"/>
+            </a:solidFill>
+            <a:prstDash val="solid"/>
+          </a:ln>
+        </p:spPr>
+      </p:sp>
+      <p:sp>
+        <p:nvSpPr>
+          <p:cNvPr id="10" name="Shape 8"/>
+          <p:cNvSpPr/>
+          <p:nvPr/>
+        </p:nvSpPr>
+        <p:spPr>
+          <a:xfrm>
+            <a:off x="4686300" y="1280160"/>
+            <a:ext cx="4046220" cy="502920"/>
+          </a:xfrm>
+          <a:prstGeom prst="rect">
+            <a:avLst/>
+          </a:prstGeom>
+          <a:solidFill>
+            <a:srgbClr val="C76B7A"/>
+          </a:solidFill>
+          <a:ln/>
+        </p:spPr>
+      </p:sp>
+      <p:sp>
+        <p:nvSpPr>
+          <p:cNvPr id="11" name="Text 9"/>
+          <p:cNvSpPr/>
+          <p:nvPr/>
+        </p:nvSpPr>
+        <p:spPr>
+          <a:xfrm>
+            <a:off x="4686300" y="1280160"/>
+            <a:ext cx="4046220" cy="502920"/>
           </a:xfrm>
           <a:prstGeom prst="rect">
             <a:avLst/>
@@ -6410,11 +7517,11 @@
           <a:bodyPr wrap="square" rtlCol="0" anchor="ctr"/>
           <a:lstStyle/>
           <a:p>
-            <a:pPr indent="0" marL="0">
-              <a:buNone/>
-            </a:pPr>
-            <a:r>
-              <a:rPr lang="en-US" sz="1800" b="1" dirty="0">
+            <a:pPr algn="ctr" indent="0" marL="0">
+              <a:buNone/>
+            </a:pPr>
+            <a:r>
+              <a:rPr lang="en-US" sz="1400" b="1" dirty="0">
                 <a:solidFill>
                   <a:srgbClr val="FFFFFF"/>
                 </a:solidFill>
@@ -6422,22 +7529,22 @@
                 <a:ea typeface="Yu Gothic UI Semibold" pitchFamily="34" charset="-122"/>
                 <a:cs typeface="Yu Gothic UI Semibold" pitchFamily="34" charset="-120"/>
               </a:rPr>
-              <a:t>代理店の "らしさ" が入る土台</a:t>
-            </a:r>
-            <a:endParaRPr lang="en-US" sz="1800" dirty="0"/>
-          </a:p>
-        </p:txBody>
-      </p:sp>
-      <p:sp>
-        <p:nvSpPr>
-          <p:cNvPr id="11" name="Text 9"/>
-          <p:cNvSpPr/>
-          <p:nvPr/>
-        </p:nvSpPr>
-        <p:spPr>
-          <a:xfrm>
-            <a:off x="1508760" y="3374136"/>
-            <a:ext cx="6949440" cy="457200"/>
+              <a:t>⚠️ 漏れがあると</a:t>
+            </a:r>
+            <a:endParaRPr lang="en-US" sz="1400" dirty="0"/>
+          </a:p>
+        </p:txBody>
+      </p:sp>
+      <p:sp>
+        <p:nvSpPr>
+          <p:cNvPr id="12" name="Text 10"/>
+          <p:cNvSpPr/>
+          <p:nvPr/>
+        </p:nvSpPr>
+        <p:spPr>
+          <a:xfrm>
+            <a:off x="4869180" y="1938528"/>
+            <a:ext cx="3680460" cy="2240280"/>
           </a:xfrm>
           <a:prstGeom prst="rect">
             <a:avLst/>
@@ -6449,163 +7556,86 @@
           <a:bodyPr wrap="square" rtlCol="0" anchor="t"/>
           <a:lstStyle/>
           <a:p>
-            <a:pPr indent="0" marL="0">
-              <a:buNone/>
+            <a:pPr marL="342900" indent="-342900">
+              <a:spcAft>
+                <a:spcPts val="800"/>
+              </a:spcAft>
+              <a:buSzPct val="100000"/>
+              <a:buChar char="•"/>
             </a:pPr>
             <a:r>
               <a:rPr lang="en-US" sz="1300" dirty="0">
                 <a:solidFill>
-                  <a:srgbClr val="E6ECF3"/>
+                  <a:srgbClr val="1A1A1A"/>
                 </a:solidFill>
                 <a:latin typeface="Yu Gothic UI" pitchFamily="34" charset="0"/>
                 <a:ea typeface="Yu Gothic UI" pitchFamily="34" charset="-122"/>
                 <a:cs typeface="Yu Gothic UI" pitchFamily="34" charset="-120"/>
               </a:rPr>
-              <a:t>独自数値+独自アドバイスで、市販ツールにはない強みを反映できる状態に。</a:t>
+              <a:t>画面選びが曖昧 → コーディングで何を作るか決まらない</a:t>
             </a:r>
             <a:endParaRPr lang="en-US" sz="1300" dirty="0"/>
           </a:p>
-        </p:txBody>
-      </p:sp>
-      <p:sp>
-        <p:nvSpPr>
-          <p:cNvPr id="12" name="Shape 10"/>
-          <p:cNvSpPr/>
-          <p:nvPr/>
-        </p:nvSpPr>
-        <p:spPr>
-          <a:xfrm>
-            <a:off x="457200" y="4059936"/>
-            <a:ext cx="8229600" cy="1051560"/>
-          </a:xfrm>
-          <a:prstGeom prst="roundRect">
-            <a:avLst>
-              <a:gd name="adj" fmla="val 6957"/>
-            </a:avLst>
-          </a:prstGeom>
-          <a:solidFill>
-            <a:srgbClr val="2A4A75"/>
-          </a:solidFill>
-          <a:ln w="6350">
-            <a:solidFill>
-              <a:srgbClr val="0E7C86"/>
-            </a:solidFill>
-            <a:prstDash val="solid"/>
-          </a:ln>
-        </p:spPr>
-      </p:sp>
-      <p:sp>
-        <p:nvSpPr>
-          <p:cNvPr id="13" name="Text 11"/>
-          <p:cNvSpPr/>
-          <p:nvPr/>
-        </p:nvSpPr>
-        <p:spPr>
-          <a:xfrm>
-            <a:off x="658368" y="4224528"/>
-            <a:ext cx="777240" cy="777240"/>
-          </a:xfrm>
-          <a:prstGeom prst="rect">
-            <a:avLst/>
-          </a:prstGeom>
-          <a:noFill/>
-          <a:ln/>
-        </p:spPr>
-        <p:txBody>
-          <a:bodyPr wrap="square" rtlCol="0" anchor="ctr"/>
-          <a:lstStyle/>
-          <a:p>
-            <a:pPr indent="0" marL="0">
-              <a:buNone/>
-            </a:pPr>
-            <a:r>
-              <a:rPr lang="en-US" sz="3400" b="1" dirty="0">
-                <a:solidFill>
-                  <a:srgbClr val="E8A33D"/>
-                </a:solidFill>
-                <a:latin typeface="Yu Gothic UI Semibold" pitchFamily="34" charset="0"/>
-                <a:ea typeface="Yu Gothic UI Semibold" pitchFamily="34" charset="-122"/>
-                <a:cs typeface="Yu Gothic UI Semibold" pitchFamily="34" charset="-120"/>
-              </a:rPr>
-              <a:t>03</a:t>
-            </a:r>
-            <a:endParaRPr lang="en-US" sz="3400" dirty="0"/>
-          </a:p>
-        </p:txBody>
-      </p:sp>
-      <p:sp>
-        <p:nvSpPr>
-          <p:cNvPr id="14" name="Text 12"/>
-          <p:cNvSpPr/>
-          <p:nvPr/>
-        </p:nvSpPr>
-        <p:spPr>
-          <a:xfrm>
-            <a:off x="1508760" y="4197096"/>
-            <a:ext cx="6949440" cy="411480"/>
-          </a:xfrm>
-          <a:prstGeom prst="rect">
-            <a:avLst/>
-          </a:prstGeom>
-          <a:noFill/>
-          <a:ln/>
-        </p:spPr>
-        <p:txBody>
-          <a:bodyPr wrap="square" rtlCol="0" anchor="ctr"/>
-          <a:lstStyle/>
-          <a:p>
-            <a:pPr indent="0" marL="0">
-              <a:buNone/>
-            </a:pPr>
-            <a:r>
-              <a:rPr lang="en-US" sz="1800" b="1" dirty="0">
-                <a:solidFill>
-                  <a:srgbClr val="FFFFFF"/>
-                </a:solidFill>
-                <a:latin typeface="Yu Gothic UI Semibold" pitchFamily="34" charset="0"/>
-                <a:ea typeface="Yu Gothic UI Semibold" pitchFamily="34" charset="-122"/>
-                <a:cs typeface="Yu Gothic UI Semibold" pitchFamily="34" charset="-120"/>
-              </a:rPr>
-              <a:t>次はバイブコーディング</a:t>
-            </a:r>
-            <a:endParaRPr lang="en-US" sz="1800" dirty="0"/>
-          </a:p>
-        </p:txBody>
-      </p:sp>
-      <p:sp>
-        <p:nvSpPr>
-          <p:cNvPr id="15" name="Text 13"/>
-          <p:cNvSpPr/>
-          <p:nvPr/>
-        </p:nvSpPr>
-        <p:spPr>
-          <a:xfrm>
-            <a:off x="1508760" y="4626864"/>
-            <a:ext cx="6949440" cy="457200"/>
-          </a:xfrm>
-          <a:prstGeom prst="rect">
-            <a:avLst/>
-          </a:prstGeom>
-          <a:noFill/>
-          <a:ln/>
-        </p:spPr>
-        <p:txBody>
-          <a:bodyPr wrap="square" rtlCol="0" anchor="t"/>
-          <a:lstStyle/>
-          <a:p>
-            <a:pPr indent="0" marL="0">
-              <a:buNone/>
+          <a:p>
+            <a:pPr marL="342900" indent="-342900">
+              <a:spcAft>
+                <a:spcPts val="800"/>
+              </a:spcAft>
+              <a:buSzPct val="100000"/>
+              <a:buChar char="•"/>
             </a:pPr>
             <a:r>
               <a:rPr lang="en-US" sz="1300" dirty="0">
                 <a:solidFill>
-                  <a:srgbClr val="E6ECF3"/>
+                  <a:srgbClr val="1A1A1A"/>
                 </a:solidFill>
                 <a:latin typeface="Yu Gothic UI" pitchFamily="34" charset="0"/>
                 <a:ea typeface="Yu Gothic UI" pitchFamily="34" charset="-122"/>
                 <a:cs typeface="Yu Gothic UI" pitchFamily="34" charset="-120"/>
               </a:rPr>
-              <a:t>W2 で Gemini に「この設計通りに GAS書いて」と頼み、実装する。</a:t>
+              <a:t>独自パターンなし → AI 出力が汎用的、他社ツールと同じに</a:t>
+            </a:r>
+            <a:endParaRPr lang="en-US" sz="1300" dirty="0"/>
+          </a:p>
+          <a:p>
+            <a:pPr marL="342900" indent="-342900">
+              <a:spcAft>
+                <a:spcPts val="800"/>
+              </a:spcAft>
+              <a:buSzPct val="100000"/>
+              <a:buChar char="•"/>
+            </a:pPr>
+            <a:r>
+              <a:rPr lang="en-US" sz="1300" dirty="0">
+                <a:solidFill>
+                  <a:srgbClr val="1A1A1A"/>
+                </a:solidFill>
+                <a:latin typeface="Yu Gothic UI" pitchFamily="34" charset="0"/>
+                <a:ea typeface="Yu Gothic UI" pitchFamily="34" charset="-122"/>
+                <a:cs typeface="Yu Gothic UI" pitchFamily="34" charset="-120"/>
+              </a:rPr>
+              <a:t>根拠が空欄 → 「なぜこの提案?」を お客様に説明できない</a:t>
+            </a:r>
+            <a:endParaRPr lang="en-US" sz="1300" dirty="0"/>
+          </a:p>
+          <a:p>
+            <a:pPr marL="342900" indent="-342900">
+              <a:spcAft>
+                <a:spcPts val="800"/>
+              </a:spcAft>
+              <a:buSzPct val="100000"/>
+              <a:buChar char="•"/>
+            </a:pPr>
+            <a:r>
+              <a:rPr lang="en-US" sz="1300" dirty="0">
+                <a:solidFill>
+                  <a:srgbClr val="1A1A1A"/>
+                </a:solidFill>
+                <a:latin typeface="Yu Gothic UI" pitchFamily="34" charset="0"/>
+                <a:ea typeface="Yu Gothic UI" pitchFamily="34" charset="-122"/>
+                <a:cs typeface="Yu Gothic UI" pitchFamily="34" charset="-120"/>
+              </a:rPr>
+              <a:t>コードに提案を書き込む設計 → 更新するたびに開発者呼ぶハメに</a:t>
             </a:r>
             <a:endParaRPr lang="en-US" sz="1300" dirty="0"/>
           </a:p>
